--- a/presentation.pptx
+++ b/presentation.pptx
@@ -1442,8 +1442,8 @@
         </p:nvSpPr>
         <p:spPr>
           <a:xfrm>
-            <a:off x="6217920" y="-1097280"/>
-            <a:ext cx="4572000" cy="4572000"/>
+            <a:off x="6400800" y="-914400"/>
+            <a:ext cx="4114800" cy="4114800"/>
           </a:xfrm>
           <a:prstGeom prst="ellipse">
             <a:avLst/>
@@ -1471,8 +1471,8 @@
         </p:nvSpPr>
         <p:spPr>
           <a:xfrm>
-            <a:off x="6858000" y="-365760"/>
-            <a:ext cx="2926080" cy="2926080"/>
+            <a:off x="7132320" y="-182880"/>
+            <a:ext cx="2560320" cy="2560320"/>
           </a:xfrm>
           <a:prstGeom prst="ellipse">
             <a:avLst/>
@@ -1501,7 +1501,7 @@
         <p:spPr>
           <a:xfrm>
             <a:off x="548640" y="1188720"/>
-            <a:ext cx="2194560" cy="329184"/>
+            <a:ext cx="2377440" cy="329184"/>
           </a:xfrm>
           <a:prstGeom prst="rect">
             <a:avLst/>
@@ -1526,7 +1526,7 @@
         <p:spPr>
           <a:xfrm>
             <a:off x="548640" y="1188720"/>
-            <a:ext cx="2194560" cy="329184"/>
+            <a:ext cx="2377440" cy="329184"/>
           </a:xfrm>
           <a:prstGeom prst="rect">
             <a:avLst/>
@@ -1542,14 +1542,14 @@
               <a:buNone/>
             </a:pPr>
             <a:r>
-              <a:rPr lang="en-US" sz="1100" b="1" dirty="0">
+              <a:rPr lang="en-US" sz="1000" b="1" dirty="0">
                 <a:solidFill>
                   <a:srgbClr val="FFFFFF"/>
                 </a:solidFill>
               </a:rPr>
-              <a:t>C++ Assignment</a:t>
-            </a:r>
-            <a:endParaRPr lang="en-US" sz="1100" dirty="0"/>
+              <a:t>C++ Individual Assignment</a:t>
+            </a:r>
+            <a:endParaRPr lang="en-US" sz="1000" dirty="0"/>
           </a:p>
         </p:txBody>
       </p:sp>
@@ -1561,20 +1561,20 @@
         </p:nvSpPr>
         <p:spPr>
           <a:xfrm>
-            <a:off x="548640" y="1691640"/>
-            <a:ext cx="7863840" cy="1737360"/>
-          </a:xfrm>
-          <a:prstGeom prst="rect">
-            <a:avLst/>
-          </a:prstGeom>
-          <a:noFill/>
-          <a:ln/>
-        </p:spPr>
-        <p:txBody>
-          <a:bodyPr wrap="square" rtlCol="0" anchor="t"/>
-          <a:lstStyle/>
-          <a:p>
-            <a:pPr algn="l" indent="0" marL="0">
+            <a:off x="548640" y="1664208"/>
+            <a:ext cx="7315200" cy="1691640"/>
+          </a:xfrm>
+          <a:prstGeom prst="rect">
+            <a:avLst/>
+          </a:prstGeom>
+          <a:noFill/>
+          <a:ln/>
+        </p:spPr>
+        <p:txBody>
+          <a:bodyPr wrap="square" rtlCol="0" anchor="ctr"/>
+          <a:lstStyle/>
+          <a:p>
+            <a:pPr indent="0" marL="0">
               <a:buNone/>
             </a:pPr>
             <a:r>
@@ -1591,7 +1591,7 @@
             <a:endParaRPr lang="en-US" sz="4400" dirty="0"/>
           </a:p>
           <a:p>
-            <a:pPr algn="l" indent="0" marL="0">
+            <a:pPr indent="0" marL="0">
               <a:buNone/>
             </a:pPr>
             <a:r>
@@ -1617,8 +1617,8 @@
         </p:nvSpPr>
         <p:spPr>
           <a:xfrm>
-            <a:off x="548640" y="3520440"/>
-            <a:ext cx="6400800" cy="457200"/>
+            <a:off x="548640" y="3493008"/>
+            <a:ext cx="6858000" cy="457200"/>
           </a:xfrm>
           <a:prstGeom prst="rect">
             <a:avLst/>
@@ -1630,11 +1630,11 @@
           <a:bodyPr wrap="square" rtlCol="0" anchor="ctr"/>
           <a:lstStyle/>
           <a:p>
-            <a:pPr algn="l" indent="0" marL="0">
-              <a:buNone/>
-            </a:pPr>
-            <a:r>
-              <a:rPr lang="en-US" sz="1600" dirty="0">
+            <a:pPr indent="0" marL="0">
+              <a:buNone/>
+            </a:pPr>
+            <a:r>
+              <a:rPr lang="en-US" sz="1500" dirty="0">
                 <a:solidFill>
                   <a:srgbClr val="93C5FD"/>
                 </a:solidFill>
@@ -1642,9 +1642,9 @@
                 <a:ea typeface="Calibri" pitchFamily="34" charset="-122"/>
                 <a:cs typeface="Calibri" pitchFamily="34" charset="-120"/>
               </a:rPr>
-              <a:t>Console Application using C++ OOP &amp; STL</a:t>
-            </a:r>
-            <a:endParaRPr lang="en-US" sz="1600" dirty="0"/>
+              <a:t>OOP  •  3 STL Containers  •  3 STL Algorithms  •  Bonus</a:t>
+            </a:r>
+            <a:endParaRPr lang="en-US" sz="1500" dirty="0"/>
           </a:p>
         </p:txBody>
       </p:sp>
@@ -1702,14 +1702,14 @@
               <a:buNone/>
             </a:pPr>
             <a:r>
-              <a:rPr lang="en-US" sz="1200" dirty="0">
+              <a:rPr lang="en-US" sz="1100" dirty="0">
                 <a:solidFill>
                   <a:srgbClr val="94A3B8"/>
                 </a:solidFill>
               </a:rPr>
-              <a:t>Individual Assignment  •  C++ Programming</a:t>
-            </a:r>
-            <a:endParaRPr lang="en-US" sz="1200" dirty="0"/>
+              <a:t>iostream  |  vector  |  map  |  set  |  algorithm  |  string  |  utility</a:t>
+            </a:r>
+            <a:endParaRPr lang="en-US" sz="1100" dirty="0"/>
           </a:p>
         </p:txBody>
       </p:sp>
@@ -1778,7 +1778,7 @@
         </p:nvSpPr>
         <p:spPr>
           <a:xfrm>
-            <a:off x="320040" y="274320"/>
+            <a:off x="320040" y="256032"/>
             <a:ext cx="8503920" cy="502920"/>
           </a:xfrm>
           <a:prstGeom prst="rect">
@@ -1803,7 +1803,7 @@
                 <a:ea typeface="Calibri" pitchFamily="34" charset="-122"/>
                 <a:cs typeface="Calibri" pitchFamily="34" charset="-120"/>
               </a:rPr>
-              <a:t>Objectives &amp; Learning Outcomes</a:t>
+              <a:t>OOP Class Design</a:t>
             </a:r>
             <a:endParaRPr lang="en-US" sz="2600" dirty="0"/>
           </a:p>
@@ -1817,7 +1817,7 @@
         </p:nvSpPr>
         <p:spPr>
           <a:xfrm>
-            <a:off x="320040" y="841248"/>
+            <a:off x="320040" y="822960"/>
             <a:ext cx="8503920" cy="36576"/>
           </a:xfrm>
           <a:prstGeom prst="rect">
@@ -1842,8 +1842,493 @@
         </p:nvSpPr>
         <p:spPr>
           <a:xfrm>
-            <a:off x="320040" y="1005840"/>
-            <a:ext cx="3931920" cy="3566160"/>
+            <a:off x="3017520" y="960120"/>
+            <a:ext cx="3108960" cy="1371600"/>
+          </a:xfrm>
+          <a:prstGeom prst="rect">
+            <a:avLst/>
+          </a:prstGeom>
+          <a:solidFill>
+            <a:srgbClr val="1B2A4A"/>
+          </a:solidFill>
+          <a:ln w="12700">
+            <a:solidFill>
+              <a:srgbClr val="1B2A4A"/>
+            </a:solidFill>
+            <a:prstDash val="solid"/>
+          </a:ln>
+          <a:effectLst>
+            <a:outerShdw sx="100000" sy="100000" kx="0" ky="0" algn="bl" rotWithShape="0" blurRad="101600" dist="38100" dir="8100000">
+              <a:srgbClr val="000000">
+                <a:alpha val="12000"/>
+              </a:srgbClr>
+            </a:outerShdw>
+          </a:effectLst>
+        </p:spPr>
+      </p:sp>
+      <p:sp>
+        <p:nvSpPr>
+          <p:cNvPr id="6" name="Text 4"/>
+          <p:cNvSpPr/>
+          <p:nvPr/>
+        </p:nvSpPr>
+        <p:spPr>
+          <a:xfrm>
+            <a:off x="3017520" y="960120"/>
+            <a:ext cx="3108960" cy="347472"/>
+          </a:xfrm>
+          <a:prstGeom prst="rect">
+            <a:avLst/>
+          </a:prstGeom>
+          <a:noFill/>
+          <a:ln/>
+        </p:spPr>
+        <p:txBody>
+          <a:bodyPr wrap="square" lIns="0" tIns="0" rIns="0" bIns="0" rtlCol="0" anchor="ctr"/>
+          <a:lstStyle/>
+          <a:p>
+            <a:pPr algn="ctr" indent="0" marL="0">
+              <a:buNone/>
+            </a:pPr>
+            <a:r>
+              <a:rPr lang="en-US" sz="1300" b="1" dirty="0">
+                <a:solidFill>
+                  <a:srgbClr val="FFFFFF"/>
+                </a:solidFill>
+              </a:rPr>
+              <a:t>Person  (Base)</a:t>
+            </a:r>
+            <a:endParaRPr lang="en-US" sz="1300" dirty="0"/>
+          </a:p>
+        </p:txBody>
+      </p:sp>
+      <p:sp>
+        <p:nvSpPr>
+          <p:cNvPr id="7" name="Shape 5"/>
+          <p:cNvSpPr/>
+          <p:nvPr/>
+        </p:nvSpPr>
+        <p:spPr>
+          <a:xfrm>
+            <a:off x="3017520" y="1307592"/>
+            <a:ext cx="3108960" cy="18288"/>
+          </a:xfrm>
+          <a:prstGeom prst="rect">
+            <a:avLst/>
+          </a:prstGeom>
+          <a:solidFill>
+            <a:srgbClr val="FFFFFF">
+              <a:alpha val="40000"/>
+            </a:srgbClr>
+          </a:solidFill>
+          <a:ln w="12700">
+            <a:solidFill>
+              <a:srgbClr val="FFFFFF">
+                <a:alpha val="40000"/>
+              </a:srgbClr>
+            </a:solidFill>
+            <a:prstDash val="solid"/>
+          </a:ln>
+        </p:spPr>
+      </p:sp>
+      <p:sp>
+        <p:nvSpPr>
+          <p:cNvPr id="8" name="Text 6"/>
+          <p:cNvSpPr/>
+          <p:nvPr/>
+        </p:nvSpPr>
+        <p:spPr>
+          <a:xfrm>
+            <a:off x="3154680" y="1371600"/>
+            <a:ext cx="2834640" cy="237744"/>
+          </a:xfrm>
+          <a:prstGeom prst="rect">
+            <a:avLst/>
+          </a:prstGeom>
+          <a:noFill/>
+          <a:ln/>
+        </p:spPr>
+        <p:txBody>
+          <a:bodyPr wrap="square" rtlCol="0" anchor="ctr"/>
+          <a:lstStyle/>
+          <a:p>
+            <a:pPr indent="0" marL="0">
+              <a:buNone/>
+            </a:pPr>
+            <a:r>
+              <a:rPr lang="en-US" sz="1100" dirty="0">
+                <a:solidFill>
+                  <a:srgbClr val="BAE6FD"/>
+                </a:solidFill>
+                <a:latin typeface="Consolas" pitchFamily="34" charset="0"/>
+                <a:ea typeface="Consolas" pitchFamily="34" charset="-122"/>
+                <a:cs typeface="Consolas" pitchFamily="34" charset="-120"/>
+              </a:rPr>
+              <a:t># name : string</a:t>
+            </a:r>
+            <a:endParaRPr lang="en-US" sz="1100" dirty="0"/>
+          </a:p>
+        </p:txBody>
+      </p:sp>
+      <p:sp>
+        <p:nvSpPr>
+          <p:cNvPr id="9" name="Text 7"/>
+          <p:cNvSpPr/>
+          <p:nvPr/>
+        </p:nvSpPr>
+        <p:spPr>
+          <a:xfrm>
+            <a:off x="3154680" y="1627632"/>
+            <a:ext cx="2834640" cy="594360"/>
+          </a:xfrm>
+          <a:prstGeom prst="rect">
+            <a:avLst/>
+          </a:prstGeom>
+          <a:noFill/>
+          <a:ln/>
+        </p:spPr>
+        <p:txBody>
+          <a:bodyPr wrap="square" rtlCol="0" anchor="ctr"/>
+          <a:lstStyle/>
+          <a:p>
+            <a:pPr indent="0" marL="0">
+              <a:buNone/>
+            </a:pPr>
+            <a:r>
+              <a:rPr lang="en-US" sz="1100" dirty="0">
+                <a:solidFill>
+                  <a:srgbClr val="FFFFFF"/>
+                </a:solidFill>
+                <a:latin typeface="Consolas" pitchFamily="34" charset="0"/>
+                <a:ea typeface="Consolas" pitchFamily="34" charset="-122"/>
+                <a:cs typeface="Consolas" pitchFamily="34" charset="-120"/>
+              </a:rPr>
+              <a:t>+ getName() : string</a:t>
+            </a:r>
+            <a:endParaRPr lang="en-US" sz="1100" dirty="0"/>
+          </a:p>
+          <a:p>
+            <a:pPr indent="0" marL="0">
+              <a:buNone/>
+            </a:pPr>
+            <a:r>
+              <a:rPr lang="en-US" sz="1100" dirty="0">
+                <a:solidFill>
+                  <a:srgbClr val="FFFFFF"/>
+                </a:solidFill>
+                <a:latin typeface="Consolas" pitchFamily="34" charset="0"/>
+                <a:ea typeface="Consolas" pitchFamily="34" charset="-122"/>
+                <a:cs typeface="Consolas" pitchFamily="34" charset="-120"/>
+              </a:rPr>
+              <a:t>+ ~Person()  [virtual]</a:t>
+            </a:r>
+            <a:endParaRPr lang="en-US" sz="1100" dirty="0"/>
+          </a:p>
+        </p:txBody>
+      </p:sp>
+      <p:sp>
+        <p:nvSpPr>
+          <p:cNvPr id="10" name="Shape 8"/>
+          <p:cNvSpPr/>
+          <p:nvPr/>
+        </p:nvSpPr>
+        <p:spPr>
+          <a:xfrm>
+            <a:off x="4572000" y="2331720"/>
+            <a:ext cx="0" cy="502920"/>
+          </a:xfrm>
+          <a:prstGeom prst="line">
+            <a:avLst/>
+          </a:prstGeom>
+          <a:noFill/>
+          <a:ln w="31750">
+            <a:solidFill>
+              <a:srgbClr val="2563EB"/>
+            </a:solidFill>
+            <a:prstDash val="solid"/>
+          </a:ln>
+        </p:spPr>
+      </p:sp>
+      <p:sp>
+        <p:nvSpPr>
+          <p:cNvPr id="11" name="Text 9"/>
+          <p:cNvSpPr/>
+          <p:nvPr/>
+        </p:nvSpPr>
+        <p:spPr>
+          <a:xfrm>
+            <a:off x="4617720" y="2441448"/>
+            <a:ext cx="1097280" cy="237744"/>
+          </a:xfrm>
+          <a:prstGeom prst="rect">
+            <a:avLst/>
+          </a:prstGeom>
+          <a:noFill/>
+          <a:ln/>
+        </p:spPr>
+        <p:txBody>
+          <a:bodyPr wrap="square" rtlCol="0" anchor="ctr"/>
+          <a:lstStyle/>
+          <a:p>
+            <a:pPr indent="0" marL="0">
+              <a:buNone/>
+            </a:pPr>
+            <a:r>
+              <a:rPr lang="en-US" sz="1000" i="1" dirty="0">
+                <a:solidFill>
+                  <a:srgbClr val="64748B"/>
+                </a:solidFill>
+              </a:rPr>
+              <a:t>inherits</a:t>
+            </a:r>
+            <a:endParaRPr lang="en-US" sz="1000" dirty="0"/>
+          </a:p>
+        </p:txBody>
+      </p:sp>
+      <p:sp>
+        <p:nvSpPr>
+          <p:cNvPr id="12" name="Shape 10"/>
+          <p:cNvSpPr/>
+          <p:nvPr/>
+        </p:nvSpPr>
+        <p:spPr>
+          <a:xfrm>
+            <a:off x="4462272" y="2788920"/>
+            <a:ext cx="219456" cy="109728"/>
+          </a:xfrm>
+          <a:prstGeom prst="rect">
+            <a:avLst/>
+          </a:prstGeom>
+          <a:solidFill>
+            <a:srgbClr val="2563EB"/>
+          </a:solidFill>
+          <a:ln w="12700">
+            <a:solidFill>
+              <a:srgbClr val="2563EB"/>
+            </a:solidFill>
+            <a:prstDash val="solid"/>
+          </a:ln>
+        </p:spPr>
+      </p:sp>
+      <p:sp>
+        <p:nvSpPr>
+          <p:cNvPr id="13" name="Shape 11"/>
+          <p:cNvSpPr/>
+          <p:nvPr/>
+        </p:nvSpPr>
+        <p:spPr>
+          <a:xfrm>
+            <a:off x="1828800" y="2898648"/>
+            <a:ext cx="5394960" cy="1965960"/>
+          </a:xfrm>
+          <a:prstGeom prst="rect">
+            <a:avLst/>
+          </a:prstGeom>
+          <a:solidFill>
+            <a:srgbClr val="2563EB"/>
+          </a:solidFill>
+          <a:ln w="12700">
+            <a:solidFill>
+              <a:srgbClr val="2563EB"/>
+            </a:solidFill>
+            <a:prstDash val="solid"/>
+          </a:ln>
+          <a:effectLst>
+            <a:outerShdw sx="100000" sy="100000" kx="0" ky="0" algn="bl" rotWithShape="0" blurRad="101600" dist="38100" dir="8100000">
+              <a:srgbClr val="000000">
+                <a:alpha val="12000"/>
+              </a:srgbClr>
+            </a:outerShdw>
+          </a:effectLst>
+        </p:spPr>
+      </p:sp>
+      <p:sp>
+        <p:nvSpPr>
+          <p:cNvPr id="14" name="Text 12"/>
+          <p:cNvSpPr/>
+          <p:nvPr/>
+        </p:nvSpPr>
+        <p:spPr>
+          <a:xfrm>
+            <a:off x="1828800" y="2898648"/>
+            <a:ext cx="5394960" cy="347472"/>
+          </a:xfrm>
+          <a:prstGeom prst="rect">
+            <a:avLst/>
+          </a:prstGeom>
+          <a:noFill/>
+          <a:ln/>
+        </p:spPr>
+        <p:txBody>
+          <a:bodyPr wrap="square" lIns="0" tIns="0" rIns="0" bIns="0" rtlCol="0" anchor="ctr"/>
+          <a:lstStyle/>
+          <a:p>
+            <a:pPr algn="ctr" indent="0" marL="0">
+              <a:buNone/>
+            </a:pPr>
+            <a:r>
+              <a:rPr lang="en-US" sz="1300" b="1" dirty="0">
+                <a:solidFill>
+                  <a:srgbClr val="FFFFFF"/>
+                </a:solidFill>
+              </a:rPr>
+              <a:t>Student  (Derived)</a:t>
+            </a:r>
+            <a:endParaRPr lang="en-US" sz="1300" dirty="0"/>
+          </a:p>
+        </p:txBody>
+      </p:sp>
+      <p:sp>
+        <p:nvSpPr>
+          <p:cNvPr id="15" name="Shape 13"/>
+          <p:cNvSpPr/>
+          <p:nvPr/>
+        </p:nvSpPr>
+        <p:spPr>
+          <a:xfrm>
+            <a:off x="1828800" y="3246120"/>
+            <a:ext cx="5394960" cy="18288"/>
+          </a:xfrm>
+          <a:prstGeom prst="rect">
+            <a:avLst/>
+          </a:prstGeom>
+          <a:solidFill>
+            <a:srgbClr val="FFFFFF">
+              <a:alpha val="40000"/>
+            </a:srgbClr>
+          </a:solidFill>
+          <a:ln w="12700">
+            <a:solidFill>
+              <a:srgbClr val="FFFFFF">
+                <a:alpha val="40000"/>
+              </a:srgbClr>
+            </a:solidFill>
+            <a:prstDash val="solid"/>
+          </a:ln>
+        </p:spPr>
+      </p:sp>
+      <p:sp>
+        <p:nvSpPr>
+          <p:cNvPr id="16" name="Text 14"/>
+          <p:cNvSpPr/>
+          <p:nvPr/>
+        </p:nvSpPr>
+        <p:spPr>
+          <a:xfrm>
+            <a:off x="1965960" y="3310128"/>
+            <a:ext cx="5120640" cy="256032"/>
+          </a:xfrm>
+          <a:prstGeom prst="rect">
+            <a:avLst/>
+          </a:prstGeom>
+          <a:noFill/>
+          <a:ln/>
+        </p:spPr>
+        <p:txBody>
+          <a:bodyPr wrap="square" rtlCol="0" anchor="ctr"/>
+          <a:lstStyle/>
+          <a:p>
+            <a:pPr indent="0" marL="0">
+              <a:buNone/>
+            </a:pPr>
+            <a:r>
+              <a:rPr lang="en-US" sz="1100" dirty="0">
+                <a:solidFill>
+                  <a:srgbClr val="BAE6FD"/>
+                </a:solidFill>
+                <a:latin typeface="Consolas" pitchFamily="34" charset="0"/>
+                <a:ea typeface="Consolas" pitchFamily="34" charset="-122"/>
+                <a:cs typeface="Consolas" pitchFamily="34" charset="-120"/>
+              </a:rPr>
+              <a:t>- id : int  |  - gpa : double  |  - courses : set&lt;string&gt;</a:t>
+            </a:r>
+            <a:endParaRPr lang="en-US" sz="1100" dirty="0"/>
+          </a:p>
+        </p:txBody>
+      </p:sp>
+      <p:sp>
+        <p:nvSpPr>
+          <p:cNvPr id="17" name="Text 15"/>
+          <p:cNvSpPr/>
+          <p:nvPr/>
+        </p:nvSpPr>
+        <p:spPr>
+          <a:xfrm>
+            <a:off x="1965960" y="3611880"/>
+            <a:ext cx="5120640" cy="1143000"/>
+          </a:xfrm>
+          <a:prstGeom prst="rect">
+            <a:avLst/>
+          </a:prstGeom>
+          <a:noFill/>
+          <a:ln/>
+        </p:spPr>
+        <p:txBody>
+          <a:bodyPr wrap="square" rtlCol="0" anchor="ctr"/>
+          <a:lstStyle/>
+          <a:p>
+            <a:pPr indent="0" marL="0">
+              <a:buNone/>
+            </a:pPr>
+            <a:r>
+              <a:rPr lang="en-US" sz="1100" dirty="0">
+                <a:solidFill>
+                  <a:srgbClr val="FFFFFF"/>
+                </a:solidFill>
+                <a:latin typeface="Consolas" pitchFamily="34" charset="0"/>
+                <a:ea typeface="Consolas" pitchFamily="34" charset="-122"/>
+                <a:cs typeface="Consolas" pitchFamily="34" charset="-120"/>
+              </a:rPr>
+              <a:t>+ enrollCourse(c) : bool   // courses.insert(c).second</a:t>
+            </a:r>
+            <a:endParaRPr lang="en-US" sz="1100" dirty="0"/>
+          </a:p>
+          <a:p>
+            <a:pPr indent="0" marL="0">
+              <a:buNone/>
+            </a:pPr>
+            <a:r>
+              <a:rPr lang="en-US" sz="1100" dirty="0">
+                <a:solidFill>
+                  <a:srgbClr val="FFFFFF"/>
+                </a:solidFill>
+                <a:latin typeface="Consolas" pitchFamily="34" charset="0"/>
+                <a:ea typeface="Consolas" pitchFamily="34" charset="-122"/>
+                <a:cs typeface="Consolas" pitchFamily="34" charset="-120"/>
+              </a:rPr>
+              <a:t>+ display() : void</a:t>
+            </a:r>
+            <a:endParaRPr lang="en-US" sz="1100" dirty="0"/>
+          </a:p>
+          <a:p>
+            <a:pPr indent="0" marL="0">
+              <a:buNone/>
+            </a:pPr>
+            <a:r>
+              <a:rPr lang="en-US" sz="1100" dirty="0">
+                <a:solidFill>
+                  <a:srgbClr val="FFFFFF"/>
+                </a:solidFill>
+                <a:latin typeface="Consolas" pitchFamily="34" charset="0"/>
+                <a:ea typeface="Consolas" pitchFamily="34" charset="-122"/>
+                <a:cs typeface="Consolas" pitchFamily="34" charset="-120"/>
+              </a:rPr>
+              <a:t>+ getId() / getGpa() / getCourses()</a:t>
+            </a:r>
+            <a:endParaRPr lang="en-US" sz="1100" dirty="0"/>
+          </a:p>
+        </p:txBody>
+      </p:sp>
+      <p:sp>
+        <p:nvSpPr>
+          <p:cNvPr id="18" name="Shape 16"/>
+          <p:cNvSpPr/>
+          <p:nvPr/>
+        </p:nvSpPr>
+        <p:spPr>
+          <a:xfrm>
+            <a:off x="7406640" y="960120"/>
+            <a:ext cx="1600200" cy="3904488"/>
           </a:xfrm>
           <a:prstGeom prst="rect">
             <a:avLst/>
@@ -1868,24 +2353,24 @@
       </p:sp>
       <p:sp>
         <p:nvSpPr>
-          <p:cNvPr id="6" name="Shape 4"/>
-          <p:cNvSpPr/>
-          <p:nvPr/>
-        </p:nvSpPr>
-        <p:spPr>
-          <a:xfrm>
-            <a:off x="320040" y="1005840"/>
-            <a:ext cx="3931920" cy="411480"/>
+          <p:cNvPr id="19" name="Shape 17"/>
+          <p:cNvSpPr/>
+          <p:nvPr/>
+        </p:nvSpPr>
+        <p:spPr>
+          <a:xfrm>
+            <a:off x="7406640" y="960120"/>
+            <a:ext cx="1600200" cy="347472"/>
           </a:xfrm>
           <a:prstGeom prst="rect">
             <a:avLst/>
           </a:prstGeom>
           <a:solidFill>
-            <a:srgbClr val="1B2A4A"/>
+            <a:srgbClr val="0F172A"/>
           </a:solidFill>
           <a:ln w="12700">
             <a:solidFill>
-              <a:srgbClr val="1B2A4A"/>
+              <a:srgbClr val="0F172A"/>
             </a:solidFill>
             <a:prstDash val="solid"/>
           </a:ln>
@@ -1893,50 +2378,50 @@
       </p:sp>
       <p:sp>
         <p:nvSpPr>
-          <p:cNvPr id="7" name="Text 5"/>
-          <p:cNvSpPr/>
-          <p:nvPr/>
-        </p:nvSpPr>
-        <p:spPr>
-          <a:xfrm>
-            <a:off x="457200" y="1005840"/>
-            <a:ext cx="3657600" cy="411480"/>
-          </a:xfrm>
-          <a:prstGeom prst="rect">
-            <a:avLst/>
-          </a:prstGeom>
-          <a:noFill/>
-          <a:ln/>
-        </p:spPr>
-        <p:txBody>
-          <a:bodyPr wrap="square" rtlCol="0" anchor="ctr"/>
-          <a:lstStyle/>
-          <a:p>
-            <a:pPr indent="0" marL="0">
-              <a:buNone/>
-            </a:pPr>
-            <a:r>
-              <a:rPr lang="en-US" sz="1400" b="1" dirty="0">
+          <p:cNvPr id="20" name="Text 18"/>
+          <p:cNvSpPr/>
+          <p:nvPr/>
+        </p:nvSpPr>
+        <p:spPr>
+          <a:xfrm>
+            <a:off x="7406640" y="960120"/>
+            <a:ext cx="1600200" cy="347472"/>
+          </a:xfrm>
+          <a:prstGeom prst="rect">
+            <a:avLst/>
+          </a:prstGeom>
+          <a:noFill/>
+          <a:ln/>
+        </p:spPr>
+        <p:txBody>
+          <a:bodyPr wrap="square" lIns="0" tIns="0" rIns="0" bIns="0" rtlCol="0" anchor="ctr"/>
+          <a:lstStyle/>
+          <a:p>
+            <a:pPr algn="ctr" indent="0" marL="0">
+              <a:buNone/>
+            </a:pPr>
+            <a:r>
+              <a:rPr lang="en-US" sz="950" b="1" dirty="0">
                 <a:solidFill>
                   <a:srgbClr val="FFFFFF"/>
                 </a:solidFill>
               </a:rPr>
-              <a:t>🎯  Objective</a:t>
-            </a:r>
-            <a:endParaRPr lang="en-US" sz="1400" dirty="0"/>
-          </a:p>
-        </p:txBody>
-      </p:sp>
-      <p:sp>
-        <p:nvSpPr>
-          <p:cNvPr id="8" name="Text 6"/>
-          <p:cNvSpPr/>
-          <p:nvPr/>
-        </p:nvSpPr>
-        <p:spPr>
-          <a:xfrm>
-            <a:off x="457200" y="1508760"/>
-            <a:ext cx="3657600" cy="2926080"/>
+              <a:t>StudentSystem</a:t>
+            </a:r>
+            <a:endParaRPr lang="en-US" sz="950" dirty="0"/>
+          </a:p>
+        </p:txBody>
+      </p:sp>
+      <p:sp>
+        <p:nvSpPr>
+          <p:cNvPr id="21" name="Text 19"/>
+          <p:cNvSpPr/>
+          <p:nvPr/>
+        </p:nvSpPr>
+        <p:spPr>
+          <a:xfrm>
+            <a:off x="7452360" y="1371600"/>
+            <a:ext cx="1508760" cy="3383280"/>
           </a:xfrm>
           <a:prstGeom prst="rect">
             <a:avLst/>
@@ -1952,261 +2437,193 @@
               <a:buNone/>
             </a:pPr>
             <a:r>
-              <a:rPr lang="en-US" sz="1300" dirty="0">
+              <a:rPr lang="en-US" sz="850" dirty="0">
                 <a:solidFill>
                   <a:srgbClr val="1E293B"/>
                 </a:solidFill>
-                <a:latin typeface="Calibri" pitchFamily="34" charset="0"/>
-                <a:ea typeface="Calibri" pitchFamily="34" charset="-122"/>
-                <a:cs typeface="Calibri" pitchFamily="34" charset="-120"/>
-              </a:rPr>
-              <a:t>Develop a C++ console application that manages students and their enrolled courses, applying:</a:t>
-            </a:r>
-            <a:endParaRPr lang="en-US" sz="1300" dirty="0"/>
-          </a:p>
-          <a:p>
-            <a:pPr indent="0" marL="0">
-              <a:buNone/>
-            </a:pPr>
-            <a:endParaRPr lang="en-US" sz="1300" dirty="0"/>
-          </a:p>
-          <a:p>
-            <a:pPr indent="0" marL="0">
-              <a:buNone/>
-            </a:pPr>
-            <a:r>
-              <a:rPr lang="en-US" sz="1300" dirty="0">
+                <a:latin typeface="Consolas" pitchFamily="34" charset="0"/>
+                <a:ea typeface="Consolas" pitchFamily="34" charset="-122"/>
+                <a:cs typeface="Consolas" pitchFamily="34" charset="-120"/>
+              </a:rPr>
+              <a:t>- students</a:t>
+            </a:r>
+            <a:endParaRPr lang="en-US" sz="850" dirty="0"/>
+          </a:p>
+          <a:p>
+            <a:pPr indent="0" marL="0">
+              <a:buNone/>
+            </a:pPr>
+            <a:r>
+              <a:rPr lang="en-US" sz="850" dirty="0">
                 <a:solidFill>
                   <a:srgbClr val="1E293B"/>
                 </a:solidFill>
-                <a:latin typeface="Calibri" pitchFamily="34" charset="0"/>
-                <a:ea typeface="Calibri" pitchFamily="34" charset="-122"/>
-                <a:cs typeface="Calibri" pitchFamily="34" charset="-120"/>
-              </a:rPr>
-              <a:t>• C++ Basics</a:t>
-            </a:r>
-            <a:endParaRPr lang="en-US" sz="1300" dirty="0"/>
-          </a:p>
-          <a:p>
-            <a:pPr indent="0" marL="0">
-              <a:buNone/>
-            </a:pPr>
-            <a:r>
-              <a:rPr lang="en-US" sz="1300" dirty="0">
+                <a:latin typeface="Consolas" pitchFamily="34" charset="0"/>
+                <a:ea typeface="Consolas" pitchFamily="34" charset="-122"/>
+                <a:cs typeface="Consolas" pitchFamily="34" charset="-120"/>
+              </a:rPr>
+              <a:t>  vector&lt;Student&gt;</a:t>
+            </a:r>
+            <a:endParaRPr lang="en-US" sz="850" dirty="0"/>
+          </a:p>
+          <a:p>
+            <a:pPr indent="0" marL="0">
+              <a:buNone/>
+            </a:pPr>
+            <a:r>
+              <a:rPr lang="en-US" sz="850" dirty="0">
                 <a:solidFill>
                   <a:srgbClr val="1E293B"/>
                 </a:solidFill>
-                <a:latin typeface="Calibri" pitchFamily="34" charset="0"/>
-                <a:ea typeface="Calibri" pitchFamily="34" charset="-122"/>
-                <a:cs typeface="Calibri" pitchFamily="34" charset="-120"/>
-              </a:rPr>
-              <a:t>• Object-Oriented Programming</a:t>
-            </a:r>
-            <a:endParaRPr lang="en-US" sz="1300" dirty="0"/>
-          </a:p>
-          <a:p>
-            <a:pPr indent="0" marL="0">
-              <a:buNone/>
-            </a:pPr>
-            <a:r>
-              <a:rPr lang="en-US" sz="1300" dirty="0">
+                <a:latin typeface="Consolas" pitchFamily="34" charset="0"/>
+                <a:ea typeface="Consolas" pitchFamily="34" charset="-122"/>
+                <a:cs typeface="Consolas" pitchFamily="34" charset="-120"/>
+              </a:rPr>
+              <a:t>- index</a:t>
+            </a:r>
+            <a:endParaRPr lang="en-US" sz="850" dirty="0"/>
+          </a:p>
+          <a:p>
+            <a:pPr indent="0" marL="0">
+              <a:buNone/>
+            </a:pPr>
+            <a:r>
+              <a:rPr lang="en-US" sz="850" dirty="0">
                 <a:solidFill>
                   <a:srgbClr val="1E293B"/>
                 </a:solidFill>
-                <a:latin typeface="Calibri" pitchFamily="34" charset="0"/>
-                <a:ea typeface="Calibri" pitchFamily="34" charset="-122"/>
-                <a:cs typeface="Calibri" pitchFamily="34" charset="-120"/>
-              </a:rPr>
-              <a:t>• Standard Template Library (STL)</a:t>
-            </a:r>
-            <a:endParaRPr lang="en-US" sz="1300" dirty="0"/>
-          </a:p>
-        </p:txBody>
-      </p:sp>
-      <p:sp>
-        <p:nvSpPr>
-          <p:cNvPr id="9" name="Shape 7"/>
-          <p:cNvSpPr/>
-          <p:nvPr/>
-        </p:nvSpPr>
-        <p:spPr>
-          <a:xfrm>
-            <a:off x="4480560" y="1005840"/>
-            <a:ext cx="4343400" cy="3566160"/>
-          </a:xfrm>
-          <a:prstGeom prst="rect">
-            <a:avLst/>
-          </a:prstGeom>
-          <a:solidFill>
-            <a:srgbClr val="FFFFFF"/>
-          </a:solidFill>
-          <a:ln w="12700">
-            <a:solidFill>
-              <a:srgbClr val="E2E8F0"/>
-            </a:solidFill>
-            <a:prstDash val="solid"/>
-          </a:ln>
-          <a:effectLst>
-            <a:outerShdw sx="100000" sy="100000" kx="0" ky="0" algn="bl" rotWithShape="0" blurRad="101600" dist="38100" dir="8100000">
-              <a:srgbClr val="000000">
-                <a:alpha val="12000"/>
-              </a:srgbClr>
-            </a:outerShdw>
-          </a:effectLst>
-        </p:spPr>
-      </p:sp>
-      <p:sp>
-        <p:nvSpPr>
-          <p:cNvPr id="10" name="Shape 8"/>
-          <p:cNvSpPr/>
-          <p:nvPr/>
-        </p:nvSpPr>
-        <p:spPr>
-          <a:xfrm>
-            <a:off x="4480560" y="1005840"/>
-            <a:ext cx="4343400" cy="411480"/>
-          </a:xfrm>
-          <a:prstGeom prst="rect">
-            <a:avLst/>
-          </a:prstGeom>
-          <a:solidFill>
-            <a:srgbClr val="2563EB"/>
-          </a:solidFill>
-          <a:ln w="12700">
-            <a:solidFill>
-              <a:srgbClr val="2563EB"/>
-            </a:solidFill>
-            <a:prstDash val="solid"/>
-          </a:ln>
-        </p:spPr>
-      </p:sp>
-      <p:sp>
-        <p:nvSpPr>
-          <p:cNvPr id="11" name="Text 9"/>
-          <p:cNvSpPr/>
-          <p:nvPr/>
-        </p:nvSpPr>
-        <p:spPr>
-          <a:xfrm>
-            <a:off x="4617720" y="1005840"/>
-            <a:ext cx="4069080" cy="411480"/>
-          </a:xfrm>
-          <a:prstGeom prst="rect">
-            <a:avLst/>
-          </a:prstGeom>
-          <a:noFill/>
-          <a:ln/>
-        </p:spPr>
-        <p:txBody>
-          <a:bodyPr wrap="square" rtlCol="0" anchor="ctr"/>
-          <a:lstStyle/>
-          <a:p>
-            <a:pPr indent="0" marL="0">
-              <a:buNone/>
-            </a:pPr>
-            <a:r>
-              <a:rPr lang="en-US" sz="1400" b="1" dirty="0">
-                <a:solidFill>
-                  <a:srgbClr val="FFFFFF"/>
-                </a:solidFill>
-              </a:rPr>
-              <a:t>✅  Learning Outcomes</a:t>
-            </a:r>
-            <a:endParaRPr lang="en-US" sz="1400" dirty="0"/>
-          </a:p>
-        </p:txBody>
-      </p:sp>
-      <p:sp>
-        <p:nvSpPr>
-          <p:cNvPr id="12" name="Text 10"/>
-          <p:cNvSpPr/>
-          <p:nvPr/>
-        </p:nvSpPr>
-        <p:spPr>
-          <a:xfrm>
-            <a:off x="4617720" y="1508760"/>
-            <a:ext cx="4069080" cy="2926080"/>
-          </a:xfrm>
-          <a:prstGeom prst="rect">
-            <a:avLst/>
-          </a:prstGeom>
-          <a:noFill/>
-          <a:ln/>
-        </p:spPr>
-        <p:txBody>
-          <a:bodyPr wrap="square" rtlCol="0" anchor="t"/>
-          <a:lstStyle/>
-          <a:p>
-            <a:pPr marL="342900" indent="-342900">
-              <a:buSzPct val="100000"/>
-              <a:buChar char="•"/>
-            </a:pPr>
-            <a:r>
-              <a:rPr lang="en-US" sz="1300" dirty="0">
+                <a:latin typeface="Consolas" pitchFamily="34" charset="0"/>
+                <a:ea typeface="Consolas" pitchFamily="34" charset="-122"/>
+                <a:cs typeface="Consolas" pitchFamily="34" charset="-120"/>
+              </a:rPr>
+              <a:t>  map&lt;int,int&gt;</a:t>
+            </a:r>
+            <a:endParaRPr lang="en-US" sz="850" dirty="0"/>
+          </a:p>
+          <a:p>
+            <a:pPr indent="0" marL="0">
+              <a:buNone/>
+            </a:pPr>
+            <a:endParaRPr lang="en-US" sz="850" dirty="0"/>
+          </a:p>
+          <a:p>
+            <a:pPr indent="0" marL="0">
+              <a:buNone/>
+            </a:pPr>
+            <a:r>
+              <a:rPr lang="en-US" sz="850" dirty="0">
                 <a:solidFill>
                   <a:srgbClr val="1E293B"/>
                 </a:solidFill>
-                <a:latin typeface="Calibri" pitchFamily="34" charset="0"/>
-                <a:ea typeface="Calibri" pitchFamily="34" charset="-122"/>
-                <a:cs typeface="Calibri" pitchFamily="34" charset="-120"/>
-              </a:rPr>
-              <a:t>Design classes using OOP principles</a:t>
-            </a:r>
-            <a:endParaRPr lang="en-US" sz="1300" dirty="0"/>
-          </a:p>
-          <a:p>
-            <a:pPr marL="342900" indent="-342900">
-              <a:buSzPct val="100000"/>
-              <a:buChar char="•"/>
-            </a:pPr>
-            <a:r>
-              <a:rPr lang="en-US" sz="1300" dirty="0">
+                <a:latin typeface="Consolas" pitchFamily="34" charset="0"/>
+                <a:ea typeface="Consolas" pitchFamily="34" charset="-122"/>
+                <a:cs typeface="Consolas" pitchFamily="34" charset="-120"/>
+              </a:rPr>
+              <a:t>+ add/remove</a:t>
+            </a:r>
+            <a:endParaRPr lang="en-US" sz="850" dirty="0"/>
+          </a:p>
+          <a:p>
+            <a:pPr indent="0" marL="0">
+              <a:buNone/>
+            </a:pPr>
+            <a:r>
+              <a:rPr lang="en-US" sz="850" dirty="0">
                 <a:solidFill>
                   <a:srgbClr val="1E293B"/>
                 </a:solidFill>
-                <a:latin typeface="Calibri" pitchFamily="34" charset="0"/>
-                <a:ea typeface="Calibri" pitchFamily="34" charset="-122"/>
-                <a:cs typeface="Calibri" pitchFamily="34" charset="-120"/>
-              </a:rPr>
-              <a:t>Use STL containers effectively</a:t>
-            </a:r>
-            <a:endParaRPr lang="en-US" sz="1300" dirty="0"/>
-          </a:p>
-          <a:p>
-            <a:pPr marL="342900" indent="-342900">
-              <a:buSzPct val="100000"/>
-              <a:buChar char="•"/>
-            </a:pPr>
-            <a:r>
-              <a:rPr lang="en-US" sz="1300" dirty="0">
+                <a:latin typeface="Consolas" pitchFamily="34" charset="0"/>
+                <a:ea typeface="Consolas" pitchFamily="34" charset="-122"/>
+                <a:cs typeface="Consolas" pitchFamily="34" charset="-120"/>
+              </a:rPr>
+              <a:t>+ search</a:t>
+            </a:r>
+            <a:endParaRPr lang="en-US" sz="850" dirty="0"/>
+          </a:p>
+          <a:p>
+            <a:pPr indent="0" marL="0">
+              <a:buNone/>
+            </a:pPr>
+            <a:r>
+              <a:rPr lang="en-US" sz="850" dirty="0">
                 <a:solidFill>
                   <a:srgbClr val="1E293B"/>
                 </a:solidFill>
-                <a:latin typeface="Calibri" pitchFamily="34" charset="0"/>
-                <a:ea typeface="Calibri" pitchFamily="34" charset="-122"/>
-                <a:cs typeface="Calibri" pitchFamily="34" charset="-120"/>
-              </a:rPr>
-              <a:t>Implement searching &amp; sorting algorithms</a:t>
-            </a:r>
-            <a:endParaRPr lang="en-US" sz="1300" dirty="0"/>
-          </a:p>
-          <a:p>
-            <a:pPr marL="342900" indent="-342900">
-              <a:buSzPct val="100000"/>
-              <a:buChar char="•"/>
-            </a:pPr>
-            <a:r>
-              <a:rPr lang="en-US" sz="1300" dirty="0">
+                <a:latin typeface="Consolas" pitchFamily="34" charset="0"/>
+                <a:ea typeface="Consolas" pitchFamily="34" charset="-122"/>
+                <a:cs typeface="Consolas" pitchFamily="34" charset="-120"/>
+              </a:rPr>
+              <a:t>+ enroll</a:t>
+            </a:r>
+            <a:endParaRPr lang="en-US" sz="850" dirty="0"/>
+          </a:p>
+          <a:p>
+            <a:pPr indent="0" marL="0">
+              <a:buNone/>
+            </a:pPr>
+            <a:r>
+              <a:rPr lang="en-US" sz="850" dirty="0">
                 <a:solidFill>
                   <a:srgbClr val="1E293B"/>
                 </a:solidFill>
-                <a:latin typeface="Calibri" pitchFamily="34" charset="0"/>
-                <a:ea typeface="Calibri" pitchFamily="34" charset="-122"/>
-                <a:cs typeface="Calibri" pitchFamily="34" charset="-120"/>
-              </a:rPr>
-              <a:t>Write modular, organized C++ programs</a:t>
-            </a:r>
-            <a:endParaRPr lang="en-US" sz="1300" dirty="0"/>
+                <a:latin typeface="Consolas" pitchFamily="34" charset="0"/>
+                <a:ea typeface="Consolas" pitchFamily="34" charset="-122"/>
+                <a:cs typeface="Consolas" pitchFamily="34" charset="-120"/>
+              </a:rPr>
+              <a:t>+ sort()</a:t>
+            </a:r>
+            <a:endParaRPr lang="en-US" sz="850" dirty="0"/>
+          </a:p>
+          <a:p>
+            <a:pPr indent="0" marL="0">
+              <a:buNone/>
+            </a:pPr>
+            <a:r>
+              <a:rPr lang="en-US" sz="850" dirty="0">
+                <a:solidFill>
+                  <a:srgbClr val="1E293B"/>
+                </a:solidFill>
+                <a:latin typeface="Consolas" pitchFamily="34" charset="0"/>
+                <a:ea typeface="Consolas" pitchFamily="34" charset="-122"/>
+                <a:cs typeface="Consolas" pitchFamily="34" charset="-120"/>
+              </a:rPr>
+              <a:t>+ find_if()</a:t>
+            </a:r>
+            <a:endParaRPr lang="en-US" sz="850" dirty="0"/>
+          </a:p>
+          <a:p>
+            <a:pPr indent="0" marL="0">
+              <a:buNone/>
+            </a:pPr>
+            <a:r>
+              <a:rPr lang="en-US" sz="850" dirty="0">
+                <a:solidFill>
+                  <a:srgbClr val="1E293B"/>
+                </a:solidFill>
+                <a:latin typeface="Consolas" pitchFamily="34" charset="0"/>
+                <a:ea typeface="Consolas" pitchFamily="34" charset="-122"/>
+                <a:cs typeface="Consolas" pitchFamily="34" charset="-120"/>
+              </a:rPr>
+              <a:t>+ count_if()</a:t>
+            </a:r>
+            <a:endParaRPr lang="en-US" sz="850" dirty="0"/>
+          </a:p>
+          <a:p>
+            <a:pPr indent="0" marL="0">
+              <a:buNone/>
+            </a:pPr>
+            <a:r>
+              <a:rPr lang="en-US" sz="850" dirty="0">
+                <a:solidFill>
+                  <a:srgbClr val="1E293B"/>
+                </a:solidFill>
+                <a:latin typeface="Consolas" pitchFamily="34" charset="0"/>
+                <a:ea typeface="Consolas" pitchFamily="34" charset="-122"/>
+                <a:cs typeface="Consolas" pitchFamily="34" charset="-120"/>
+              </a:rPr>
+              <a:t>  [Bonus]</a:t>
+            </a:r>
+            <a:endParaRPr lang="en-US" sz="850" dirty="0"/>
           </a:p>
         </p:txBody>
       </p:sp>
@@ -2275,7 +2692,7 @@
         </p:nvSpPr>
         <p:spPr>
           <a:xfrm>
-            <a:off x="320040" y="274320"/>
+            <a:off x="320040" y="256032"/>
             <a:ext cx="8503920" cy="502920"/>
           </a:xfrm>
           <a:prstGeom prst="rect">
@@ -2300,7 +2717,7 @@
                 <a:ea typeface="Calibri" pitchFamily="34" charset="-122"/>
                 <a:cs typeface="Calibri" pitchFamily="34" charset="-120"/>
               </a:rPr>
-              <a:t>OOP Class Design</a:t>
+              <a:t>STL Containers  (3 Containers)</a:t>
             </a:r>
             <a:endParaRPr lang="en-US" sz="2600" dirty="0"/>
           </a:p>
@@ -2314,7 +2731,7 @@
         </p:nvSpPr>
         <p:spPr>
           <a:xfrm>
-            <a:off x="320040" y="841248"/>
+            <a:off x="320040" y="822960"/>
             <a:ext cx="8503920" cy="36576"/>
           </a:xfrm>
           <a:prstGeom prst="rect">
@@ -2339,544 +2756,8 @@
         </p:nvSpPr>
         <p:spPr>
           <a:xfrm>
-            <a:off x="3200400" y="1005840"/>
-            <a:ext cx="2743200" cy="1371600"/>
-          </a:xfrm>
-          <a:prstGeom prst="rect">
-            <a:avLst/>
-          </a:prstGeom>
-          <a:solidFill>
-            <a:srgbClr val="1B2A4A"/>
-          </a:solidFill>
-          <a:ln w="12700">
-            <a:solidFill>
-              <a:srgbClr val="1B2A4A"/>
-            </a:solidFill>
-            <a:prstDash val="solid"/>
-          </a:ln>
-          <a:effectLst>
-            <a:outerShdw sx="100000" sy="100000" kx="0" ky="0" algn="bl" rotWithShape="0" blurRad="101600" dist="38100" dir="8100000">
-              <a:srgbClr val="000000">
-                <a:alpha val="12000"/>
-              </a:srgbClr>
-            </a:outerShdw>
-          </a:effectLst>
-        </p:spPr>
-      </p:sp>
-      <p:sp>
-        <p:nvSpPr>
-          <p:cNvPr id="6" name="Text 4"/>
-          <p:cNvSpPr/>
-          <p:nvPr/>
-        </p:nvSpPr>
-        <p:spPr>
-          <a:xfrm>
-            <a:off x="3200400" y="1005840"/>
-            <a:ext cx="2743200" cy="347472"/>
-          </a:xfrm>
-          <a:prstGeom prst="rect">
-            <a:avLst/>
-          </a:prstGeom>
-          <a:noFill/>
-          <a:ln/>
-        </p:spPr>
-        <p:txBody>
-          <a:bodyPr wrap="square" lIns="0" tIns="0" rIns="0" bIns="0" rtlCol="0" anchor="ctr"/>
-          <a:lstStyle/>
-          <a:p>
-            <a:pPr algn="ctr" indent="0" marL="0">
-              <a:buNone/>
-            </a:pPr>
-            <a:r>
-              <a:rPr lang="en-US" sz="1300" b="1" dirty="0">
-                <a:solidFill>
-                  <a:srgbClr val="FFFFFF"/>
-                </a:solidFill>
-              </a:rPr>
-              <a:t>Person  (Base)</a:t>
-            </a:r>
-            <a:endParaRPr lang="en-US" sz="1300" dirty="0"/>
-          </a:p>
-        </p:txBody>
-      </p:sp>
-      <p:sp>
-        <p:nvSpPr>
-          <p:cNvPr id="7" name="Shape 5"/>
-          <p:cNvSpPr/>
-          <p:nvPr/>
-        </p:nvSpPr>
-        <p:spPr>
-          <a:xfrm>
-            <a:off x="3200400" y="1353312"/>
-            <a:ext cx="2743200" cy="18288"/>
-          </a:xfrm>
-          <a:prstGeom prst="rect">
-            <a:avLst/>
-          </a:prstGeom>
-          <a:solidFill>
-            <a:srgbClr val="FFFFFF">
-              <a:alpha val="40000"/>
-            </a:srgbClr>
-          </a:solidFill>
-          <a:ln w="12700">
-            <a:solidFill>
-              <a:srgbClr val="FFFFFF">
-                <a:alpha val="40000"/>
-              </a:srgbClr>
-            </a:solidFill>
-            <a:prstDash val="solid"/>
-          </a:ln>
-        </p:spPr>
-      </p:sp>
-      <p:sp>
-        <p:nvSpPr>
-          <p:cNvPr id="8" name="Text 6"/>
-          <p:cNvSpPr/>
-          <p:nvPr/>
-        </p:nvSpPr>
-        <p:spPr>
-          <a:xfrm>
-            <a:off x="3291840" y="1417320"/>
-            <a:ext cx="2560320" cy="256032"/>
-          </a:xfrm>
-          <a:prstGeom prst="rect">
-            <a:avLst/>
-          </a:prstGeom>
-          <a:noFill/>
-          <a:ln/>
-        </p:spPr>
-        <p:txBody>
-          <a:bodyPr wrap="square" rtlCol="0" anchor="ctr"/>
-          <a:lstStyle/>
-          <a:p>
-            <a:pPr indent="0" marL="0">
-              <a:buNone/>
-            </a:pPr>
-            <a:r>
-              <a:rPr lang="en-US" sz="1100" dirty="0">
-                <a:solidFill>
-                  <a:srgbClr val="BAE6FD"/>
-                </a:solidFill>
-                <a:latin typeface="Consolas" pitchFamily="34" charset="0"/>
-                <a:ea typeface="Consolas" pitchFamily="34" charset="-122"/>
-                <a:cs typeface="Consolas" pitchFamily="34" charset="-120"/>
-              </a:rPr>
-              <a:t># name : string</a:t>
-            </a:r>
-            <a:endParaRPr lang="en-US" sz="1100" dirty="0"/>
-          </a:p>
-        </p:txBody>
-      </p:sp>
-      <p:sp>
-        <p:nvSpPr>
-          <p:cNvPr id="9" name="Text 7"/>
-          <p:cNvSpPr/>
-          <p:nvPr/>
-        </p:nvSpPr>
-        <p:spPr>
-          <a:xfrm>
-            <a:off x="3291840" y="1673352"/>
-            <a:ext cx="2560320" cy="658368"/>
-          </a:xfrm>
-          <a:prstGeom prst="rect">
-            <a:avLst/>
-          </a:prstGeom>
-          <a:noFill/>
-          <a:ln/>
-        </p:spPr>
-        <p:txBody>
-          <a:bodyPr wrap="square" rtlCol="0" anchor="ctr"/>
-          <a:lstStyle/>
-          <a:p>
-            <a:pPr indent="0" marL="0">
-              <a:buNone/>
-            </a:pPr>
-            <a:r>
-              <a:rPr lang="en-US" sz="1100" dirty="0">
-                <a:solidFill>
-                  <a:srgbClr val="FFFFFF"/>
-                </a:solidFill>
-                <a:latin typeface="Consolas" pitchFamily="34" charset="0"/>
-                <a:ea typeface="Consolas" pitchFamily="34" charset="-122"/>
-                <a:cs typeface="Consolas" pitchFamily="34" charset="-120"/>
-              </a:rPr>
-              <a:t>+ getName() : string</a:t>
-            </a:r>
-            <a:endParaRPr lang="en-US" sz="1100" dirty="0"/>
-          </a:p>
-          <a:p>
-            <a:pPr indent="0" marL="0">
-              <a:buNone/>
-            </a:pPr>
-            <a:r>
-              <a:rPr lang="en-US" sz="1100" dirty="0">
-                <a:solidFill>
-                  <a:srgbClr val="FFFFFF"/>
-                </a:solidFill>
-                <a:latin typeface="Consolas" pitchFamily="34" charset="0"/>
-                <a:ea typeface="Consolas" pitchFamily="34" charset="-122"/>
-                <a:cs typeface="Consolas" pitchFamily="34" charset="-120"/>
-              </a:rPr>
-              <a:t>+ display() virtual</a:t>
-            </a:r>
-            <a:endParaRPr lang="en-US" sz="1100" dirty="0"/>
-          </a:p>
-          <a:p>
-            <a:pPr indent="0" marL="0">
-              <a:buNone/>
-            </a:pPr>
-            <a:r>
-              <a:rPr lang="en-US" sz="1100" dirty="0">
-                <a:solidFill>
-                  <a:srgbClr val="FFFFFF"/>
-                </a:solidFill>
-                <a:latin typeface="Consolas" pitchFamily="34" charset="0"/>
-                <a:ea typeface="Consolas" pitchFamily="34" charset="-122"/>
-                <a:cs typeface="Consolas" pitchFamily="34" charset="-120"/>
-              </a:rPr>
-              <a:t>+ ~Person() virtual</a:t>
-            </a:r>
-            <a:endParaRPr lang="en-US" sz="1100" dirty="0"/>
-          </a:p>
-        </p:txBody>
-      </p:sp>
-      <p:sp>
-        <p:nvSpPr>
-          <p:cNvPr id="10" name="Shape 8"/>
-          <p:cNvSpPr/>
-          <p:nvPr/>
-        </p:nvSpPr>
-        <p:spPr>
-          <a:xfrm>
-            <a:off x="4572000" y="2377440"/>
-            <a:ext cx="0" cy="548640"/>
-          </a:xfrm>
-          <a:prstGeom prst="line">
-            <a:avLst/>
-          </a:prstGeom>
-          <a:noFill/>
-          <a:ln w="31750">
-            <a:solidFill>
-              <a:srgbClr val="2563EB"/>
-            </a:solidFill>
-            <a:prstDash val="solid"/>
-          </a:ln>
-        </p:spPr>
-      </p:sp>
-      <p:sp>
-        <p:nvSpPr>
-          <p:cNvPr id="11" name="Text 9"/>
-          <p:cNvSpPr/>
-          <p:nvPr/>
-        </p:nvSpPr>
-        <p:spPr>
-          <a:xfrm>
-            <a:off x="4617720" y="2514600"/>
-            <a:ext cx="1097280" cy="256032"/>
-          </a:xfrm>
-          <a:prstGeom prst="rect">
-            <a:avLst/>
-          </a:prstGeom>
-          <a:noFill/>
-          <a:ln/>
-        </p:spPr>
-        <p:txBody>
-          <a:bodyPr wrap="square" rtlCol="0" anchor="ctr"/>
-          <a:lstStyle/>
-          <a:p>
-            <a:pPr indent="0" marL="0">
-              <a:buNone/>
-            </a:pPr>
-            <a:r>
-              <a:rPr lang="en-US" sz="1000" i="1" dirty="0">
-                <a:solidFill>
-                  <a:srgbClr val="64748B"/>
-                </a:solidFill>
-              </a:rPr>
-              <a:t>inherits</a:t>
-            </a:r>
-            <a:endParaRPr lang="en-US" sz="1000" dirty="0"/>
-          </a:p>
-        </p:txBody>
-      </p:sp>
-      <p:sp>
-        <p:nvSpPr>
-          <p:cNvPr id="12" name="Shape 10"/>
-          <p:cNvSpPr/>
-          <p:nvPr/>
-        </p:nvSpPr>
-        <p:spPr>
-          <a:xfrm>
-            <a:off x="4462272" y="2880360"/>
-            <a:ext cx="219456" cy="109728"/>
-          </a:xfrm>
-          <a:prstGeom prst="rect">
-            <a:avLst/>
-          </a:prstGeom>
-          <a:solidFill>
-            <a:srgbClr val="2563EB"/>
-          </a:solidFill>
-          <a:ln w="12700">
-            <a:solidFill>
-              <a:srgbClr val="2563EB"/>
-            </a:solidFill>
-            <a:prstDash val="solid"/>
-          </a:ln>
-        </p:spPr>
-      </p:sp>
-      <p:sp>
-        <p:nvSpPr>
-          <p:cNvPr id="13" name="Shape 11"/>
-          <p:cNvSpPr/>
-          <p:nvPr/>
-        </p:nvSpPr>
-        <p:spPr>
-          <a:xfrm>
-            <a:off x="2377440" y="2990088"/>
-            <a:ext cx="4389120" cy="1828800"/>
-          </a:xfrm>
-          <a:prstGeom prst="rect">
-            <a:avLst/>
-          </a:prstGeom>
-          <a:solidFill>
-            <a:srgbClr val="2563EB"/>
-          </a:solidFill>
-          <a:ln w="12700">
-            <a:solidFill>
-              <a:srgbClr val="2563EB"/>
-            </a:solidFill>
-            <a:prstDash val="solid"/>
-          </a:ln>
-          <a:effectLst>
-            <a:outerShdw sx="100000" sy="100000" kx="0" ky="0" algn="bl" rotWithShape="0" blurRad="101600" dist="38100" dir="8100000">
-              <a:srgbClr val="000000">
-                <a:alpha val="12000"/>
-              </a:srgbClr>
-            </a:outerShdw>
-          </a:effectLst>
-        </p:spPr>
-      </p:sp>
-      <p:sp>
-        <p:nvSpPr>
-          <p:cNvPr id="14" name="Text 12"/>
-          <p:cNvSpPr/>
-          <p:nvPr/>
-        </p:nvSpPr>
-        <p:spPr>
-          <a:xfrm>
-            <a:off x="2377440" y="2990088"/>
-            <a:ext cx="4389120" cy="347472"/>
-          </a:xfrm>
-          <a:prstGeom prst="rect">
-            <a:avLst/>
-          </a:prstGeom>
-          <a:noFill/>
-          <a:ln/>
-        </p:spPr>
-        <p:txBody>
-          <a:bodyPr wrap="square" lIns="0" tIns="0" rIns="0" bIns="0" rtlCol="0" anchor="ctr"/>
-          <a:lstStyle/>
-          <a:p>
-            <a:pPr algn="ctr" indent="0" marL="0">
-              <a:buNone/>
-            </a:pPr>
-            <a:r>
-              <a:rPr lang="en-US" sz="1300" b="1" dirty="0">
-                <a:solidFill>
-                  <a:srgbClr val="FFFFFF"/>
-                </a:solidFill>
-              </a:rPr>
-              <a:t>Student  (Derived)</a:t>
-            </a:r>
-            <a:endParaRPr lang="en-US" sz="1300" dirty="0"/>
-          </a:p>
-        </p:txBody>
-      </p:sp>
-      <p:sp>
-        <p:nvSpPr>
-          <p:cNvPr id="15" name="Shape 13"/>
-          <p:cNvSpPr/>
-          <p:nvPr/>
-        </p:nvSpPr>
-        <p:spPr>
-          <a:xfrm>
-            <a:off x="2377440" y="3337560"/>
-            <a:ext cx="4389120" cy="18288"/>
-          </a:xfrm>
-          <a:prstGeom prst="rect">
-            <a:avLst/>
-          </a:prstGeom>
-          <a:solidFill>
-            <a:srgbClr val="FFFFFF">
-              <a:alpha val="40000"/>
-            </a:srgbClr>
-          </a:solidFill>
-          <a:ln w="12700">
-            <a:solidFill>
-              <a:srgbClr val="FFFFFF">
-                <a:alpha val="40000"/>
-              </a:srgbClr>
-            </a:solidFill>
-            <a:prstDash val="solid"/>
-          </a:ln>
-        </p:spPr>
-      </p:sp>
-      <p:sp>
-        <p:nvSpPr>
-          <p:cNvPr id="16" name="Text 14"/>
-          <p:cNvSpPr/>
-          <p:nvPr/>
-        </p:nvSpPr>
-        <p:spPr>
-          <a:xfrm>
-            <a:off x="2514600" y="3401568"/>
-            <a:ext cx="4114800" cy="585216"/>
-          </a:xfrm>
-          <a:prstGeom prst="rect">
-            <a:avLst/>
-          </a:prstGeom>
-          <a:noFill/>
-          <a:ln/>
-        </p:spPr>
-        <p:txBody>
-          <a:bodyPr wrap="square" rtlCol="0" anchor="ctr"/>
-          <a:lstStyle/>
-          <a:p>
-            <a:pPr indent="0" marL="0">
-              <a:buNone/>
-            </a:pPr>
-            <a:r>
-              <a:rPr lang="en-US" sz="1100" dirty="0">
-                <a:solidFill>
-                  <a:srgbClr val="BAE6FD"/>
-                </a:solidFill>
-                <a:latin typeface="Consolas" pitchFamily="34" charset="0"/>
-                <a:ea typeface="Consolas" pitchFamily="34" charset="-122"/>
-                <a:cs typeface="Consolas" pitchFamily="34" charset="-120"/>
-              </a:rPr>
-              <a:t>- id : int</a:t>
-            </a:r>
-            <a:endParaRPr lang="en-US" sz="1100" dirty="0"/>
-          </a:p>
-          <a:p>
-            <a:pPr indent="0" marL="0">
-              <a:buNone/>
-            </a:pPr>
-            <a:r>
-              <a:rPr lang="en-US" sz="1100" dirty="0">
-                <a:solidFill>
-                  <a:srgbClr val="BAE6FD"/>
-                </a:solidFill>
-                <a:latin typeface="Consolas" pitchFamily="34" charset="0"/>
-                <a:ea typeface="Consolas" pitchFamily="34" charset="-122"/>
-                <a:cs typeface="Consolas" pitchFamily="34" charset="-120"/>
-              </a:rPr>
-              <a:t>- gpa : double</a:t>
-            </a:r>
-            <a:endParaRPr lang="en-US" sz="1100" dirty="0"/>
-          </a:p>
-          <a:p>
-            <a:pPr indent="0" marL="0">
-              <a:buNone/>
-            </a:pPr>
-            <a:r>
-              <a:rPr lang="en-US" sz="1100" dirty="0">
-                <a:solidFill>
-                  <a:srgbClr val="BAE6FD"/>
-                </a:solidFill>
-                <a:latin typeface="Consolas" pitchFamily="34" charset="0"/>
-                <a:ea typeface="Consolas" pitchFamily="34" charset="-122"/>
-                <a:cs typeface="Consolas" pitchFamily="34" charset="-120"/>
-              </a:rPr>
-              <a:t>- courses : vector&lt;string&gt;</a:t>
-            </a:r>
-            <a:endParaRPr lang="en-US" sz="1100" dirty="0"/>
-          </a:p>
-        </p:txBody>
-      </p:sp>
-      <p:sp>
-        <p:nvSpPr>
-          <p:cNvPr id="17" name="Text 15"/>
-          <p:cNvSpPr/>
-          <p:nvPr/>
-        </p:nvSpPr>
-        <p:spPr>
-          <a:xfrm>
-            <a:off x="2514600" y="3986784"/>
-            <a:ext cx="4114800" cy="640080"/>
-          </a:xfrm>
-          <a:prstGeom prst="rect">
-            <a:avLst/>
-          </a:prstGeom>
-          <a:noFill/>
-          <a:ln/>
-        </p:spPr>
-        <p:txBody>
-          <a:bodyPr wrap="square" rtlCol="0" anchor="ctr"/>
-          <a:lstStyle/>
-          <a:p>
-            <a:pPr indent="0" marL="0">
-              <a:buNone/>
-            </a:pPr>
-            <a:r>
-              <a:rPr lang="en-US" sz="1100" dirty="0">
-                <a:solidFill>
-                  <a:srgbClr val="FFFFFF"/>
-                </a:solidFill>
-                <a:latin typeface="Consolas" pitchFamily="34" charset="0"/>
-                <a:ea typeface="Consolas" pitchFamily="34" charset="-122"/>
-                <a:cs typeface="Consolas" pitchFamily="34" charset="-120"/>
-              </a:rPr>
-              <a:t>+ enrollCourse()</a:t>
-            </a:r>
-            <a:endParaRPr lang="en-US" sz="1100" dirty="0"/>
-          </a:p>
-          <a:p>
-            <a:pPr indent="0" marL="0">
-              <a:buNone/>
-            </a:pPr>
-            <a:r>
-              <a:rPr lang="en-US" sz="1100" dirty="0">
-                <a:solidFill>
-                  <a:srgbClr val="FFFFFF"/>
-                </a:solidFill>
-                <a:latin typeface="Consolas" pitchFamily="34" charset="0"/>
-                <a:ea typeface="Consolas" pitchFamily="34" charset="-122"/>
-                <a:cs typeface="Consolas" pitchFamily="34" charset="-120"/>
-              </a:rPr>
-              <a:t>+ showCourses()</a:t>
-            </a:r>
-            <a:endParaRPr lang="en-US" sz="1100" dirty="0"/>
-          </a:p>
-          <a:p>
-            <a:pPr indent="0" marL="0">
-              <a:buNone/>
-            </a:pPr>
-            <a:r>
-              <a:rPr lang="en-US" sz="1100" dirty="0">
-                <a:solidFill>
-                  <a:srgbClr val="FFFFFF"/>
-                </a:solidFill>
-                <a:latin typeface="Consolas" pitchFamily="34" charset="0"/>
-                <a:ea typeface="Consolas" pitchFamily="34" charset="-122"/>
-                <a:cs typeface="Consolas" pitchFamily="34" charset="-120"/>
-              </a:rPr>
-              <a:t>+ display() override</a:t>
-            </a:r>
-            <a:endParaRPr lang="en-US" sz="1100" dirty="0"/>
-          </a:p>
-        </p:txBody>
-      </p:sp>
-      <p:sp>
-        <p:nvSpPr>
-          <p:cNvPr id="18" name="Shape 16"/>
-          <p:cNvSpPr/>
-          <p:nvPr/>
-        </p:nvSpPr>
-        <p:spPr>
-          <a:xfrm>
-            <a:off x="7040880" y="1005840"/>
-            <a:ext cx="1828800" cy="3840480"/>
+            <a:off x="320040" y="960120"/>
+            <a:ext cx="2743200" cy="3904488"/>
           </a:xfrm>
           <a:prstGeom prst="rect">
             <a:avLst/>
@@ -2901,24 +2782,24 @@
       </p:sp>
       <p:sp>
         <p:nvSpPr>
-          <p:cNvPr id="19" name="Shape 17"/>
-          <p:cNvSpPr/>
-          <p:nvPr/>
-        </p:nvSpPr>
-        <p:spPr>
-          <a:xfrm>
-            <a:off x="7040880" y="1005840"/>
-            <a:ext cx="1828800" cy="347472"/>
+          <p:cNvPr id="6" name="Shape 4"/>
+          <p:cNvSpPr/>
+          <p:nvPr/>
+        </p:nvSpPr>
+        <p:spPr>
+          <a:xfrm>
+            <a:off x="320040" y="960120"/>
+            <a:ext cx="2743200" cy="457200"/>
           </a:xfrm>
           <a:prstGeom prst="rect">
             <a:avLst/>
           </a:prstGeom>
           <a:solidFill>
-            <a:srgbClr val="0F172A"/>
+            <a:srgbClr val="1B2A4A"/>
           </a:solidFill>
           <a:ln w="12700">
             <a:solidFill>
-              <a:srgbClr val="0F172A"/>
+              <a:srgbClr val="1B2A4A"/>
             </a:solidFill>
             <a:prstDash val="solid"/>
           </a:ln>
@@ -2926,50 +2807,50 @@
       </p:sp>
       <p:sp>
         <p:nvSpPr>
-          <p:cNvPr id="20" name="Text 18"/>
-          <p:cNvSpPr/>
-          <p:nvPr/>
-        </p:nvSpPr>
-        <p:spPr>
-          <a:xfrm>
-            <a:off x="7040880" y="1005840"/>
-            <a:ext cx="1828800" cy="347472"/>
-          </a:xfrm>
-          <a:prstGeom prst="rect">
-            <a:avLst/>
-          </a:prstGeom>
-          <a:noFill/>
-          <a:ln/>
-        </p:spPr>
-        <p:txBody>
-          <a:bodyPr wrap="square" lIns="0" tIns="0" rIns="0" bIns="0" rtlCol="0" anchor="ctr"/>
-          <a:lstStyle/>
-          <a:p>
-            <a:pPr algn="ctr" indent="0" marL="0">
-              <a:buNone/>
-            </a:pPr>
-            <a:r>
-              <a:rPr lang="en-US" sz="1100" b="1" dirty="0">
+          <p:cNvPr id="7" name="Text 5"/>
+          <p:cNvSpPr/>
+          <p:nvPr/>
+        </p:nvSpPr>
+        <p:spPr>
+          <a:xfrm>
+            <a:off x="429768" y="960120"/>
+            <a:ext cx="2523744" cy="457200"/>
+          </a:xfrm>
+          <a:prstGeom prst="rect">
+            <a:avLst/>
+          </a:prstGeom>
+          <a:noFill/>
+          <a:ln/>
+        </p:spPr>
+        <p:txBody>
+          <a:bodyPr wrap="square" rtlCol="0" anchor="ctr"/>
+          <a:lstStyle/>
+          <a:p>
+            <a:pPr indent="0" marL="0">
+              <a:buNone/>
+            </a:pPr>
+            <a:r>
+              <a:rPr lang="en-US" sz="1300" b="1" dirty="0">
                 <a:solidFill>
                   <a:srgbClr val="FFFFFF"/>
                 </a:solidFill>
               </a:rPr>
-              <a:t>StudentManager</a:t>
-            </a:r>
-            <a:endParaRPr lang="en-US" sz="1100" dirty="0"/>
-          </a:p>
-        </p:txBody>
-      </p:sp>
-      <p:sp>
-        <p:nvSpPr>
-          <p:cNvPr id="21" name="Text 19"/>
-          <p:cNvSpPr/>
-          <p:nvPr/>
-        </p:nvSpPr>
-        <p:spPr>
-          <a:xfrm>
-            <a:off x="7086600" y="1417320"/>
-            <a:ext cx="1737360" cy="3291840"/>
+              <a:t>📦  vector&lt;Student&gt;</a:t>
+            </a:r>
+            <a:endParaRPr lang="en-US" sz="1300" dirty="0"/>
+          </a:p>
+        </p:txBody>
+      </p:sp>
+      <p:sp>
+        <p:nvSpPr>
+          <p:cNvPr id="8" name="Text 6"/>
+          <p:cNvSpPr/>
+          <p:nvPr/>
+        </p:nvSpPr>
+        <p:spPr>
+          <a:xfrm>
+            <a:off x="457200" y="1508760"/>
+            <a:ext cx="2468880" cy="3200400"/>
           </a:xfrm>
           <a:prstGeom prst="rect">
             <a:avLst/>
@@ -2985,176 +2866,503 @@
               <a:buNone/>
             </a:pPr>
             <a:r>
-              <a:rPr lang="en-US" sz="950" dirty="0">
+              <a:rPr lang="en-US" sz="1250" dirty="0">
                 <a:solidFill>
                   <a:srgbClr val="1E293B"/>
                 </a:solidFill>
-                <a:latin typeface="Consolas" pitchFamily="34" charset="0"/>
-                <a:ea typeface="Consolas" pitchFamily="34" charset="-122"/>
-                <a:cs typeface="Consolas" pitchFamily="34" charset="-120"/>
-              </a:rPr>
-              <a:t>- students</a:t>
-            </a:r>
-            <a:endParaRPr lang="en-US" sz="950" dirty="0"/>
-          </a:p>
-          <a:p>
-            <a:pPr indent="0" marL="0">
-              <a:buNone/>
-            </a:pPr>
-            <a:r>
-              <a:rPr lang="en-US" sz="950" dirty="0">
+                <a:latin typeface="Calibri" pitchFamily="34" charset="0"/>
+                <a:ea typeface="Calibri" pitchFamily="34" charset="-122"/>
+                <a:cs typeface="Calibri" pitchFamily="34" charset="-120"/>
+              </a:rPr>
+              <a:t>Stores all students in order</a:t>
+            </a:r>
+            <a:endParaRPr lang="en-US" sz="1250" dirty="0"/>
+          </a:p>
+          <a:p>
+            <a:pPr indent="0" marL="0">
+              <a:buNone/>
+            </a:pPr>
+            <a:r>
+              <a:rPr lang="en-US" sz="1250" dirty="0">
                 <a:solidFill>
                   <a:srgbClr val="1E293B"/>
                 </a:solidFill>
-                <a:latin typeface="Consolas" pitchFamily="34" charset="0"/>
-                <a:ea typeface="Consolas" pitchFamily="34" charset="-122"/>
-                <a:cs typeface="Consolas" pitchFamily="34" charset="-120"/>
-              </a:rPr>
-              <a:t>  vector&lt;Student&gt;</a:t>
-            </a:r>
-            <a:endParaRPr lang="en-US" sz="950" dirty="0"/>
-          </a:p>
-          <a:p>
-            <a:pPr indent="0" marL="0">
-              <a:buNone/>
-            </a:pPr>
-            <a:endParaRPr lang="en-US" sz="950" dirty="0"/>
-          </a:p>
-          <a:p>
-            <a:pPr indent="0" marL="0">
-              <a:buNone/>
-            </a:pPr>
-            <a:r>
-              <a:rPr lang="en-US" sz="950" dirty="0">
+                <a:latin typeface="Calibri" pitchFamily="34" charset="0"/>
+                <a:ea typeface="Calibri" pitchFamily="34" charset="-122"/>
+                <a:cs typeface="Calibri" pitchFamily="34" charset="-120"/>
+              </a:rPr>
+              <a:t>Dynamic resizing</a:t>
+            </a:r>
+            <a:endParaRPr lang="en-US" sz="1250" dirty="0"/>
+          </a:p>
+          <a:p>
+            <a:pPr indent="0" marL="0">
+              <a:buNone/>
+            </a:pPr>
+            <a:r>
+              <a:rPr lang="en-US" sz="1250" dirty="0">
                 <a:solidFill>
                   <a:srgbClr val="1E293B"/>
                 </a:solidFill>
-                <a:latin typeface="Consolas" pitchFamily="34" charset="0"/>
-                <a:ea typeface="Consolas" pitchFamily="34" charset="-122"/>
-                <a:cs typeface="Consolas" pitchFamily="34" charset="-120"/>
-              </a:rPr>
-              <a:t>+ addStudent()</a:t>
-            </a:r>
-            <a:endParaRPr lang="en-US" sz="950" dirty="0"/>
-          </a:p>
-          <a:p>
-            <a:pPr indent="0" marL="0">
-              <a:buNone/>
-            </a:pPr>
-            <a:r>
-              <a:rPr lang="en-US" sz="950" dirty="0">
+                <a:latin typeface="Calibri" pitchFamily="34" charset="0"/>
+                <a:ea typeface="Calibri" pitchFamily="34" charset="-122"/>
+                <a:cs typeface="Calibri" pitchFamily="34" charset="-120"/>
+              </a:rPr>
+              <a:t>Index-based access</a:t>
+            </a:r>
+            <a:endParaRPr lang="en-US" sz="1250" dirty="0"/>
+          </a:p>
+          <a:p>
+            <a:pPr indent="0" marL="0">
+              <a:buNone/>
+            </a:pPr>
+            <a:endParaRPr lang="en-US" sz="1250" dirty="0"/>
+          </a:p>
+          <a:p>
+            <a:pPr indent="0" marL="0">
+              <a:buNone/>
+            </a:pPr>
+            <a:r>
+              <a:rPr lang="en-US" sz="1250" dirty="0">
                 <a:solidFill>
                   <a:srgbClr val="1E293B"/>
                 </a:solidFill>
-                <a:latin typeface="Consolas" pitchFamily="34" charset="0"/>
-                <a:ea typeface="Consolas" pitchFamily="34" charset="-122"/>
-                <a:cs typeface="Consolas" pitchFamily="34" charset="-120"/>
-              </a:rPr>
-              <a:t>+ removeStudent()</a:t>
-            </a:r>
-            <a:endParaRPr lang="en-US" sz="950" dirty="0"/>
-          </a:p>
-          <a:p>
-            <a:pPr indent="0" marL="0">
-              <a:buNone/>
-            </a:pPr>
-            <a:r>
-              <a:rPr lang="en-US" sz="950" dirty="0">
+                <a:latin typeface="Calibri" pitchFamily="34" charset="0"/>
+                <a:ea typeface="Calibri" pitchFamily="34" charset="-122"/>
+                <a:cs typeface="Calibri" pitchFamily="34" charset="-120"/>
+              </a:rPr>
+              <a:t>Used in: StudentSystem</a:t>
+            </a:r>
+            <a:endParaRPr lang="en-US" sz="1250" dirty="0"/>
+          </a:p>
+          <a:p>
+            <a:pPr indent="0" marL="0">
+              <a:buNone/>
+            </a:pPr>
+            <a:r>
+              <a:rPr lang="en-US" sz="1250" dirty="0">
                 <a:solidFill>
                   <a:srgbClr val="1E293B"/>
                 </a:solidFill>
-                <a:latin typeface="Consolas" pitchFamily="34" charset="0"/>
-                <a:ea typeface="Consolas" pitchFamily="34" charset="-122"/>
-                <a:cs typeface="Consolas" pitchFamily="34" charset="-120"/>
-              </a:rPr>
-              <a:t>+ searchStudent()</a:t>
-            </a:r>
-            <a:endParaRPr lang="en-US" sz="950" dirty="0"/>
-          </a:p>
-          <a:p>
-            <a:pPr indent="0" marL="0">
-              <a:buNone/>
-            </a:pPr>
-            <a:r>
-              <a:rPr lang="en-US" sz="950" dirty="0">
+                <a:latin typeface="Calibri" pitchFamily="34" charset="0"/>
+                <a:ea typeface="Calibri" pitchFamily="34" charset="-122"/>
+                <a:cs typeface="Calibri" pitchFamily="34" charset="-120"/>
+              </a:rPr>
+              <a:t>member: students</a:t>
+            </a:r>
+            <a:endParaRPr lang="en-US" sz="1250" dirty="0"/>
+          </a:p>
+        </p:txBody>
+      </p:sp>
+      <p:sp>
+        <p:nvSpPr>
+          <p:cNvPr id="9" name="Shape 7"/>
+          <p:cNvSpPr/>
+          <p:nvPr/>
+        </p:nvSpPr>
+        <p:spPr>
+          <a:xfrm>
+            <a:off x="3246120" y="960120"/>
+            <a:ext cx="2743200" cy="3904488"/>
+          </a:xfrm>
+          <a:prstGeom prst="rect">
+            <a:avLst/>
+          </a:prstGeom>
+          <a:solidFill>
+            <a:srgbClr val="FFFFFF"/>
+          </a:solidFill>
+          <a:ln w="12700">
+            <a:solidFill>
+              <a:srgbClr val="E2E8F0"/>
+            </a:solidFill>
+            <a:prstDash val="solid"/>
+          </a:ln>
+          <a:effectLst>
+            <a:outerShdw sx="100000" sy="100000" kx="0" ky="0" algn="bl" rotWithShape="0" blurRad="101600" dist="38100" dir="8100000">
+              <a:srgbClr val="000000">
+                <a:alpha val="12000"/>
+              </a:srgbClr>
+            </a:outerShdw>
+          </a:effectLst>
+        </p:spPr>
+      </p:sp>
+      <p:sp>
+        <p:nvSpPr>
+          <p:cNvPr id="10" name="Shape 8"/>
+          <p:cNvSpPr/>
+          <p:nvPr/>
+        </p:nvSpPr>
+        <p:spPr>
+          <a:xfrm>
+            <a:off x="3246120" y="960120"/>
+            <a:ext cx="2743200" cy="457200"/>
+          </a:xfrm>
+          <a:prstGeom prst="rect">
+            <a:avLst/>
+          </a:prstGeom>
+          <a:solidFill>
+            <a:srgbClr val="2563EB"/>
+          </a:solidFill>
+          <a:ln w="12700">
+            <a:solidFill>
+              <a:srgbClr val="2563EB"/>
+            </a:solidFill>
+            <a:prstDash val="solid"/>
+          </a:ln>
+        </p:spPr>
+      </p:sp>
+      <p:sp>
+        <p:nvSpPr>
+          <p:cNvPr id="11" name="Text 9"/>
+          <p:cNvSpPr/>
+          <p:nvPr/>
+        </p:nvSpPr>
+        <p:spPr>
+          <a:xfrm>
+            <a:off x="3355848" y="960120"/>
+            <a:ext cx="2523744" cy="457200"/>
+          </a:xfrm>
+          <a:prstGeom prst="rect">
+            <a:avLst/>
+          </a:prstGeom>
+          <a:noFill/>
+          <a:ln/>
+        </p:spPr>
+        <p:txBody>
+          <a:bodyPr wrap="square" rtlCol="0" anchor="ctr"/>
+          <a:lstStyle/>
+          <a:p>
+            <a:pPr indent="0" marL="0">
+              <a:buNone/>
+            </a:pPr>
+            <a:r>
+              <a:rPr lang="en-US" sz="1300" b="1" dirty="0">
+                <a:solidFill>
+                  <a:srgbClr val="FFFFFF"/>
+                </a:solidFill>
+              </a:rPr>
+              <a:t>🗺️  map&lt;int,int&gt;</a:t>
+            </a:r>
+            <a:endParaRPr lang="en-US" sz="1300" dirty="0"/>
+          </a:p>
+        </p:txBody>
+      </p:sp>
+      <p:sp>
+        <p:nvSpPr>
+          <p:cNvPr id="12" name="Text 10"/>
+          <p:cNvSpPr/>
+          <p:nvPr/>
+        </p:nvSpPr>
+        <p:spPr>
+          <a:xfrm>
+            <a:off x="3383280" y="1508760"/>
+            <a:ext cx="2468880" cy="3200400"/>
+          </a:xfrm>
+          <a:prstGeom prst="rect">
+            <a:avLst/>
+          </a:prstGeom>
+          <a:noFill/>
+          <a:ln/>
+        </p:spPr>
+        <p:txBody>
+          <a:bodyPr wrap="square" rtlCol="0" anchor="t"/>
+          <a:lstStyle/>
+          <a:p>
+            <a:pPr indent="0" marL="0">
+              <a:buNone/>
+            </a:pPr>
+            <a:r>
+              <a:rPr lang="en-US" sz="1250" dirty="0">
                 <a:solidFill>
                   <a:srgbClr val="1E293B"/>
                 </a:solidFill>
-                <a:latin typeface="Consolas" pitchFamily="34" charset="0"/>
-                <a:ea typeface="Consolas" pitchFamily="34" charset="-122"/>
-                <a:cs typeface="Consolas" pitchFamily="34" charset="-120"/>
-              </a:rPr>
-              <a:t>+ displayAll()</a:t>
-            </a:r>
-            <a:endParaRPr lang="en-US" sz="950" dirty="0"/>
-          </a:p>
-          <a:p>
-            <a:pPr indent="0" marL="0">
-              <a:buNone/>
-            </a:pPr>
-            <a:r>
-              <a:rPr lang="en-US" sz="950" dirty="0">
+                <a:latin typeface="Calibri" pitchFamily="34" charset="0"/>
+                <a:ea typeface="Calibri" pitchFamily="34" charset="-122"/>
+                <a:cs typeface="Calibri" pitchFamily="34" charset="-120"/>
+              </a:rPr>
+              <a:t>Maps ID → vector index</a:t>
+            </a:r>
+            <a:endParaRPr lang="en-US" sz="1250" dirty="0"/>
+          </a:p>
+          <a:p>
+            <a:pPr indent="0" marL="0">
+              <a:buNone/>
+            </a:pPr>
+            <a:r>
+              <a:rPr lang="en-US" sz="1250" dirty="0">
                 <a:solidFill>
                   <a:srgbClr val="1E293B"/>
                 </a:solidFill>
-                <a:latin typeface="Consolas" pitchFamily="34" charset="0"/>
-                <a:ea typeface="Consolas" pitchFamily="34" charset="-122"/>
-                <a:cs typeface="Consolas" pitchFamily="34" charset="-120"/>
-              </a:rPr>
-              <a:t>+ enrollInCourse()</a:t>
-            </a:r>
-            <a:endParaRPr lang="en-US" sz="950" dirty="0"/>
-          </a:p>
-          <a:p>
-            <a:pPr indent="0" marL="0">
-              <a:buNone/>
-            </a:pPr>
-            <a:r>
-              <a:rPr lang="en-US" sz="950" dirty="0">
+                <a:latin typeface="Calibri" pitchFamily="34" charset="0"/>
+                <a:ea typeface="Calibri" pitchFamily="34" charset="-122"/>
+                <a:cs typeface="Calibri" pitchFamily="34" charset="-120"/>
+              </a:rPr>
+              <a:t>O(log n) search &amp; delete</a:t>
+            </a:r>
+            <a:endParaRPr lang="en-US" sz="1250" dirty="0"/>
+          </a:p>
+          <a:p>
+            <a:pPr indent="0" marL="0">
+              <a:buNone/>
+            </a:pPr>
+            <a:r>
+              <a:rPr lang="en-US" sz="1250" dirty="0">
                 <a:solidFill>
                   <a:srgbClr val="1E293B"/>
                 </a:solidFill>
-                <a:latin typeface="Consolas" pitchFamily="34" charset="0"/>
-                <a:ea typeface="Consolas" pitchFamily="34" charset="-122"/>
-                <a:cs typeface="Consolas" pitchFamily="34" charset="-120"/>
-              </a:rPr>
-              <a:t>+ showCourses()</a:t>
-            </a:r>
-            <a:endParaRPr lang="en-US" sz="950" dirty="0"/>
-          </a:p>
-          <a:p>
-            <a:pPr indent="0" marL="0">
-              <a:buNone/>
-            </a:pPr>
-            <a:r>
-              <a:rPr lang="en-US" sz="950" dirty="0">
+                <a:latin typeface="Calibri" pitchFamily="34" charset="0"/>
+                <a:ea typeface="Calibri" pitchFamily="34" charset="-122"/>
+                <a:cs typeface="Calibri" pitchFamily="34" charset="-120"/>
+              </a:rPr>
+              <a:t>Rebuilt after each removal</a:t>
+            </a:r>
+            <a:endParaRPr lang="en-US" sz="1250" dirty="0"/>
+          </a:p>
+          <a:p>
+            <a:pPr indent="0" marL="0">
+              <a:buNone/>
+            </a:pPr>
+            <a:endParaRPr lang="en-US" sz="1250" dirty="0"/>
+          </a:p>
+          <a:p>
+            <a:pPr indent="0" marL="0">
+              <a:buNone/>
+            </a:pPr>
+            <a:r>
+              <a:rPr lang="en-US" sz="1250" dirty="0">
                 <a:solidFill>
                   <a:srgbClr val="1E293B"/>
                 </a:solidFill>
-                <a:latin typeface="Consolas" pitchFamily="34" charset="0"/>
-                <a:ea typeface="Consolas" pitchFamily="34" charset="-122"/>
-                <a:cs typeface="Consolas" pitchFamily="34" charset="-120"/>
-              </a:rPr>
-              <a:t>+ sortByGpa()</a:t>
-            </a:r>
-            <a:endParaRPr lang="en-US" sz="950" dirty="0"/>
-          </a:p>
-          <a:p>
-            <a:pPr indent="0" marL="0">
-              <a:buNone/>
-            </a:pPr>
-            <a:r>
-              <a:rPr lang="en-US" sz="950" dirty="0">
+                <a:latin typeface="Calibri" pitchFamily="34" charset="0"/>
+                <a:ea typeface="Calibri" pitchFamily="34" charset="-122"/>
+                <a:cs typeface="Calibri" pitchFamily="34" charset="-120"/>
+              </a:rPr>
+              <a:t>Used in: StudentSystem</a:t>
+            </a:r>
+            <a:endParaRPr lang="en-US" sz="1250" dirty="0"/>
+          </a:p>
+          <a:p>
+            <a:pPr indent="0" marL="0">
+              <a:buNone/>
+            </a:pPr>
+            <a:r>
+              <a:rPr lang="en-US" sz="1250" dirty="0">
                 <a:solidFill>
                   <a:srgbClr val="1E293B"/>
                 </a:solidFill>
-                <a:latin typeface="Consolas" pitchFamily="34" charset="0"/>
-                <a:ea typeface="Consolas" pitchFamily="34" charset="-122"/>
-                <a:cs typeface="Consolas" pitchFamily="34" charset="-120"/>
-              </a:rPr>
-              <a:t>+ run()</a:t>
-            </a:r>
-            <a:endParaRPr lang="en-US" sz="950" dirty="0"/>
+                <a:latin typeface="Calibri" pitchFamily="34" charset="0"/>
+                <a:ea typeface="Calibri" pitchFamily="34" charset="-122"/>
+                <a:cs typeface="Calibri" pitchFamily="34" charset="-120"/>
+              </a:rPr>
+              <a:t>member: index</a:t>
+            </a:r>
+            <a:endParaRPr lang="en-US" sz="1250" dirty="0"/>
+          </a:p>
+        </p:txBody>
+      </p:sp>
+      <p:sp>
+        <p:nvSpPr>
+          <p:cNvPr id="13" name="Shape 11"/>
+          <p:cNvSpPr/>
+          <p:nvPr/>
+        </p:nvSpPr>
+        <p:spPr>
+          <a:xfrm>
+            <a:off x="6172200" y="960120"/>
+            <a:ext cx="2743200" cy="3904488"/>
+          </a:xfrm>
+          <a:prstGeom prst="rect">
+            <a:avLst/>
+          </a:prstGeom>
+          <a:solidFill>
+            <a:srgbClr val="FFFFFF"/>
+          </a:solidFill>
+          <a:ln w="12700">
+            <a:solidFill>
+              <a:srgbClr val="E2E8F0"/>
+            </a:solidFill>
+            <a:prstDash val="solid"/>
+          </a:ln>
+          <a:effectLst>
+            <a:outerShdw sx="100000" sy="100000" kx="0" ky="0" algn="bl" rotWithShape="0" blurRad="101600" dist="38100" dir="8100000">
+              <a:srgbClr val="000000">
+                <a:alpha val="12000"/>
+              </a:srgbClr>
+            </a:outerShdw>
+          </a:effectLst>
+        </p:spPr>
+      </p:sp>
+      <p:sp>
+        <p:nvSpPr>
+          <p:cNvPr id="14" name="Shape 12"/>
+          <p:cNvSpPr/>
+          <p:nvPr/>
+        </p:nvSpPr>
+        <p:spPr>
+          <a:xfrm>
+            <a:off x="6172200" y="960120"/>
+            <a:ext cx="2743200" cy="457200"/>
+          </a:xfrm>
+          <a:prstGeom prst="rect">
+            <a:avLst/>
+          </a:prstGeom>
+          <a:solidFill>
+            <a:srgbClr val="0F766E"/>
+          </a:solidFill>
+          <a:ln w="12700">
+            <a:solidFill>
+              <a:srgbClr val="0F766E"/>
+            </a:solidFill>
+            <a:prstDash val="solid"/>
+          </a:ln>
+        </p:spPr>
+      </p:sp>
+      <p:sp>
+        <p:nvSpPr>
+          <p:cNvPr id="15" name="Text 13"/>
+          <p:cNvSpPr/>
+          <p:nvPr/>
+        </p:nvSpPr>
+        <p:spPr>
+          <a:xfrm>
+            <a:off x="6281928" y="960120"/>
+            <a:ext cx="2523744" cy="457200"/>
+          </a:xfrm>
+          <a:prstGeom prst="rect">
+            <a:avLst/>
+          </a:prstGeom>
+          <a:noFill/>
+          <a:ln/>
+        </p:spPr>
+        <p:txBody>
+          <a:bodyPr wrap="square" rtlCol="0" anchor="ctr"/>
+          <a:lstStyle/>
+          <a:p>
+            <a:pPr indent="0" marL="0">
+              <a:buNone/>
+            </a:pPr>
+            <a:r>
+              <a:rPr lang="en-US" sz="1300" b="1" dirty="0">
+                <a:solidFill>
+                  <a:srgbClr val="FFFFFF"/>
+                </a:solidFill>
+              </a:rPr>
+              <a:t>🔒  set&lt;string&gt;</a:t>
+            </a:r>
+            <a:endParaRPr lang="en-US" sz="1300" dirty="0"/>
+          </a:p>
+        </p:txBody>
+      </p:sp>
+      <p:sp>
+        <p:nvSpPr>
+          <p:cNvPr id="16" name="Text 14"/>
+          <p:cNvSpPr/>
+          <p:nvPr/>
+        </p:nvSpPr>
+        <p:spPr>
+          <a:xfrm>
+            <a:off x="6309360" y="1508760"/>
+            <a:ext cx="2468880" cy="3200400"/>
+          </a:xfrm>
+          <a:prstGeom prst="rect">
+            <a:avLst/>
+          </a:prstGeom>
+          <a:noFill/>
+          <a:ln/>
+        </p:spPr>
+        <p:txBody>
+          <a:bodyPr wrap="square" rtlCol="0" anchor="t"/>
+          <a:lstStyle/>
+          <a:p>
+            <a:pPr indent="0" marL="0">
+              <a:buNone/>
+            </a:pPr>
+            <a:r>
+              <a:rPr lang="en-US" sz="1250" dirty="0">
+                <a:solidFill>
+                  <a:srgbClr val="1E293B"/>
+                </a:solidFill>
+                <a:latin typeface="Calibri" pitchFamily="34" charset="0"/>
+                <a:ea typeface="Calibri" pitchFamily="34" charset="-122"/>
+                <a:cs typeface="Calibri" pitchFamily="34" charset="-120"/>
+              </a:rPr>
+              <a:t>No duplicates (auto)</a:t>
+            </a:r>
+            <a:endParaRPr lang="en-US" sz="1250" dirty="0"/>
+          </a:p>
+          <a:p>
+            <a:pPr indent="0" marL="0">
+              <a:buNone/>
+            </a:pPr>
+            <a:r>
+              <a:rPr lang="en-US" sz="1250" dirty="0">
+                <a:solidFill>
+                  <a:srgbClr val="1E293B"/>
+                </a:solidFill>
+                <a:latin typeface="Calibri" pitchFamily="34" charset="0"/>
+                <a:ea typeface="Calibri" pitchFamily="34" charset="-122"/>
+                <a:cs typeface="Calibri" pitchFamily="34" charset="-120"/>
+              </a:rPr>
+              <a:t>Auto-sorted alphabetically</a:t>
+            </a:r>
+            <a:endParaRPr lang="en-US" sz="1250" dirty="0"/>
+          </a:p>
+          <a:p>
+            <a:pPr indent="0" marL="0">
+              <a:buNone/>
+            </a:pPr>
+            <a:r>
+              <a:rPr lang="en-US" sz="1250" dirty="0">
+                <a:solidFill>
+                  <a:srgbClr val="1E293B"/>
+                </a:solidFill>
+                <a:latin typeface="Calibri" pitchFamily="34" charset="0"/>
+                <a:ea typeface="Calibri" pitchFamily="34" charset="-122"/>
+                <a:cs typeface="Calibri" pitchFamily="34" charset="-120"/>
+              </a:rPr>
+              <a:t>insert().second → bool</a:t>
+            </a:r>
+            <a:endParaRPr lang="en-US" sz="1250" dirty="0"/>
+          </a:p>
+          <a:p>
+            <a:pPr indent="0" marL="0">
+              <a:buNone/>
+            </a:pPr>
+            <a:endParaRPr lang="en-US" sz="1250" dirty="0"/>
+          </a:p>
+          <a:p>
+            <a:pPr indent="0" marL="0">
+              <a:buNone/>
+            </a:pPr>
+            <a:r>
+              <a:rPr lang="en-US" sz="1250" dirty="0">
+                <a:solidFill>
+                  <a:srgbClr val="1E293B"/>
+                </a:solidFill>
+                <a:latin typeface="Calibri" pitchFamily="34" charset="0"/>
+                <a:ea typeface="Calibri" pitchFamily="34" charset="-122"/>
+                <a:cs typeface="Calibri" pitchFamily="34" charset="-120"/>
+              </a:rPr>
+              <a:t>Used in: Student</a:t>
+            </a:r>
+            <a:endParaRPr lang="en-US" sz="1250" dirty="0"/>
+          </a:p>
+          <a:p>
+            <a:pPr indent="0" marL="0">
+              <a:buNone/>
+            </a:pPr>
+            <a:r>
+              <a:rPr lang="en-US" sz="1250" dirty="0">
+                <a:solidFill>
+                  <a:srgbClr val="1E293B"/>
+                </a:solidFill>
+                <a:latin typeface="Calibri" pitchFamily="34" charset="0"/>
+                <a:ea typeface="Calibri" pitchFamily="34" charset="-122"/>
+                <a:cs typeface="Calibri" pitchFamily="34" charset="-120"/>
+              </a:rPr>
+              <a:t>member: courses</a:t>
+            </a:r>
+            <a:endParaRPr lang="en-US" sz="1250" dirty="0"/>
           </a:p>
         </p:txBody>
       </p:sp>
@@ -3223,7 +3431,7 @@
         </p:nvSpPr>
         <p:spPr>
           <a:xfrm>
-            <a:off x="320040" y="274320"/>
+            <a:off x="320040" y="256032"/>
             <a:ext cx="8503920" cy="502920"/>
           </a:xfrm>
           <a:prstGeom prst="rect">
@@ -3248,7 +3456,7 @@
                 <a:ea typeface="Calibri" pitchFamily="34" charset="-122"/>
                 <a:cs typeface="Calibri" pitchFamily="34" charset="-120"/>
               </a:rPr>
-              <a:t>STL Containers &amp; Algorithms</a:t>
+              <a:t>STL Algorithms  (3 Algorithms)</a:t>
             </a:r>
             <a:endParaRPr lang="en-US" sz="2600" dirty="0"/>
           </a:p>
@@ -3262,7 +3470,7 @@
         </p:nvSpPr>
         <p:spPr>
           <a:xfrm>
-            <a:off x="320040" y="841248"/>
+            <a:off x="320040" y="822960"/>
             <a:ext cx="8503920" cy="36576"/>
           </a:xfrm>
           <a:prstGeom prst="rect">
@@ -3287,8 +3495,8 @@
         </p:nvSpPr>
         <p:spPr>
           <a:xfrm>
-            <a:off x="320040" y="1005840"/>
-            <a:ext cx="2834640" cy="3840480"/>
+            <a:off x="320040" y="960120"/>
+            <a:ext cx="8503920" cy="1261872"/>
           </a:xfrm>
           <a:prstGeom prst="rect">
             <a:avLst/>
@@ -3319,8 +3527,8 @@
         </p:nvSpPr>
         <p:spPr>
           <a:xfrm>
-            <a:off x="320040" y="1005840"/>
-            <a:ext cx="2834640" cy="457200"/>
+            <a:off x="320040" y="960120"/>
+            <a:ext cx="2286000" cy="1261872"/>
           </a:xfrm>
           <a:prstGeom prst="rect">
             <a:avLst/>
@@ -3344,8 +3552,8 @@
         </p:nvSpPr>
         <p:spPr>
           <a:xfrm>
-            <a:off x="411480" y="1005840"/>
-            <a:ext cx="2651760" cy="457200"/>
+            <a:off x="411480" y="1097280"/>
+            <a:ext cx="457200" cy="457200"/>
           </a:xfrm>
           <a:prstGeom prst="rect">
             <a:avLst/>
@@ -3357,31 +3565,103 @@
           <a:bodyPr wrap="square" rtlCol="0" anchor="ctr"/>
           <a:lstStyle/>
           <a:p>
-            <a:pPr indent="0" marL="0">
-              <a:buNone/>
-            </a:pPr>
-            <a:r>
-              <a:rPr lang="en-US" sz="1300" b="1" dirty="0">
+            <a:pPr algn="ctr" indent="0" marL="0">
+              <a:buNone/>
+            </a:pPr>
+            <a:r>
+              <a:rPr lang="en-US" sz="2200" dirty="0">
+                <a:solidFill>
+                  <a:srgbClr val="000000"/>
+                </a:solidFill>
+              </a:rPr>
+              <a:t>⬆️</a:t>
+            </a:r>
+            <a:endParaRPr lang="en-US" sz="2200" dirty="0"/>
+          </a:p>
+        </p:txBody>
+      </p:sp>
+      <p:sp>
+        <p:nvSpPr>
+          <p:cNvPr id="8" name="Text 6"/>
+          <p:cNvSpPr/>
+          <p:nvPr/>
+        </p:nvSpPr>
+        <p:spPr>
+          <a:xfrm>
+            <a:off x="868680" y="1051560"/>
+            <a:ext cx="1600200" cy="402336"/>
+          </a:xfrm>
+          <a:prstGeom prst="rect">
+            <a:avLst/>
+          </a:prstGeom>
+          <a:noFill/>
+          <a:ln/>
+        </p:spPr>
+        <p:txBody>
+          <a:bodyPr wrap="square" rtlCol="0" anchor="ctr"/>
+          <a:lstStyle/>
+          <a:p>
+            <a:pPr indent="0" marL="0">
+              <a:buNone/>
+            </a:pPr>
+            <a:r>
+              <a:rPr lang="en-US" sz="1600" b="1" dirty="0">
                 <a:solidFill>
                   <a:srgbClr val="FFFFFF"/>
                 </a:solidFill>
               </a:rPr>
-              <a:t>📦  vector&lt;Student&gt;</a:t>
-            </a:r>
-            <a:endParaRPr lang="en-US" sz="1300" dirty="0"/>
-          </a:p>
-        </p:txBody>
-      </p:sp>
-      <p:sp>
-        <p:nvSpPr>
-          <p:cNvPr id="8" name="Text 6"/>
-          <p:cNvSpPr/>
-          <p:nvPr/>
-        </p:nvSpPr>
-        <p:spPr>
-          <a:xfrm>
-            <a:off x="457200" y="1554480"/>
-            <a:ext cx="2560320" cy="3108960"/>
+              <a:t>sort()</a:t>
+            </a:r>
+            <a:endParaRPr lang="en-US" sz="1600" dirty="0"/>
+          </a:p>
+        </p:txBody>
+      </p:sp>
+      <p:sp>
+        <p:nvSpPr>
+          <p:cNvPr id="9" name="Text 7"/>
+          <p:cNvSpPr/>
+          <p:nvPr/>
+        </p:nvSpPr>
+        <p:spPr>
+          <a:xfrm>
+            <a:off x="868680" y="1463040"/>
+            <a:ext cx="1600200" cy="329184"/>
+          </a:xfrm>
+          <a:prstGeom prst="rect">
+            <a:avLst/>
+          </a:prstGeom>
+          <a:noFill/>
+          <a:ln/>
+        </p:spPr>
+        <p:txBody>
+          <a:bodyPr wrap="square" rtlCol="0" anchor="ctr"/>
+          <a:lstStyle/>
+          <a:p>
+            <a:pPr indent="0" marL="0">
+              <a:buNone/>
+            </a:pPr>
+            <a:r>
+              <a:rPr lang="en-US" sz="1000" dirty="0">
+                <a:solidFill>
+                  <a:srgbClr val="BAE6FD"/>
+                </a:solidFill>
+              </a:rPr>
+              <a:t>Used in: sortByGpa()</a:t>
+            </a:r>
+            <a:endParaRPr lang="en-US" sz="1000" dirty="0"/>
+          </a:p>
+        </p:txBody>
+      </p:sp>
+      <p:sp>
+        <p:nvSpPr>
+          <p:cNvPr id="10" name="Text 8"/>
+          <p:cNvSpPr/>
+          <p:nvPr/>
+        </p:nvSpPr>
+        <p:spPr>
+          <a:xfrm>
+            <a:off x="2697480" y="1033272"/>
+            <a:ext cx="5989320" cy="1115568"/>
           </a:xfrm>
           <a:prstGeom prst="rect">
             <a:avLst/>
@@ -3397,87 +3677,98 @@
               <a:buNone/>
             </a:pPr>
             <a:r>
-              <a:rPr lang="en-US" sz="1250" dirty="0">
+              <a:rPr lang="en-US" sz="1050" dirty="0">
                 <a:solidFill>
                   <a:srgbClr val="1E293B"/>
                 </a:solidFill>
-                <a:latin typeface="Calibri" pitchFamily="34" charset="0"/>
-                <a:ea typeface="Calibri" pitchFamily="34" charset="-122"/>
-                <a:cs typeface="Calibri" pitchFamily="34" charset="-120"/>
-              </a:rPr>
-              <a:t>Stores all students in the system.</a:t>
-            </a:r>
-            <a:endParaRPr lang="en-US" sz="1250" dirty="0"/>
-          </a:p>
-          <a:p>
-            <a:pPr indent="0" marL="0">
-              <a:buNone/>
-            </a:pPr>
-            <a:r>
-              <a:rPr lang="en-US" sz="1250" dirty="0">
+                <a:latin typeface="Consolas" pitchFamily="34" charset="0"/>
+                <a:ea typeface="Consolas" pitchFamily="34" charset="-122"/>
+                <a:cs typeface="Consolas" pitchFamily="34" charset="-120"/>
+              </a:rPr>
+              <a:t>sort(students.begin(), students.end(),</a:t>
+            </a:r>
+            <a:endParaRPr lang="en-US" sz="1050" dirty="0"/>
+          </a:p>
+          <a:p>
+            <a:pPr indent="0" marL="0">
+              <a:buNone/>
+            </a:pPr>
+            <a:r>
+              <a:rPr lang="en-US" sz="1050" dirty="0">
                 <a:solidFill>
                   <a:srgbClr val="1E293B"/>
                 </a:solidFill>
-                <a:latin typeface="Calibri" pitchFamily="34" charset="0"/>
-                <a:ea typeface="Calibri" pitchFamily="34" charset="-122"/>
-                <a:cs typeface="Calibri" pitchFamily="34" charset="-120"/>
-              </a:rPr>
-              <a:t>Supports dynamic resizing, index-based</a:t>
-            </a:r>
-            <a:endParaRPr lang="en-US" sz="1250" dirty="0"/>
-          </a:p>
-          <a:p>
-            <a:pPr indent="0" marL="0">
-              <a:buNone/>
-            </a:pPr>
-            <a:r>
-              <a:rPr lang="en-US" sz="1250" dirty="0">
+                <a:latin typeface="Consolas" pitchFamily="34" charset="0"/>
+                <a:ea typeface="Consolas" pitchFamily="34" charset="-122"/>
+                <a:cs typeface="Consolas" pitchFamily="34" charset="-120"/>
+              </a:rPr>
+              <a:t>  [](const Student&amp; a, const Student&amp; b){</a:t>
+            </a:r>
+            <a:endParaRPr lang="en-US" sz="1050" dirty="0"/>
+          </a:p>
+          <a:p>
+            <a:pPr indent="0" marL="0">
+              <a:buNone/>
+            </a:pPr>
+            <a:r>
+              <a:rPr lang="en-US" sz="1050" dirty="0">
                 <a:solidFill>
                   <a:srgbClr val="1E293B"/>
                 </a:solidFill>
-                <a:latin typeface="Calibri" pitchFamily="34" charset="0"/>
-                <a:ea typeface="Calibri" pitchFamily="34" charset="-122"/>
-                <a:cs typeface="Calibri" pitchFamily="34" charset="-120"/>
-              </a:rPr>
-              <a:t>access, and iteration.</a:t>
-            </a:r>
-            <a:endParaRPr lang="en-US" sz="1250" dirty="0"/>
-          </a:p>
-          <a:p>
-            <a:pPr indent="0" marL="0">
-              <a:buNone/>
-            </a:pPr>
-            <a:endParaRPr lang="en-US" sz="1250" dirty="0"/>
-          </a:p>
-          <a:p>
-            <a:pPr indent="0" marL="0">
-              <a:buNone/>
-            </a:pPr>
-            <a:r>
-              <a:rPr lang="en-US" sz="1250" dirty="0">
+                <a:latin typeface="Consolas" pitchFamily="34" charset="0"/>
+                <a:ea typeface="Consolas" pitchFamily="34" charset="-122"/>
+                <a:cs typeface="Consolas" pitchFamily="34" charset="-120"/>
+              </a:rPr>
+              <a:t>    return a.getGpa() &lt; b.getGpa();</a:t>
+            </a:r>
+            <a:endParaRPr lang="en-US" sz="1050" dirty="0"/>
+          </a:p>
+          <a:p>
+            <a:pPr indent="0" marL="0">
+              <a:buNone/>
+            </a:pPr>
+            <a:r>
+              <a:rPr lang="en-US" sz="1050" dirty="0">
                 <a:solidFill>
                   <a:srgbClr val="1E293B"/>
                 </a:solidFill>
-                <a:latin typeface="Calibri" pitchFamily="34" charset="0"/>
-                <a:ea typeface="Calibri" pitchFamily="34" charset="-122"/>
-                <a:cs typeface="Calibri" pitchFamily="34" charset="-120"/>
-              </a:rPr>
-              <a:t>Used in: StudentManager</a:t>
-            </a:r>
-            <a:endParaRPr lang="en-US" sz="1250" dirty="0"/>
-          </a:p>
-        </p:txBody>
-      </p:sp>
-      <p:sp>
-        <p:nvSpPr>
-          <p:cNvPr id="9" name="Shape 7"/>
-          <p:cNvSpPr/>
-          <p:nvPr/>
-        </p:nvSpPr>
-        <p:spPr>
-          <a:xfrm>
-            <a:off x="3337560" y="1005840"/>
-            <a:ext cx="2834640" cy="3840480"/>
+                <a:latin typeface="Consolas" pitchFamily="34" charset="0"/>
+                <a:ea typeface="Consolas" pitchFamily="34" charset="-122"/>
+                <a:cs typeface="Consolas" pitchFamily="34" charset="-120"/>
+              </a:rPr>
+              <a:t>  });</a:t>
+            </a:r>
+            <a:endParaRPr lang="en-US" sz="1050" dirty="0"/>
+          </a:p>
+          <a:p>
+            <a:pPr indent="0" marL="0">
+              <a:buNone/>
+            </a:pPr>
+            <a:r>
+              <a:rPr lang="en-US" sz="1050" dirty="0">
+                <a:solidFill>
+                  <a:srgbClr val="1E293B"/>
+                </a:solidFill>
+                <a:latin typeface="Consolas" pitchFamily="34" charset="0"/>
+                <a:ea typeface="Consolas" pitchFamily="34" charset="-122"/>
+                <a:cs typeface="Consolas" pitchFamily="34" charset="-120"/>
+              </a:rPr>
+              <a:t>rebuild(); // update map index</a:t>
+            </a:r>
+            <a:endParaRPr lang="en-US" sz="1050" dirty="0"/>
+          </a:p>
+        </p:txBody>
+      </p:sp>
+      <p:sp>
+        <p:nvSpPr>
+          <p:cNvPr id="11" name="Shape 9"/>
+          <p:cNvSpPr/>
+          <p:nvPr/>
+        </p:nvSpPr>
+        <p:spPr>
+          <a:xfrm>
+            <a:off x="320040" y="2331720"/>
+            <a:ext cx="8503920" cy="1261872"/>
           </a:xfrm>
           <a:prstGeom prst="rect">
             <a:avLst/>
@@ -3502,14 +3793,14 @@
       </p:sp>
       <p:sp>
         <p:nvSpPr>
-          <p:cNvPr id="10" name="Shape 8"/>
-          <p:cNvSpPr/>
-          <p:nvPr/>
-        </p:nvSpPr>
-        <p:spPr>
-          <a:xfrm>
-            <a:off x="3337560" y="1005840"/>
-            <a:ext cx="2834640" cy="457200"/>
+          <p:cNvPr id="12" name="Shape 10"/>
+          <p:cNvSpPr/>
+          <p:nvPr/>
+        </p:nvSpPr>
+        <p:spPr>
+          <a:xfrm>
+            <a:off x="320040" y="2331720"/>
+            <a:ext cx="2286000" cy="1261872"/>
           </a:xfrm>
           <a:prstGeom prst="rect">
             <a:avLst/>
@@ -3527,14 +3818,14 @@
       </p:sp>
       <p:sp>
         <p:nvSpPr>
-          <p:cNvPr id="11" name="Text 9"/>
-          <p:cNvSpPr/>
-          <p:nvPr/>
-        </p:nvSpPr>
-        <p:spPr>
-          <a:xfrm>
-            <a:off x="3429000" y="1005840"/>
-            <a:ext cx="2651760" cy="457200"/>
+          <p:cNvPr id="13" name="Text 11"/>
+          <p:cNvSpPr/>
+          <p:nvPr/>
+        </p:nvSpPr>
+        <p:spPr>
+          <a:xfrm>
+            <a:off x="411480" y="2468880"/>
+            <a:ext cx="457200" cy="457200"/>
           </a:xfrm>
           <a:prstGeom prst="rect">
             <a:avLst/>
@@ -3546,31 +3837,103 @@
           <a:bodyPr wrap="square" rtlCol="0" anchor="ctr"/>
           <a:lstStyle/>
           <a:p>
-            <a:pPr indent="0" marL="0">
-              <a:buNone/>
-            </a:pPr>
-            <a:r>
-              <a:rPr lang="en-US" sz="1300" b="1" dirty="0">
+            <a:pPr algn="ctr" indent="0" marL="0">
+              <a:buNone/>
+            </a:pPr>
+            <a:r>
+              <a:rPr lang="en-US" sz="2200" dirty="0">
+                <a:solidFill>
+                  <a:srgbClr val="000000"/>
+                </a:solidFill>
+              </a:rPr>
+              <a:t>🔍</a:t>
+            </a:r>
+            <a:endParaRPr lang="en-US" sz="2200" dirty="0"/>
+          </a:p>
+        </p:txBody>
+      </p:sp>
+      <p:sp>
+        <p:nvSpPr>
+          <p:cNvPr id="14" name="Text 12"/>
+          <p:cNvSpPr/>
+          <p:nvPr/>
+        </p:nvSpPr>
+        <p:spPr>
+          <a:xfrm>
+            <a:off x="868680" y="2423160"/>
+            <a:ext cx="1600200" cy="402336"/>
+          </a:xfrm>
+          <a:prstGeom prst="rect">
+            <a:avLst/>
+          </a:prstGeom>
+          <a:noFill/>
+          <a:ln/>
+        </p:spPr>
+        <p:txBody>
+          <a:bodyPr wrap="square" rtlCol="0" anchor="ctr"/>
+          <a:lstStyle/>
+          <a:p>
+            <a:pPr indent="0" marL="0">
+              <a:buNone/>
+            </a:pPr>
+            <a:r>
+              <a:rPr lang="en-US" sz="1600" b="1" dirty="0">
                 <a:solidFill>
                   <a:srgbClr val="FFFFFF"/>
                 </a:solidFill>
               </a:rPr>
-              <a:t>📋  vector&lt;string&gt;</a:t>
-            </a:r>
-            <a:endParaRPr lang="en-US" sz="1300" dirty="0"/>
-          </a:p>
-        </p:txBody>
-      </p:sp>
-      <p:sp>
-        <p:nvSpPr>
-          <p:cNvPr id="12" name="Text 10"/>
-          <p:cNvSpPr/>
-          <p:nvPr/>
-        </p:nvSpPr>
-        <p:spPr>
-          <a:xfrm>
-            <a:off x="3474720" y="1554480"/>
-            <a:ext cx="2560320" cy="3108960"/>
+              <a:t>find_if()</a:t>
+            </a:r>
+            <a:endParaRPr lang="en-US" sz="1600" dirty="0"/>
+          </a:p>
+        </p:txBody>
+      </p:sp>
+      <p:sp>
+        <p:nvSpPr>
+          <p:cNvPr id="15" name="Text 13"/>
+          <p:cNvSpPr/>
+          <p:nvPr/>
+        </p:nvSpPr>
+        <p:spPr>
+          <a:xfrm>
+            <a:off x="868680" y="2834640"/>
+            <a:ext cx="1600200" cy="329184"/>
+          </a:xfrm>
+          <a:prstGeom prst="rect">
+            <a:avLst/>
+          </a:prstGeom>
+          <a:noFill/>
+          <a:ln/>
+        </p:spPr>
+        <p:txBody>
+          <a:bodyPr wrap="square" rtlCol="0" anchor="ctr"/>
+          <a:lstStyle/>
+          <a:p>
+            <a:pPr indent="0" marL="0">
+              <a:buNone/>
+            </a:pPr>
+            <a:r>
+              <a:rPr lang="en-US" sz="1000" dirty="0">
+                <a:solidFill>
+                  <a:srgbClr val="BAE6FD"/>
+                </a:solidFill>
+              </a:rPr>
+              <a:t>Used in: searchStudent()</a:t>
+            </a:r>
+            <a:endParaRPr lang="en-US" sz="1000" dirty="0"/>
+          </a:p>
+        </p:txBody>
+      </p:sp>
+      <p:sp>
+        <p:nvSpPr>
+          <p:cNvPr id="16" name="Text 14"/>
+          <p:cNvSpPr/>
+          <p:nvPr/>
+        </p:nvSpPr>
+        <p:spPr>
+          <a:xfrm>
+            <a:off x="2697480" y="2404872"/>
+            <a:ext cx="5989320" cy="1115568"/>
           </a:xfrm>
           <a:prstGeom prst="rect">
             <a:avLst/>
@@ -3586,87 +3949,115 @@
               <a:buNone/>
             </a:pPr>
             <a:r>
-              <a:rPr lang="en-US" sz="1250" dirty="0">
+              <a:rPr lang="en-US" sz="1050" dirty="0">
                 <a:solidFill>
                   <a:srgbClr val="1E293B"/>
                 </a:solidFill>
-                <a:latin typeface="Calibri" pitchFamily="34" charset="0"/>
-                <a:ea typeface="Calibri" pitchFamily="34" charset="-122"/>
-                <a:cs typeface="Calibri" pitchFamily="34" charset="-120"/>
-              </a:rPr>
-              <a:t>Stores courses per student.</a:t>
-            </a:r>
-            <a:endParaRPr lang="en-US" sz="1250" dirty="0"/>
-          </a:p>
-          <a:p>
-            <a:pPr indent="0" marL="0">
-              <a:buNone/>
-            </a:pPr>
-            <a:r>
-              <a:rPr lang="en-US" sz="1250" dirty="0">
+                <a:latin typeface="Consolas" pitchFamily="34" charset="0"/>
+                <a:ea typeface="Consolas" pitchFamily="34" charset="-122"/>
+                <a:cs typeface="Consolas" pitchFamily="34" charset="-120"/>
+              </a:rPr>
+              <a:t>auto it = find_if(</a:t>
+            </a:r>
+            <a:endParaRPr lang="en-US" sz="1050" dirty="0"/>
+          </a:p>
+          <a:p>
+            <a:pPr indent="0" marL="0">
+              <a:buNone/>
+            </a:pPr>
+            <a:r>
+              <a:rPr lang="en-US" sz="1050" dirty="0">
                 <a:solidFill>
                   <a:srgbClr val="1E293B"/>
                 </a:solidFill>
-                <a:latin typeface="Calibri" pitchFamily="34" charset="0"/>
-                <a:ea typeface="Calibri" pitchFamily="34" charset="-122"/>
-                <a:cs typeface="Calibri" pitchFamily="34" charset="-120"/>
-              </a:rPr>
-              <a:t>Manually checks duplicates before</a:t>
-            </a:r>
-            <a:endParaRPr lang="en-US" sz="1250" dirty="0"/>
-          </a:p>
-          <a:p>
-            <a:pPr indent="0" marL="0">
-              <a:buNone/>
-            </a:pPr>
-            <a:r>
-              <a:rPr lang="en-US" sz="1250" dirty="0">
+                <a:latin typeface="Consolas" pitchFamily="34" charset="0"/>
+                <a:ea typeface="Consolas" pitchFamily="34" charset="-122"/>
+                <a:cs typeface="Consolas" pitchFamily="34" charset="-120"/>
+              </a:rPr>
+              <a:t>  students.begin(), students.end(),</a:t>
+            </a:r>
+            <a:endParaRPr lang="en-US" sz="1050" dirty="0"/>
+          </a:p>
+          <a:p>
+            <a:pPr indent="0" marL="0">
+              <a:buNone/>
+            </a:pPr>
+            <a:r>
+              <a:rPr lang="en-US" sz="1050" dirty="0">
                 <a:solidFill>
                   <a:srgbClr val="1E293B"/>
                 </a:solidFill>
-                <a:latin typeface="Calibri" pitchFamily="34" charset="0"/>
-                <a:ea typeface="Calibri" pitchFamily="34" charset="-122"/>
-                <a:cs typeface="Calibri" pitchFamily="34" charset="-120"/>
-              </a:rPr>
-              <a:t>inserting — no extra headers needed.</a:t>
-            </a:r>
-            <a:endParaRPr lang="en-US" sz="1250" dirty="0"/>
-          </a:p>
-          <a:p>
-            <a:pPr indent="0" marL="0">
-              <a:buNone/>
-            </a:pPr>
-            <a:endParaRPr lang="en-US" sz="1250" dirty="0"/>
-          </a:p>
-          <a:p>
-            <a:pPr indent="0" marL="0">
-              <a:buNone/>
-            </a:pPr>
-            <a:r>
-              <a:rPr lang="en-US" sz="1250" dirty="0">
+                <a:latin typeface="Consolas" pitchFamily="34" charset="0"/>
+                <a:ea typeface="Consolas" pitchFamily="34" charset="-122"/>
+                <a:cs typeface="Consolas" pitchFamily="34" charset="-120"/>
+              </a:rPr>
+              <a:t>  [id](const Student&amp; s){</a:t>
+            </a:r>
+            <a:endParaRPr lang="en-US" sz="1050" dirty="0"/>
+          </a:p>
+          <a:p>
+            <a:pPr indent="0" marL="0">
+              <a:buNone/>
+            </a:pPr>
+            <a:r>
+              <a:rPr lang="en-US" sz="1050" dirty="0">
                 <a:solidFill>
                   <a:srgbClr val="1E293B"/>
                 </a:solidFill>
-                <a:latin typeface="Calibri" pitchFamily="34" charset="0"/>
-                <a:ea typeface="Calibri" pitchFamily="34" charset="-122"/>
-                <a:cs typeface="Calibri" pitchFamily="34" charset="-120"/>
-              </a:rPr>
-              <a:t>Used in: Student::courses</a:t>
-            </a:r>
-            <a:endParaRPr lang="en-US" sz="1250" dirty="0"/>
-          </a:p>
-        </p:txBody>
-      </p:sp>
-      <p:sp>
-        <p:nvSpPr>
-          <p:cNvPr id="13" name="Shape 11"/>
-          <p:cNvSpPr/>
-          <p:nvPr/>
-        </p:nvSpPr>
-        <p:spPr>
-          <a:xfrm>
-            <a:off x="6355080" y="1005840"/>
-            <a:ext cx="2834640" cy="3840480"/>
+                <a:latin typeface="Consolas" pitchFamily="34" charset="0"/>
+                <a:ea typeface="Consolas" pitchFamily="34" charset="-122"/>
+                <a:cs typeface="Consolas" pitchFamily="34" charset="-120"/>
+              </a:rPr>
+              <a:t>    return s.getId() == id;</a:t>
+            </a:r>
+            <a:endParaRPr lang="en-US" sz="1050" dirty="0"/>
+          </a:p>
+          <a:p>
+            <a:pPr indent="0" marL="0">
+              <a:buNone/>
+            </a:pPr>
+            <a:r>
+              <a:rPr lang="en-US" sz="1050" dirty="0">
+                <a:solidFill>
+                  <a:srgbClr val="1E293B"/>
+                </a:solidFill>
+                <a:latin typeface="Consolas" pitchFamily="34" charset="0"/>
+                <a:ea typeface="Consolas" pitchFamily="34" charset="-122"/>
+                <a:cs typeface="Consolas" pitchFamily="34" charset="-120"/>
+              </a:rPr>
+              <a:t>  });</a:t>
+            </a:r>
+            <a:endParaRPr lang="en-US" sz="1050" dirty="0"/>
+          </a:p>
+          <a:p>
+            <a:pPr indent="0" marL="0">
+              <a:buNone/>
+            </a:pPr>
+            <a:r>
+              <a:rPr lang="en-US" sz="1050" dirty="0">
+                <a:solidFill>
+                  <a:srgbClr val="1E293B"/>
+                </a:solidFill>
+                <a:latin typeface="Consolas" pitchFamily="34" charset="0"/>
+                <a:ea typeface="Consolas" pitchFamily="34" charset="-122"/>
+                <a:cs typeface="Consolas" pitchFamily="34" charset="-120"/>
+              </a:rPr>
+              <a:t>if(it != students.end()) it-&gt;display();</a:t>
+            </a:r>
+            <a:endParaRPr lang="en-US" sz="1050" dirty="0"/>
+          </a:p>
+        </p:txBody>
+      </p:sp>
+      <p:sp>
+        <p:nvSpPr>
+          <p:cNvPr id="17" name="Shape 15"/>
+          <p:cNvSpPr/>
+          <p:nvPr/>
+        </p:nvSpPr>
+        <p:spPr>
+          <a:xfrm>
+            <a:off x="320040" y="3703320"/>
+            <a:ext cx="8503920" cy="1261872"/>
           </a:xfrm>
           <a:prstGeom prst="rect">
             <a:avLst/>
@@ -3691,14 +4082,14 @@
       </p:sp>
       <p:sp>
         <p:nvSpPr>
-          <p:cNvPr id="14" name="Shape 12"/>
-          <p:cNvSpPr/>
-          <p:nvPr/>
-        </p:nvSpPr>
-        <p:spPr>
-          <a:xfrm>
-            <a:off x="6355080" y="1005840"/>
-            <a:ext cx="2834640" cy="457200"/>
+          <p:cNvPr id="18" name="Shape 16"/>
+          <p:cNvSpPr/>
+          <p:nvPr/>
+        </p:nvSpPr>
+        <p:spPr>
+          <a:xfrm>
+            <a:off x="320040" y="3703320"/>
+            <a:ext cx="2286000" cy="1261872"/>
           </a:xfrm>
           <a:prstGeom prst="rect">
             <a:avLst/>
@@ -3716,14 +4107,14 @@
       </p:sp>
       <p:sp>
         <p:nvSpPr>
-          <p:cNvPr id="15" name="Text 13"/>
-          <p:cNvSpPr/>
-          <p:nvPr/>
-        </p:nvSpPr>
-        <p:spPr>
-          <a:xfrm>
-            <a:off x="6446520" y="1005840"/>
-            <a:ext cx="2651760" cy="457200"/>
+          <p:cNvPr id="19" name="Text 17"/>
+          <p:cNvSpPr/>
+          <p:nvPr/>
+        </p:nvSpPr>
+        <p:spPr>
+          <a:xfrm>
+            <a:off x="411480" y="3840480"/>
+            <a:ext cx="457200" cy="457200"/>
           </a:xfrm>
           <a:prstGeom prst="rect">
             <a:avLst/>
@@ -3735,31 +4126,103 @@
           <a:bodyPr wrap="square" rtlCol="0" anchor="ctr"/>
           <a:lstStyle/>
           <a:p>
-            <a:pPr indent="0" marL="0">
-              <a:buNone/>
-            </a:pPr>
-            <a:r>
-              <a:rPr lang="en-US" sz="1300" b="1" dirty="0">
+            <a:pPr algn="ctr" indent="0" marL="0">
+              <a:buNone/>
+            </a:pPr>
+            <a:r>
+              <a:rPr lang="en-US" sz="2200" dirty="0">
+                <a:solidFill>
+                  <a:srgbClr val="000000"/>
+                </a:solidFill>
+              </a:rPr>
+              <a:t>🔢</a:t>
+            </a:r>
+            <a:endParaRPr lang="en-US" sz="2200" dirty="0"/>
+          </a:p>
+        </p:txBody>
+      </p:sp>
+      <p:sp>
+        <p:nvSpPr>
+          <p:cNvPr id="20" name="Text 18"/>
+          <p:cNvSpPr/>
+          <p:nvPr/>
+        </p:nvSpPr>
+        <p:spPr>
+          <a:xfrm>
+            <a:off x="868680" y="3794760"/>
+            <a:ext cx="1600200" cy="402336"/>
+          </a:xfrm>
+          <a:prstGeom prst="rect">
+            <a:avLst/>
+          </a:prstGeom>
+          <a:noFill/>
+          <a:ln/>
+        </p:spPr>
+        <p:txBody>
+          <a:bodyPr wrap="square" rtlCol="0" anchor="ctr"/>
+          <a:lstStyle/>
+          <a:p>
+            <a:pPr indent="0" marL="0">
+              <a:buNone/>
+            </a:pPr>
+            <a:r>
+              <a:rPr lang="en-US" sz="1600" b="1" dirty="0">
                 <a:solidFill>
                   <a:srgbClr val="FFFFFF"/>
                 </a:solidFill>
               </a:rPr>
-              <a:t>⚙️  Bubble Sort</a:t>
-            </a:r>
-            <a:endParaRPr lang="en-US" sz="1300" dirty="0"/>
-          </a:p>
-        </p:txBody>
-      </p:sp>
-      <p:sp>
-        <p:nvSpPr>
-          <p:cNvPr id="16" name="Text 14"/>
-          <p:cNvSpPr/>
-          <p:nvPr/>
-        </p:nvSpPr>
-        <p:spPr>
-          <a:xfrm>
-            <a:off x="6492240" y="1554480"/>
-            <a:ext cx="2560320" cy="3108960"/>
+              <a:t>count_if()</a:t>
+            </a:r>
+            <a:endParaRPr lang="en-US" sz="1600" dirty="0"/>
+          </a:p>
+        </p:txBody>
+      </p:sp>
+      <p:sp>
+        <p:nvSpPr>
+          <p:cNvPr id="21" name="Text 19"/>
+          <p:cNvSpPr/>
+          <p:nvPr/>
+        </p:nvSpPr>
+        <p:spPr>
+          <a:xfrm>
+            <a:off x="868680" y="4206240"/>
+            <a:ext cx="1600200" cy="329184"/>
+          </a:xfrm>
+          <a:prstGeom prst="rect">
+            <a:avLst/>
+          </a:prstGeom>
+          <a:noFill/>
+          <a:ln/>
+        </p:spPr>
+        <p:txBody>
+          <a:bodyPr wrap="square" rtlCol="0" anchor="ctr"/>
+          <a:lstStyle/>
+          <a:p>
+            <a:pPr indent="0" marL="0">
+              <a:buNone/>
+            </a:pPr>
+            <a:r>
+              <a:rPr lang="en-US" sz="1000" dirty="0">
+                <a:solidFill>
+                  <a:srgbClr val="BAE6FD"/>
+                </a:solidFill>
+              </a:rPr>
+              <a:t>Used in: countHighGpa()  ★ Bonus</a:t>
+            </a:r>
+            <a:endParaRPr lang="en-US" sz="1000" dirty="0"/>
+          </a:p>
+        </p:txBody>
+      </p:sp>
+      <p:sp>
+        <p:nvSpPr>
+          <p:cNvPr id="22" name="Text 20"/>
+          <p:cNvSpPr/>
+          <p:nvPr/>
+        </p:nvSpPr>
+        <p:spPr>
+          <a:xfrm>
+            <a:off x="2697480" y="3776472"/>
+            <a:ext cx="5989320" cy="1115568"/>
           </a:xfrm>
           <a:prstGeom prst="rect">
             <a:avLst/>
@@ -3775,74 +4238,102 @@
               <a:buNone/>
             </a:pPr>
             <a:r>
-              <a:rPr lang="en-US" sz="1250" dirty="0">
+              <a:rPr lang="en-US" sz="1050" dirty="0">
                 <a:solidFill>
                   <a:srgbClr val="1E293B"/>
                 </a:solidFill>
-                <a:latin typeface="Calibri" pitchFamily="34" charset="0"/>
-                <a:ea typeface="Calibri" pitchFamily="34" charset="-122"/>
-                <a:cs typeface="Calibri" pitchFamily="34" charset="-120"/>
-              </a:rPr>
-              <a:t>Custom O(n²) sort on a copy of the</a:t>
-            </a:r>
-            <a:endParaRPr lang="en-US" sz="1250" dirty="0"/>
-          </a:p>
-          <a:p>
-            <a:pPr indent="0" marL="0">
-              <a:buNone/>
-            </a:pPr>
-            <a:r>
-              <a:rPr lang="en-US" sz="1250" dirty="0">
+                <a:latin typeface="Consolas" pitchFamily="34" charset="0"/>
+                <a:ea typeface="Consolas" pitchFamily="34" charset="-122"/>
+                <a:cs typeface="Consolas" pitchFamily="34" charset="-120"/>
+              </a:rPr>
+              <a:t>int n = count_if(</a:t>
+            </a:r>
+            <a:endParaRPr lang="en-US" sz="1050" dirty="0"/>
+          </a:p>
+          <a:p>
+            <a:pPr indent="0" marL="0">
+              <a:buNone/>
+            </a:pPr>
+            <a:r>
+              <a:rPr lang="en-US" sz="1050" dirty="0">
                 <a:solidFill>
                   <a:srgbClr val="1E293B"/>
                 </a:solidFill>
-                <a:latin typeface="Calibri" pitchFamily="34" charset="0"/>
-                <a:ea typeface="Calibri" pitchFamily="34" charset="-122"/>
-                <a:cs typeface="Calibri" pitchFamily="34" charset="-120"/>
-              </a:rPr>
-              <a:t>vector — keeps original order intact.</a:t>
-            </a:r>
-            <a:endParaRPr lang="en-US" sz="1250" dirty="0"/>
-          </a:p>
-          <a:p>
-            <a:pPr indent="0" marL="0">
-              <a:buNone/>
-            </a:pPr>
-            <a:r>
-              <a:rPr lang="en-US" sz="1250" dirty="0">
+                <a:latin typeface="Consolas" pitchFamily="34" charset="0"/>
+                <a:ea typeface="Consolas" pitchFamily="34" charset="-122"/>
+                <a:cs typeface="Consolas" pitchFamily="34" charset="-120"/>
+              </a:rPr>
+              <a:t>  students.begin(), students.end(),</a:t>
+            </a:r>
+            <a:endParaRPr lang="en-US" sz="1050" dirty="0"/>
+          </a:p>
+          <a:p>
+            <a:pPr indent="0" marL="0">
+              <a:buNone/>
+            </a:pPr>
+            <a:r>
+              <a:rPr lang="en-US" sz="1050" dirty="0">
                 <a:solidFill>
                   <a:srgbClr val="1E293B"/>
                 </a:solidFill>
-                <a:latin typeface="Calibri" pitchFamily="34" charset="0"/>
-                <a:ea typeface="Calibri" pitchFamily="34" charset="-122"/>
-                <a:cs typeface="Calibri" pitchFamily="34" charset="-120"/>
-              </a:rPr>
-              <a:t>Sorts students by GPA descending.</a:t>
-            </a:r>
-            <a:endParaRPr lang="en-US" sz="1250" dirty="0"/>
-          </a:p>
-          <a:p>
-            <a:pPr indent="0" marL="0">
-              <a:buNone/>
-            </a:pPr>
-            <a:endParaRPr lang="en-US" sz="1250" dirty="0"/>
-          </a:p>
-          <a:p>
-            <a:pPr indent="0" marL="0">
-              <a:buNone/>
-            </a:pPr>
-            <a:r>
-              <a:rPr lang="en-US" sz="1250" dirty="0">
+                <a:latin typeface="Consolas" pitchFamily="34" charset="0"/>
+                <a:ea typeface="Consolas" pitchFamily="34" charset="-122"/>
+                <a:cs typeface="Consolas" pitchFamily="34" charset="-120"/>
+              </a:rPr>
+              <a:t>  [](const Student&amp; s){</a:t>
+            </a:r>
+            <a:endParaRPr lang="en-US" sz="1050" dirty="0"/>
+          </a:p>
+          <a:p>
+            <a:pPr indent="0" marL="0">
+              <a:buNone/>
+            </a:pPr>
+            <a:r>
+              <a:rPr lang="en-US" sz="1050" dirty="0">
                 <a:solidFill>
                   <a:srgbClr val="1E293B"/>
                 </a:solidFill>
-                <a:latin typeface="Calibri" pitchFamily="34" charset="0"/>
-                <a:ea typeface="Calibri" pitchFamily="34" charset="-122"/>
-                <a:cs typeface="Calibri" pitchFamily="34" charset="-120"/>
-              </a:rPr>
-              <a:t>Used in: sortByGpa()</a:t>
-            </a:r>
-            <a:endParaRPr lang="en-US" sz="1250" dirty="0"/>
+                <a:latin typeface="Consolas" pitchFamily="34" charset="0"/>
+                <a:ea typeface="Consolas" pitchFamily="34" charset="-122"/>
+                <a:cs typeface="Consolas" pitchFamily="34" charset="-120"/>
+              </a:rPr>
+              <a:t>    return s.getGpa() &gt;= 3.0;</a:t>
+            </a:r>
+            <a:endParaRPr lang="en-US" sz="1050" dirty="0"/>
+          </a:p>
+          <a:p>
+            <a:pPr indent="0" marL="0">
+              <a:buNone/>
+            </a:pPr>
+            <a:r>
+              <a:rPr lang="en-US" sz="1050" dirty="0">
+                <a:solidFill>
+                  <a:srgbClr val="1E293B"/>
+                </a:solidFill>
+                <a:latin typeface="Consolas" pitchFamily="34" charset="0"/>
+                <a:ea typeface="Consolas" pitchFamily="34" charset="-122"/>
+                <a:cs typeface="Consolas" pitchFamily="34" charset="-120"/>
+              </a:rPr>
+              <a:t>  });</a:t>
+            </a:r>
+            <a:endParaRPr lang="en-US" sz="1050" dirty="0"/>
+          </a:p>
+          <a:p>
+            <a:pPr indent="0" marL="0">
+              <a:buNone/>
+            </a:pPr>
+            <a:r>
+              <a:rPr lang="en-US" sz="1050" dirty="0">
+                <a:solidFill>
+                  <a:srgbClr val="1E293B"/>
+                </a:solidFill>
+                <a:latin typeface="Consolas" pitchFamily="34" charset="0"/>
+                <a:ea typeface="Consolas" pitchFamily="34" charset="-122"/>
+                <a:cs typeface="Consolas" pitchFamily="34" charset="-120"/>
+              </a:rPr>
+              <a:t>cout &lt;&lt; "GPA&gt;=3.0 : " &lt;&lt; n;</a:t>
+            </a:r>
+            <a:endParaRPr lang="en-US" sz="1050" dirty="0"/>
           </a:p>
         </p:txBody>
       </p:sp>
@@ -3911,7 +4402,7 @@
         </p:nvSpPr>
         <p:spPr>
           <a:xfrm>
-            <a:off x="320040" y="274320"/>
+            <a:off x="320040" y="256032"/>
             <a:ext cx="8503920" cy="502920"/>
           </a:xfrm>
           <a:prstGeom prst="rect">
@@ -3950,7 +4441,7 @@
         </p:nvSpPr>
         <p:spPr>
           <a:xfrm>
-            <a:off x="320040" y="841248"/>
+            <a:off x="320040" y="822960"/>
             <a:ext cx="8503920" cy="36576"/>
           </a:xfrm>
           <a:prstGeom prst="rect">
@@ -3975,8 +4466,8 @@
         </p:nvSpPr>
         <p:spPr>
           <a:xfrm>
-            <a:off x="320040" y="1005840"/>
-            <a:ext cx="3474720" cy="3840480"/>
+            <a:off x="320040" y="960120"/>
+            <a:ext cx="3566160" cy="3904488"/>
           </a:xfrm>
           <a:prstGeom prst="rect">
             <a:avLst/>
@@ -4007,7 +4498,46 @@
         </p:nvSpPr>
         <p:spPr>
           <a:xfrm>
-            <a:off x="411480" y="1097280"/>
+            <a:off x="411480" y="1051560"/>
+            <a:ext cx="3383280" cy="320040"/>
+          </a:xfrm>
+          <a:prstGeom prst="rect">
+            <a:avLst/>
+          </a:prstGeom>
+          <a:noFill/>
+          <a:ln/>
+        </p:spPr>
+        <p:txBody>
+          <a:bodyPr wrap="square" rtlCol="0" anchor="ctr"/>
+          <a:lstStyle/>
+          <a:p>
+            <a:pPr indent="0" marL="0">
+              <a:buNone/>
+            </a:pPr>
+            <a:r>
+              <a:rPr lang="en-US" sz="1300" b="1" dirty="0">
+                <a:solidFill>
+                  <a:srgbClr val="93C5FD"/>
+                </a:solidFill>
+                <a:latin typeface="Consolas" pitchFamily="34" charset="0"/>
+                <a:ea typeface="Consolas" pitchFamily="34" charset="-122"/>
+                <a:cs typeface="Consolas" pitchFamily="34" charset="-120"/>
+              </a:rPr>
+              <a:t>Student System</a:t>
+            </a:r>
+            <a:endParaRPr lang="en-US" sz="1300" dirty="0"/>
+          </a:p>
+        </p:txBody>
+      </p:sp>
+      <p:sp>
+        <p:nvSpPr>
+          <p:cNvPr id="7" name="Text 5"/>
+          <p:cNvSpPr/>
+          <p:nvPr/>
+        </p:nvSpPr>
+        <p:spPr>
+          <a:xfrm>
+            <a:off x="502920" y="1444752"/>
             <a:ext cx="3291840" cy="320040"/>
           </a:xfrm>
           <a:prstGeom prst="rect">
@@ -4024,30 +4554,30 @@
               <a:buNone/>
             </a:pPr>
             <a:r>
-              <a:rPr lang="en-US" sz="1300" b="1" dirty="0">
-                <a:solidFill>
-                  <a:srgbClr val="93C5FD"/>
-                </a:solidFill>
-                <a:latin typeface="Consolas" pitchFamily="34" charset="0"/>
-                <a:ea typeface="Consolas" pitchFamily="34" charset="-122"/>
-                <a:cs typeface="Consolas" pitchFamily="34" charset="-120"/>
-              </a:rPr>
-              <a:t>--- Menu ---</a:t>
-            </a:r>
-            <a:endParaRPr lang="en-US" sz="1300" dirty="0"/>
-          </a:p>
-        </p:txBody>
-      </p:sp>
-      <p:sp>
-        <p:nvSpPr>
-          <p:cNvPr id="7" name="Text 5"/>
-          <p:cNvSpPr/>
-          <p:nvPr/>
-        </p:nvSpPr>
-        <p:spPr>
-          <a:xfrm>
-            <a:off x="502920" y="1481328"/>
-            <a:ext cx="3200400" cy="347472"/>
+              <a:rPr lang="en-US" sz="1200" dirty="0">
+                <a:solidFill>
+                  <a:srgbClr val="FFFFFF"/>
+                </a:solidFill>
+                <a:latin typeface="Consolas" pitchFamily="34" charset="0"/>
+                <a:ea typeface="Consolas" pitchFamily="34" charset="-122"/>
+                <a:cs typeface="Consolas" pitchFamily="34" charset="-120"/>
+              </a:rPr>
+              <a:t>1. Add Student</a:t>
+            </a:r>
+            <a:endParaRPr lang="en-US" sz="1200" dirty="0"/>
+          </a:p>
+        </p:txBody>
+      </p:sp>
+      <p:sp>
+        <p:nvSpPr>
+          <p:cNvPr id="8" name="Text 6"/>
+          <p:cNvSpPr/>
+          <p:nvPr/>
+        </p:nvSpPr>
+        <p:spPr>
+          <a:xfrm>
+            <a:off x="502920" y="1801368"/>
+            <a:ext cx="3291840" cy="320040"/>
           </a:xfrm>
           <a:prstGeom prst="rect">
             <a:avLst/>
@@ -4063,7 +4593,7 @@
               <a:buNone/>
             </a:pPr>
             <a:r>
-              <a:rPr lang="en-US" sz="1250" dirty="0">
+              <a:rPr lang="en-US" sz="1200" dirty="0">
                 <a:solidFill>
                   <a:srgbClr val="FFFFFF"/>
                 </a:solidFill>
@@ -4071,22 +4601,22 @@
                 <a:ea typeface="Consolas" pitchFamily="34" charset="-122"/>
                 <a:cs typeface="Consolas" pitchFamily="34" charset="-120"/>
               </a:rPr>
-              <a:t>1.  Add Student</a:t>
-            </a:r>
-            <a:endParaRPr lang="en-US" sz="1250" dirty="0"/>
-          </a:p>
-        </p:txBody>
-      </p:sp>
-      <p:sp>
-        <p:nvSpPr>
-          <p:cNvPr id="8" name="Text 6"/>
-          <p:cNvSpPr/>
-          <p:nvPr/>
-        </p:nvSpPr>
-        <p:spPr>
-          <a:xfrm>
-            <a:off x="502920" y="1865376"/>
-            <a:ext cx="3200400" cy="347472"/>
+              <a:t>2. Remove Student</a:t>
+            </a:r>
+            <a:endParaRPr lang="en-US" sz="1200" dirty="0"/>
+          </a:p>
+        </p:txBody>
+      </p:sp>
+      <p:sp>
+        <p:nvSpPr>
+          <p:cNvPr id="9" name="Text 7"/>
+          <p:cNvSpPr/>
+          <p:nvPr/>
+        </p:nvSpPr>
+        <p:spPr>
+          <a:xfrm>
+            <a:off x="502920" y="2157984"/>
+            <a:ext cx="3291840" cy="320040"/>
           </a:xfrm>
           <a:prstGeom prst="rect">
             <a:avLst/>
@@ -4102,7 +4632,7 @@
               <a:buNone/>
             </a:pPr>
             <a:r>
-              <a:rPr lang="en-US" sz="1250" dirty="0">
+              <a:rPr lang="en-US" sz="1200" dirty="0">
                 <a:solidFill>
                   <a:srgbClr val="FFFFFF"/>
                 </a:solidFill>
@@ -4110,22 +4640,22 @@
                 <a:ea typeface="Consolas" pitchFamily="34" charset="-122"/>
                 <a:cs typeface="Consolas" pitchFamily="34" charset="-120"/>
               </a:rPr>
-              <a:t>2.  Remove Student</a:t>
-            </a:r>
-            <a:endParaRPr lang="en-US" sz="1250" dirty="0"/>
-          </a:p>
-        </p:txBody>
-      </p:sp>
-      <p:sp>
-        <p:nvSpPr>
-          <p:cNvPr id="9" name="Text 7"/>
-          <p:cNvSpPr/>
-          <p:nvPr/>
-        </p:nvSpPr>
-        <p:spPr>
-          <a:xfrm>
-            <a:off x="502920" y="2249424"/>
-            <a:ext cx="3200400" cy="347472"/>
+              <a:t>3. Search Student</a:t>
+            </a:r>
+            <a:endParaRPr lang="en-US" sz="1200" dirty="0"/>
+          </a:p>
+        </p:txBody>
+      </p:sp>
+      <p:sp>
+        <p:nvSpPr>
+          <p:cNvPr id="10" name="Text 8"/>
+          <p:cNvSpPr/>
+          <p:nvPr/>
+        </p:nvSpPr>
+        <p:spPr>
+          <a:xfrm>
+            <a:off x="502920" y="2514600"/>
+            <a:ext cx="3291840" cy="320040"/>
           </a:xfrm>
           <a:prstGeom prst="rect">
             <a:avLst/>
@@ -4141,7 +4671,7 @@
               <a:buNone/>
             </a:pPr>
             <a:r>
-              <a:rPr lang="en-US" sz="1250" dirty="0">
+              <a:rPr lang="en-US" sz="1200" dirty="0">
                 <a:solidFill>
                   <a:srgbClr val="FFFFFF"/>
                 </a:solidFill>
@@ -4149,22 +4679,22 @@
                 <a:ea typeface="Consolas" pitchFamily="34" charset="-122"/>
                 <a:cs typeface="Consolas" pitchFamily="34" charset="-120"/>
               </a:rPr>
-              <a:t>3.  Search Student</a:t>
-            </a:r>
-            <a:endParaRPr lang="en-US" sz="1250" dirty="0"/>
-          </a:p>
-        </p:txBody>
-      </p:sp>
-      <p:sp>
-        <p:nvSpPr>
-          <p:cNvPr id="10" name="Text 8"/>
-          <p:cNvSpPr/>
-          <p:nvPr/>
-        </p:nvSpPr>
-        <p:spPr>
-          <a:xfrm>
-            <a:off x="502920" y="2633472"/>
-            <a:ext cx="3200400" cy="347472"/>
+              <a:t>4. Display All</a:t>
+            </a:r>
+            <a:endParaRPr lang="en-US" sz="1200" dirty="0"/>
+          </a:p>
+        </p:txBody>
+      </p:sp>
+      <p:sp>
+        <p:nvSpPr>
+          <p:cNvPr id="11" name="Text 9"/>
+          <p:cNvSpPr/>
+          <p:nvPr/>
+        </p:nvSpPr>
+        <p:spPr>
+          <a:xfrm>
+            <a:off x="502920" y="2871216"/>
+            <a:ext cx="3291840" cy="320040"/>
           </a:xfrm>
           <a:prstGeom prst="rect">
             <a:avLst/>
@@ -4180,7 +4710,7 @@
               <a:buNone/>
             </a:pPr>
             <a:r>
-              <a:rPr lang="en-US" sz="1250" dirty="0">
+              <a:rPr lang="en-US" sz="1200" dirty="0">
                 <a:solidFill>
                   <a:srgbClr val="FFFFFF"/>
                 </a:solidFill>
@@ -4188,22 +4718,22 @@
                 <a:ea typeface="Consolas" pitchFamily="34" charset="-122"/>
                 <a:cs typeface="Consolas" pitchFamily="34" charset="-120"/>
               </a:rPr>
-              <a:t>4.  Display All Students</a:t>
-            </a:r>
-            <a:endParaRPr lang="en-US" sz="1250" dirty="0"/>
-          </a:p>
-        </p:txBody>
-      </p:sp>
-      <p:sp>
-        <p:nvSpPr>
-          <p:cNvPr id="11" name="Text 9"/>
-          <p:cNvSpPr/>
-          <p:nvPr/>
-        </p:nvSpPr>
-        <p:spPr>
-          <a:xfrm>
-            <a:off x="502920" y="3017520"/>
-            <a:ext cx="3200400" cy="347472"/>
+              <a:t>5. Enroll in Course</a:t>
+            </a:r>
+            <a:endParaRPr lang="en-US" sz="1200" dirty="0"/>
+          </a:p>
+        </p:txBody>
+      </p:sp>
+      <p:sp>
+        <p:nvSpPr>
+          <p:cNvPr id="12" name="Text 10"/>
+          <p:cNvSpPr/>
+          <p:nvPr/>
+        </p:nvSpPr>
+        <p:spPr>
+          <a:xfrm>
+            <a:off x="502920" y="3227832"/>
+            <a:ext cx="3291840" cy="320040"/>
           </a:xfrm>
           <a:prstGeom prst="rect">
             <a:avLst/>
@@ -4219,7 +4749,7 @@
               <a:buNone/>
             </a:pPr>
             <a:r>
-              <a:rPr lang="en-US" sz="1250" dirty="0">
+              <a:rPr lang="en-US" sz="1200" dirty="0">
                 <a:solidFill>
                   <a:srgbClr val="FFFFFF"/>
                 </a:solidFill>
@@ -4227,22 +4757,22 @@
                 <a:ea typeface="Consolas" pitchFamily="34" charset="-122"/>
                 <a:cs typeface="Consolas" pitchFamily="34" charset="-120"/>
               </a:rPr>
-              <a:t>5.  Enroll in Course</a:t>
-            </a:r>
-            <a:endParaRPr lang="en-US" sz="1250" dirty="0"/>
-          </a:p>
-        </p:txBody>
-      </p:sp>
-      <p:sp>
-        <p:nvSpPr>
-          <p:cNvPr id="12" name="Text 10"/>
-          <p:cNvSpPr/>
-          <p:nvPr/>
-        </p:nvSpPr>
-        <p:spPr>
-          <a:xfrm>
-            <a:off x="502920" y="3401568"/>
-            <a:ext cx="3200400" cy="347472"/>
+              <a:t>6. Show Courses</a:t>
+            </a:r>
+            <a:endParaRPr lang="en-US" sz="1200" dirty="0"/>
+          </a:p>
+        </p:txBody>
+      </p:sp>
+      <p:sp>
+        <p:nvSpPr>
+          <p:cNvPr id="13" name="Text 11"/>
+          <p:cNvSpPr/>
+          <p:nvPr/>
+        </p:nvSpPr>
+        <p:spPr>
+          <a:xfrm>
+            <a:off x="502920" y="3584448"/>
+            <a:ext cx="3291840" cy="320040"/>
           </a:xfrm>
           <a:prstGeom prst="rect">
             <a:avLst/>
@@ -4258,7 +4788,7 @@
               <a:buNone/>
             </a:pPr>
             <a:r>
-              <a:rPr lang="en-US" sz="1250" dirty="0">
+              <a:rPr lang="en-US" sz="1200" dirty="0">
                 <a:solidFill>
                   <a:srgbClr val="FFFFFF"/>
                 </a:solidFill>
@@ -4266,22 +4796,22 @@
                 <a:ea typeface="Consolas" pitchFamily="34" charset="-122"/>
                 <a:cs typeface="Consolas" pitchFamily="34" charset="-120"/>
               </a:rPr>
-              <a:t>6.  Show Student Courses</a:t>
-            </a:r>
-            <a:endParaRPr lang="en-US" sz="1250" dirty="0"/>
-          </a:p>
-        </p:txBody>
-      </p:sp>
-      <p:sp>
-        <p:nvSpPr>
-          <p:cNvPr id="13" name="Text 11"/>
-          <p:cNvSpPr/>
-          <p:nvPr/>
-        </p:nvSpPr>
-        <p:spPr>
-          <a:xfrm>
-            <a:off x="502920" y="3785616"/>
-            <a:ext cx="3200400" cy="347472"/>
+              <a:t>7. Sort by GPA</a:t>
+            </a:r>
+            <a:endParaRPr lang="en-US" sz="1200" dirty="0"/>
+          </a:p>
+        </p:txBody>
+      </p:sp>
+      <p:sp>
+        <p:nvSpPr>
+          <p:cNvPr id="14" name="Text 12"/>
+          <p:cNvSpPr/>
+          <p:nvPr/>
+        </p:nvSpPr>
+        <p:spPr>
+          <a:xfrm>
+            <a:off x="502920" y="3941064"/>
+            <a:ext cx="3291840" cy="320040"/>
           </a:xfrm>
           <a:prstGeom prst="rect">
             <a:avLst/>
@@ -4297,7 +4827,46 @@
               <a:buNone/>
             </a:pPr>
             <a:r>
-              <a:rPr lang="en-US" sz="1250" dirty="0">
+              <a:rPr lang="en-US" sz="1200" b="1" dirty="0">
+                <a:solidFill>
+                  <a:srgbClr val="FCD34D"/>
+                </a:solidFill>
+                <a:latin typeface="Consolas" pitchFamily="34" charset="0"/>
+                <a:ea typeface="Consolas" pitchFamily="34" charset="-122"/>
+                <a:cs typeface="Consolas" pitchFamily="34" charset="-120"/>
+              </a:rPr>
+              <a:t>8. Count GPA&gt;=3  ★</a:t>
+            </a:r>
+            <a:endParaRPr lang="en-US" sz="1200" dirty="0"/>
+          </a:p>
+        </p:txBody>
+      </p:sp>
+      <p:sp>
+        <p:nvSpPr>
+          <p:cNvPr id="15" name="Text 13"/>
+          <p:cNvSpPr/>
+          <p:nvPr/>
+        </p:nvSpPr>
+        <p:spPr>
+          <a:xfrm>
+            <a:off x="502920" y="4297680"/>
+            <a:ext cx="3291840" cy="320040"/>
+          </a:xfrm>
+          <a:prstGeom prst="rect">
+            <a:avLst/>
+          </a:prstGeom>
+          <a:noFill/>
+          <a:ln/>
+        </p:spPr>
+        <p:txBody>
+          <a:bodyPr wrap="square" rtlCol="0" anchor="ctr"/>
+          <a:lstStyle/>
+          <a:p>
+            <a:pPr indent="0" marL="0">
+              <a:buNone/>
+            </a:pPr>
+            <a:r>
+              <a:rPr lang="en-US" sz="1200" dirty="0">
                 <a:solidFill>
                   <a:srgbClr val="FFFFFF"/>
                 </a:solidFill>
@@ -4305,61 +4874,22 @@
                 <a:ea typeface="Consolas" pitchFamily="34" charset="-122"/>
                 <a:cs typeface="Consolas" pitchFamily="34" charset="-120"/>
               </a:rPr>
-              <a:t>7.  Sort Students by GPA</a:t>
-            </a:r>
-            <a:endParaRPr lang="en-US" sz="1250" dirty="0"/>
-          </a:p>
-        </p:txBody>
-      </p:sp>
-      <p:sp>
-        <p:nvSpPr>
-          <p:cNvPr id="14" name="Text 12"/>
-          <p:cNvSpPr/>
-          <p:nvPr/>
-        </p:nvSpPr>
-        <p:spPr>
-          <a:xfrm>
-            <a:off x="502920" y="4169664"/>
-            <a:ext cx="3200400" cy="347472"/>
-          </a:xfrm>
-          <a:prstGeom prst="rect">
-            <a:avLst/>
-          </a:prstGeom>
-          <a:noFill/>
-          <a:ln/>
-        </p:spPr>
-        <p:txBody>
-          <a:bodyPr wrap="square" rtlCol="0" anchor="ctr"/>
-          <a:lstStyle/>
-          <a:p>
-            <a:pPr indent="0" marL="0">
-              <a:buNone/>
-            </a:pPr>
-            <a:r>
-              <a:rPr lang="en-US" sz="1250" dirty="0">
-                <a:solidFill>
-                  <a:srgbClr val="FFFFFF"/>
-                </a:solidFill>
-                <a:latin typeface="Consolas" pitchFamily="34" charset="0"/>
-                <a:ea typeface="Consolas" pitchFamily="34" charset="-122"/>
-                <a:cs typeface="Consolas" pitchFamily="34" charset="-120"/>
-              </a:rPr>
-              <a:t>8.  Exit</a:t>
-            </a:r>
-            <a:endParaRPr lang="en-US" sz="1250" dirty="0"/>
-          </a:p>
-        </p:txBody>
-      </p:sp>
-      <p:sp>
-        <p:nvSpPr>
-          <p:cNvPr id="15" name="Shape 13"/>
-          <p:cNvSpPr/>
-          <p:nvPr/>
-        </p:nvSpPr>
-        <p:spPr>
-          <a:xfrm>
-            <a:off x="4023360" y="1005840"/>
-            <a:ext cx="4846320" cy="530352"/>
+              <a:t>0. Exit</a:t>
+            </a:r>
+            <a:endParaRPr lang="en-US" sz="1200" dirty="0"/>
+          </a:p>
+        </p:txBody>
+      </p:sp>
+      <p:sp>
+        <p:nvSpPr>
+          <p:cNvPr id="16" name="Shape 14"/>
+          <p:cNvSpPr/>
+          <p:nvPr/>
+        </p:nvSpPr>
+        <p:spPr>
+          <a:xfrm>
+            <a:off x="4069080" y="960120"/>
+            <a:ext cx="4754880" cy="685800"/>
           </a:xfrm>
           <a:prstGeom prst="rect">
             <a:avLst/>
@@ -4384,14 +4914,14 @@
       </p:sp>
       <p:sp>
         <p:nvSpPr>
-          <p:cNvPr id="16" name="Text 14"/>
-          <p:cNvSpPr/>
-          <p:nvPr/>
-        </p:nvSpPr>
-        <p:spPr>
-          <a:xfrm>
-            <a:off x="4160520" y="1005840"/>
-            <a:ext cx="457200" cy="530352"/>
+          <p:cNvPr id="17" name="Text 15"/>
+          <p:cNvSpPr/>
+          <p:nvPr/>
+        </p:nvSpPr>
+        <p:spPr>
+          <a:xfrm>
+            <a:off x="4160520" y="960120"/>
+            <a:ext cx="457200" cy="685800"/>
           </a:xfrm>
           <a:prstGeom prst="rect">
             <a:avLst/>
@@ -4407,66 +4937,99 @@
               <a:buNone/>
             </a:pPr>
             <a:r>
-              <a:rPr lang="en-US" sz="1600" dirty="0">
+              <a:rPr lang="en-US" sz="1800" dirty="0">
                 <a:solidFill>
                   <a:srgbClr val="000000"/>
                 </a:solidFill>
               </a:rPr>
               <a:t>🔒</a:t>
             </a:r>
-            <a:endParaRPr lang="en-US" sz="1600" dirty="0"/>
-          </a:p>
-        </p:txBody>
-      </p:sp>
-      <p:sp>
-        <p:nvSpPr>
-          <p:cNvPr id="17" name="Text 15"/>
-          <p:cNvSpPr/>
-          <p:nvPr/>
-        </p:nvSpPr>
-        <p:spPr>
-          <a:xfrm>
-            <a:off x="4663440" y="1005840"/>
-            <a:ext cx="4069080" cy="530352"/>
-          </a:xfrm>
-          <a:prstGeom prst="rect">
-            <a:avLst/>
-          </a:prstGeom>
-          <a:noFill/>
-          <a:ln/>
-        </p:spPr>
-        <p:txBody>
-          <a:bodyPr wrap="square" rtlCol="0" anchor="ctr"/>
-          <a:lstStyle/>
-          <a:p>
-            <a:pPr indent="0" marL="0">
-              <a:buNone/>
-            </a:pPr>
-            <a:r>
-              <a:rPr lang="en-US" sz="1250" dirty="0">
+            <a:endParaRPr lang="en-US" sz="1800" dirty="0"/>
+          </a:p>
+        </p:txBody>
+      </p:sp>
+      <p:sp>
+        <p:nvSpPr>
+          <p:cNvPr id="18" name="Text 16"/>
+          <p:cNvSpPr/>
+          <p:nvPr/>
+        </p:nvSpPr>
+        <p:spPr>
+          <a:xfrm>
+            <a:off x="4663440" y="960120"/>
+            <a:ext cx="4023360" cy="329184"/>
+          </a:xfrm>
+          <a:prstGeom prst="rect">
+            <a:avLst/>
+          </a:prstGeom>
+          <a:noFill/>
+          <a:ln/>
+        </p:spPr>
+        <p:txBody>
+          <a:bodyPr wrap="square" rtlCol="0" anchor="b"/>
+          <a:lstStyle/>
+          <a:p>
+            <a:pPr indent="0" marL="0">
+              <a:buNone/>
+            </a:pPr>
+            <a:r>
+              <a:rPr lang="en-US" sz="1300" b="1" dirty="0">
                 <a:solidFill>
                   <a:srgbClr val="1E293B"/>
                 </a:solidFill>
-                <a:latin typeface="Calibri" pitchFamily="34" charset="0"/>
-                <a:ea typeface="Calibri" pitchFamily="34" charset="-122"/>
-                <a:cs typeface="Calibri" pitchFamily="34" charset="-120"/>
-              </a:rPr>
-              <a:t>Unique ID validation — no duplicates allowed</a:t>
-            </a:r>
-            <a:endParaRPr lang="en-US" sz="1250" dirty="0"/>
-          </a:p>
-        </p:txBody>
-      </p:sp>
-      <p:sp>
-        <p:nvSpPr>
-          <p:cNvPr id="18" name="Shape 16"/>
-          <p:cNvSpPr/>
-          <p:nvPr/>
-        </p:nvSpPr>
-        <p:spPr>
-          <a:xfrm>
-            <a:off x="4023360" y="1627632"/>
-            <a:ext cx="4846320" cy="530352"/>
+              </a:rPr>
+              <a:t>Unique ID</a:t>
+            </a:r>
+            <a:endParaRPr lang="en-US" sz="1300" dirty="0"/>
+          </a:p>
+        </p:txBody>
+      </p:sp>
+      <p:sp>
+        <p:nvSpPr>
+          <p:cNvPr id="19" name="Text 17"/>
+          <p:cNvSpPr/>
+          <p:nvPr/>
+        </p:nvSpPr>
+        <p:spPr>
+          <a:xfrm>
+            <a:off x="4663440" y="1289304"/>
+            <a:ext cx="4023360" cy="274320"/>
+          </a:xfrm>
+          <a:prstGeom prst="rect">
+            <a:avLst/>
+          </a:prstGeom>
+          <a:noFill/>
+          <a:ln/>
+        </p:spPr>
+        <p:txBody>
+          <a:bodyPr wrap="square" rtlCol="0" anchor="t"/>
+          <a:lstStyle/>
+          <a:p>
+            <a:pPr indent="0" marL="0">
+              <a:buNone/>
+            </a:pPr>
+            <a:r>
+              <a:rPr lang="en-US" sz="1150" dirty="0">
+                <a:solidFill>
+                  <a:srgbClr val="64748B"/>
+                </a:solidFill>
+              </a:rPr>
+              <a:t>map::count() — rejects duplicates</a:t>
+            </a:r>
+            <a:endParaRPr lang="en-US" sz="1150" dirty="0"/>
+          </a:p>
+        </p:txBody>
+      </p:sp>
+      <p:sp>
+        <p:nvSpPr>
+          <p:cNvPr id="20" name="Shape 18"/>
+          <p:cNvSpPr/>
+          <p:nvPr/>
+        </p:nvSpPr>
+        <p:spPr>
+          <a:xfrm>
+            <a:off x="4069080" y="1737360"/>
+            <a:ext cx="4754880" cy="685800"/>
           </a:xfrm>
           <a:prstGeom prst="rect">
             <a:avLst/>
@@ -4491,14 +5054,14 @@
       </p:sp>
       <p:sp>
         <p:nvSpPr>
-          <p:cNvPr id="19" name="Text 17"/>
-          <p:cNvSpPr/>
-          <p:nvPr/>
-        </p:nvSpPr>
-        <p:spPr>
-          <a:xfrm>
-            <a:off x="4160520" y="1627632"/>
-            <a:ext cx="457200" cy="530352"/>
+          <p:cNvPr id="21" name="Text 19"/>
+          <p:cNvSpPr/>
+          <p:nvPr/>
+        </p:nvSpPr>
+        <p:spPr>
+          <a:xfrm>
+            <a:off x="4160520" y="1737360"/>
+            <a:ext cx="457200" cy="685800"/>
           </a:xfrm>
           <a:prstGeom prst="rect">
             <a:avLst/>
@@ -4514,66 +5077,99 @@
               <a:buNone/>
             </a:pPr>
             <a:r>
-              <a:rPr lang="en-US" sz="1600" dirty="0">
+              <a:rPr lang="en-US" sz="1800" dirty="0">
                 <a:solidFill>
                   <a:srgbClr val="000000"/>
                 </a:solidFill>
               </a:rPr>
               <a:t>📐</a:t>
             </a:r>
-            <a:endParaRPr lang="en-US" sz="1600" dirty="0"/>
-          </a:p>
-        </p:txBody>
-      </p:sp>
-      <p:sp>
-        <p:nvSpPr>
-          <p:cNvPr id="20" name="Text 18"/>
-          <p:cNvSpPr/>
-          <p:nvPr/>
-        </p:nvSpPr>
-        <p:spPr>
-          <a:xfrm>
-            <a:off x="4663440" y="1627632"/>
-            <a:ext cx="4069080" cy="530352"/>
-          </a:xfrm>
-          <a:prstGeom prst="rect">
-            <a:avLst/>
-          </a:prstGeom>
-          <a:noFill/>
-          <a:ln/>
-        </p:spPr>
-        <p:txBody>
-          <a:bodyPr wrap="square" rtlCol="0" anchor="ctr"/>
-          <a:lstStyle/>
-          <a:p>
-            <a:pPr indent="0" marL="0">
-              <a:buNone/>
-            </a:pPr>
-            <a:r>
-              <a:rPr lang="en-US" sz="1250" dirty="0">
+            <a:endParaRPr lang="en-US" sz="1800" dirty="0"/>
+          </a:p>
+        </p:txBody>
+      </p:sp>
+      <p:sp>
+        <p:nvSpPr>
+          <p:cNvPr id="22" name="Text 20"/>
+          <p:cNvSpPr/>
+          <p:nvPr/>
+        </p:nvSpPr>
+        <p:spPr>
+          <a:xfrm>
+            <a:off x="4663440" y="1737360"/>
+            <a:ext cx="4023360" cy="329184"/>
+          </a:xfrm>
+          <a:prstGeom prst="rect">
+            <a:avLst/>
+          </a:prstGeom>
+          <a:noFill/>
+          <a:ln/>
+        </p:spPr>
+        <p:txBody>
+          <a:bodyPr wrap="square" rtlCol="0" anchor="b"/>
+          <a:lstStyle/>
+          <a:p>
+            <a:pPr indent="0" marL="0">
+              <a:buNone/>
+            </a:pPr>
+            <a:r>
+              <a:rPr lang="en-US" sz="1300" b="1" dirty="0">
                 <a:solidFill>
                   <a:srgbClr val="1E293B"/>
                 </a:solidFill>
-                <a:latin typeface="Calibri" pitchFamily="34" charset="0"/>
-                <a:ea typeface="Calibri" pitchFamily="34" charset="-122"/>
-                <a:cs typeface="Calibri" pitchFamily="34" charset="-120"/>
-              </a:rPr>
-              <a:t>GPA clamped to 0.0 – 4.0 with live re-prompt</a:t>
-            </a:r>
-            <a:endParaRPr lang="en-US" sz="1250" dirty="0"/>
-          </a:p>
-        </p:txBody>
-      </p:sp>
-      <p:sp>
-        <p:nvSpPr>
-          <p:cNvPr id="21" name="Shape 19"/>
-          <p:cNvSpPr/>
-          <p:nvPr/>
-        </p:nvSpPr>
-        <p:spPr>
-          <a:xfrm>
-            <a:off x="4023360" y="2249424"/>
-            <a:ext cx="4846320" cy="530352"/>
+              </a:rPr>
+              <a:t>GPA Validation</a:t>
+            </a:r>
+            <a:endParaRPr lang="en-US" sz="1300" dirty="0"/>
+          </a:p>
+        </p:txBody>
+      </p:sp>
+      <p:sp>
+        <p:nvSpPr>
+          <p:cNvPr id="23" name="Text 21"/>
+          <p:cNvSpPr/>
+          <p:nvPr/>
+        </p:nvSpPr>
+        <p:spPr>
+          <a:xfrm>
+            <a:off x="4663440" y="2066544"/>
+            <a:ext cx="4023360" cy="274320"/>
+          </a:xfrm>
+          <a:prstGeom prst="rect">
+            <a:avLst/>
+          </a:prstGeom>
+          <a:noFill/>
+          <a:ln/>
+        </p:spPr>
+        <p:txBody>
+          <a:bodyPr wrap="square" rtlCol="0" anchor="t"/>
+          <a:lstStyle/>
+          <a:p>
+            <a:pPr indent="0" marL="0">
+              <a:buNone/>
+            </a:pPr>
+            <a:r>
+              <a:rPr lang="en-US" sz="1150" dirty="0">
+                <a:solidFill>
+                  <a:srgbClr val="64748B"/>
+                </a:solidFill>
+              </a:rPr>
+              <a:t>do-while until 0.0 ≤ GPA ≤ 4.0</a:t>
+            </a:r>
+            <a:endParaRPr lang="en-US" sz="1150" dirty="0"/>
+          </a:p>
+        </p:txBody>
+      </p:sp>
+      <p:sp>
+        <p:nvSpPr>
+          <p:cNvPr id="24" name="Shape 22"/>
+          <p:cNvSpPr/>
+          <p:nvPr/>
+        </p:nvSpPr>
+        <p:spPr>
+          <a:xfrm>
+            <a:off x="4069080" y="2514600"/>
+            <a:ext cx="4754880" cy="685800"/>
           </a:xfrm>
           <a:prstGeom prst="rect">
             <a:avLst/>
@@ -4598,14 +5194,14 @@
       </p:sp>
       <p:sp>
         <p:nvSpPr>
-          <p:cNvPr id="22" name="Text 20"/>
-          <p:cNvSpPr/>
-          <p:nvPr/>
-        </p:nvSpPr>
-        <p:spPr>
-          <a:xfrm>
-            <a:off x="4160520" y="2249424"/>
-            <a:ext cx="457200" cy="530352"/>
+          <p:cNvPr id="25" name="Text 23"/>
+          <p:cNvSpPr/>
+          <p:nvPr/>
+        </p:nvSpPr>
+        <p:spPr>
+          <a:xfrm>
+            <a:off x="4160520" y="2514600"/>
+            <a:ext cx="457200" cy="685800"/>
           </a:xfrm>
           <a:prstGeom prst="rect">
             <a:avLst/>
@@ -4621,66 +5217,99 @@
               <a:buNone/>
             </a:pPr>
             <a:r>
-              <a:rPr lang="en-US" sz="1600" dirty="0">
+              <a:rPr lang="en-US" sz="1800" dirty="0">
                 <a:solidFill>
                   <a:srgbClr val="000000"/>
                 </a:solidFill>
               </a:rPr>
               <a:t>🚫</a:t>
             </a:r>
-            <a:endParaRPr lang="en-US" sz="1600" dirty="0"/>
-          </a:p>
-        </p:txBody>
-      </p:sp>
-      <p:sp>
-        <p:nvSpPr>
-          <p:cNvPr id="23" name="Text 21"/>
-          <p:cNvSpPr/>
-          <p:nvPr/>
-        </p:nvSpPr>
-        <p:spPr>
-          <a:xfrm>
-            <a:off x="4663440" y="2249424"/>
-            <a:ext cx="4069080" cy="530352"/>
-          </a:xfrm>
-          <a:prstGeom prst="rect">
-            <a:avLst/>
-          </a:prstGeom>
-          <a:noFill/>
-          <a:ln/>
-        </p:spPr>
-        <p:txBody>
-          <a:bodyPr wrap="square" rtlCol="0" anchor="ctr"/>
-          <a:lstStyle/>
-          <a:p>
-            <a:pPr indent="0" marL="0">
-              <a:buNone/>
-            </a:pPr>
-            <a:r>
-              <a:rPr lang="en-US" sz="1250" dirty="0">
+            <a:endParaRPr lang="en-US" sz="1800" dirty="0"/>
+          </a:p>
+        </p:txBody>
+      </p:sp>
+      <p:sp>
+        <p:nvSpPr>
+          <p:cNvPr id="26" name="Text 24"/>
+          <p:cNvSpPr/>
+          <p:nvPr/>
+        </p:nvSpPr>
+        <p:spPr>
+          <a:xfrm>
+            <a:off x="4663440" y="2514600"/>
+            <a:ext cx="4023360" cy="329184"/>
+          </a:xfrm>
+          <a:prstGeom prst="rect">
+            <a:avLst/>
+          </a:prstGeom>
+          <a:noFill/>
+          <a:ln/>
+        </p:spPr>
+        <p:txBody>
+          <a:bodyPr wrap="square" rtlCol="0" anchor="b"/>
+          <a:lstStyle/>
+          <a:p>
+            <a:pPr indent="0" marL="0">
+              <a:buNone/>
+            </a:pPr>
+            <a:r>
+              <a:rPr lang="en-US" sz="1300" b="1" dirty="0">
                 <a:solidFill>
                   <a:srgbClr val="1E293B"/>
                 </a:solidFill>
-                <a:latin typeface="Calibri" pitchFamily="34" charset="0"/>
-                <a:ea typeface="Calibri" pitchFamily="34" charset="-122"/>
-                <a:cs typeface="Calibri" pitchFamily="34" charset="-120"/>
-              </a:rPr>
-              <a:t>Course duplicates blocked via linear scan</a:t>
-            </a:r>
-            <a:endParaRPr lang="en-US" sz="1250" dirty="0"/>
-          </a:p>
-        </p:txBody>
-      </p:sp>
-      <p:sp>
-        <p:nvSpPr>
-          <p:cNvPr id="24" name="Shape 22"/>
-          <p:cNvSpPr/>
-          <p:nvPr/>
-        </p:nvSpPr>
-        <p:spPr>
-          <a:xfrm>
-            <a:off x="4023360" y="2871216"/>
-            <a:ext cx="4846320" cy="530352"/>
+              </a:rPr>
+              <a:t>No Duplicate Courses</a:t>
+            </a:r>
+            <a:endParaRPr lang="en-US" sz="1300" dirty="0"/>
+          </a:p>
+        </p:txBody>
+      </p:sp>
+      <p:sp>
+        <p:nvSpPr>
+          <p:cNvPr id="27" name="Text 25"/>
+          <p:cNvSpPr/>
+          <p:nvPr/>
+        </p:nvSpPr>
+        <p:spPr>
+          <a:xfrm>
+            <a:off x="4663440" y="2843784"/>
+            <a:ext cx="4023360" cy="274320"/>
+          </a:xfrm>
+          <a:prstGeom prst="rect">
+            <a:avLst/>
+          </a:prstGeom>
+          <a:noFill/>
+          <a:ln/>
+        </p:spPr>
+        <p:txBody>
+          <a:bodyPr wrap="square" rtlCol="0" anchor="t"/>
+          <a:lstStyle/>
+          <a:p>
+            <a:pPr indent="0" marL="0">
+              <a:buNone/>
+            </a:pPr>
+            <a:r>
+              <a:rPr lang="en-US" sz="1150" dirty="0">
+                <a:solidFill>
+                  <a:srgbClr val="64748B"/>
+                </a:solidFill>
+              </a:rPr>
+              <a:t>set::insert() blocks automatically</a:t>
+            </a:r>
+            <a:endParaRPr lang="en-US" sz="1150" dirty="0"/>
+          </a:p>
+        </p:txBody>
+      </p:sp>
+      <p:sp>
+        <p:nvSpPr>
+          <p:cNvPr id="28" name="Shape 26"/>
+          <p:cNvSpPr/>
+          <p:nvPr/>
+        </p:nvSpPr>
+        <p:spPr>
+          <a:xfrm>
+            <a:off x="4069080" y="3291840"/>
+            <a:ext cx="4754880" cy="685800"/>
           </a:xfrm>
           <a:prstGeom prst="rect">
             <a:avLst/>
@@ -4705,14 +5334,14 @@
       </p:sp>
       <p:sp>
         <p:nvSpPr>
-          <p:cNvPr id="25" name="Text 23"/>
-          <p:cNvSpPr/>
-          <p:nvPr/>
-        </p:nvSpPr>
-        <p:spPr>
-          <a:xfrm>
-            <a:off x="4160520" y="2871216"/>
-            <a:ext cx="457200" cy="530352"/>
+          <p:cNvPr id="29" name="Text 27"/>
+          <p:cNvSpPr/>
+          <p:nvPr/>
+        </p:nvSpPr>
+        <p:spPr>
+          <a:xfrm>
+            <a:off x="4160520" y="3291840"/>
+            <a:ext cx="457200" cy="685800"/>
           </a:xfrm>
           <a:prstGeom prst="rect">
             <a:avLst/>
@@ -4728,66 +5357,99 @@
               <a:buNone/>
             </a:pPr>
             <a:r>
-              <a:rPr lang="en-US" sz="1600" dirty="0">
+              <a:rPr lang="en-US" sz="1800" dirty="0">
                 <a:solidFill>
                   <a:srgbClr val="000000"/>
                 </a:solidFill>
               </a:rPr>
-              <a:t>⚡</a:t>
-            </a:r>
-            <a:endParaRPr lang="en-US" sz="1600" dirty="0"/>
-          </a:p>
-        </p:txBody>
-      </p:sp>
-      <p:sp>
-        <p:nvSpPr>
-          <p:cNvPr id="26" name="Text 24"/>
-          <p:cNvSpPr/>
-          <p:nvPr/>
-        </p:nvSpPr>
-        <p:spPr>
-          <a:xfrm>
-            <a:off x="4663440" y="2871216"/>
-            <a:ext cx="4069080" cy="530352"/>
-          </a:xfrm>
-          <a:prstGeom prst="rect">
-            <a:avLst/>
-          </a:prstGeom>
-          <a:noFill/>
-          <a:ln/>
-        </p:spPr>
-        <p:txBody>
-          <a:bodyPr wrap="square" rtlCol="0" anchor="ctr"/>
-          <a:lstStyle/>
-          <a:p>
-            <a:pPr indent="0" marL="0">
-              <a:buNone/>
-            </a:pPr>
-            <a:r>
-              <a:rPr lang="en-US" sz="1250" dirty="0">
+              <a:t>🗺️</a:t>
+            </a:r>
+            <a:endParaRPr lang="en-US" sz="1800" dirty="0"/>
+          </a:p>
+        </p:txBody>
+      </p:sp>
+      <p:sp>
+        <p:nvSpPr>
+          <p:cNvPr id="30" name="Text 28"/>
+          <p:cNvSpPr/>
+          <p:nvPr/>
+        </p:nvSpPr>
+        <p:spPr>
+          <a:xfrm>
+            <a:off x="4663440" y="3291840"/>
+            <a:ext cx="4023360" cy="329184"/>
+          </a:xfrm>
+          <a:prstGeom prst="rect">
+            <a:avLst/>
+          </a:prstGeom>
+          <a:noFill/>
+          <a:ln/>
+        </p:spPr>
+        <p:txBody>
+          <a:bodyPr wrap="square" rtlCol="0" anchor="b"/>
+          <a:lstStyle/>
+          <a:p>
+            <a:pPr indent="0" marL="0">
+              <a:buNone/>
+            </a:pPr>
+            <a:r>
+              <a:rPr lang="en-US" sz="1300" b="1" dirty="0">
                 <a:solidFill>
                   <a:srgbClr val="1E293B"/>
                 </a:solidFill>
-                <a:latin typeface="Calibri" pitchFamily="34" charset="0"/>
-                <a:ea typeface="Calibri" pitchFamily="34" charset="-122"/>
-                <a:cs typeface="Calibri" pitchFamily="34" charset="-120"/>
-              </a:rPr>
-              <a:t>O(1) removal: swap-with-last + pop_back</a:t>
-            </a:r>
-            <a:endParaRPr lang="en-US" sz="1250" dirty="0"/>
-          </a:p>
-        </p:txBody>
-      </p:sp>
-      <p:sp>
-        <p:nvSpPr>
-          <p:cNvPr id="27" name="Shape 25"/>
-          <p:cNvSpPr/>
-          <p:nvPr/>
-        </p:nvSpPr>
-        <p:spPr>
-          <a:xfrm>
-            <a:off x="4023360" y="3493008"/>
-            <a:ext cx="4846320" cy="530352"/>
+              </a:rPr>
+              <a:t>O(log n) Lookup</a:t>
+            </a:r>
+            <a:endParaRPr lang="en-US" sz="1300" dirty="0"/>
+          </a:p>
+        </p:txBody>
+      </p:sp>
+      <p:sp>
+        <p:nvSpPr>
+          <p:cNvPr id="31" name="Text 29"/>
+          <p:cNvSpPr/>
+          <p:nvPr/>
+        </p:nvSpPr>
+        <p:spPr>
+          <a:xfrm>
+            <a:off x="4663440" y="3621024"/>
+            <a:ext cx="4023360" cy="274320"/>
+          </a:xfrm>
+          <a:prstGeom prst="rect">
+            <a:avLst/>
+          </a:prstGeom>
+          <a:noFill/>
+          <a:ln/>
+        </p:spPr>
+        <p:txBody>
+          <a:bodyPr wrap="square" rtlCol="0" anchor="t"/>
+          <a:lstStyle/>
+          <a:p>
+            <a:pPr indent="0" marL="0">
+              <a:buNone/>
+            </a:pPr>
+            <a:r>
+              <a:rPr lang="en-US" sz="1150" dirty="0">
+                <a:solidFill>
+                  <a:srgbClr val="64748B"/>
+                </a:solidFill>
+              </a:rPr>
+              <a:t>map&lt;int,int&gt; index for fast access</a:t>
+            </a:r>
+            <a:endParaRPr lang="en-US" sz="1150" dirty="0"/>
+          </a:p>
+        </p:txBody>
+      </p:sp>
+      <p:sp>
+        <p:nvSpPr>
+          <p:cNvPr id="32" name="Shape 30"/>
+          <p:cNvSpPr/>
+          <p:nvPr/>
+        </p:nvSpPr>
+        <p:spPr>
+          <a:xfrm>
+            <a:off x="4069080" y="4069080"/>
+            <a:ext cx="4754880" cy="685800"/>
           </a:xfrm>
           <a:prstGeom prst="rect">
             <a:avLst/>
@@ -4812,14 +5474,14 @@
       </p:sp>
       <p:sp>
         <p:nvSpPr>
-          <p:cNvPr id="28" name="Text 26"/>
-          <p:cNvSpPr/>
-          <p:nvPr/>
-        </p:nvSpPr>
-        <p:spPr>
-          <a:xfrm>
-            <a:off x="4160520" y="3493008"/>
-            <a:ext cx="457200" cy="530352"/>
+          <p:cNvPr id="33" name="Text 31"/>
+          <p:cNvSpPr/>
+          <p:nvPr/>
+        </p:nvSpPr>
+        <p:spPr>
+          <a:xfrm>
+            <a:off x="4160520" y="4069080"/>
+            <a:ext cx="457200" cy="685800"/>
           </a:xfrm>
           <a:prstGeom prst="rect">
             <a:avLst/>
@@ -4835,160 +5497,86 @@
               <a:buNone/>
             </a:pPr>
             <a:r>
-              <a:rPr lang="en-US" sz="1600" dirty="0">
+              <a:rPr lang="en-US" sz="1800" dirty="0">
                 <a:solidFill>
                   <a:srgbClr val="000000"/>
                 </a:solidFill>
               </a:rPr>
-              <a:t>📋</a:t>
-            </a:r>
-            <a:endParaRPr lang="en-US" sz="1600" dirty="0"/>
-          </a:p>
-        </p:txBody>
-      </p:sp>
-      <p:sp>
-        <p:nvSpPr>
-          <p:cNvPr id="29" name="Text 27"/>
-          <p:cNvSpPr/>
-          <p:nvPr/>
-        </p:nvSpPr>
-        <p:spPr>
-          <a:xfrm>
-            <a:off x="4663440" y="3493008"/>
-            <a:ext cx="4069080" cy="530352"/>
-          </a:xfrm>
-          <a:prstGeom prst="rect">
-            <a:avLst/>
-          </a:prstGeom>
-          <a:noFill/>
-          <a:ln/>
-        </p:spPr>
-        <p:txBody>
-          <a:bodyPr wrap="square" rtlCol="0" anchor="ctr"/>
-          <a:lstStyle/>
-          <a:p>
-            <a:pPr indent="0" marL="0">
-              <a:buNone/>
-            </a:pPr>
-            <a:r>
-              <a:rPr lang="en-US" sz="1250" dirty="0">
+              <a:t>★</a:t>
+            </a:r>
+            <a:endParaRPr lang="en-US" sz="1800" dirty="0"/>
+          </a:p>
+        </p:txBody>
+      </p:sp>
+      <p:sp>
+        <p:nvSpPr>
+          <p:cNvPr id="34" name="Text 32"/>
+          <p:cNvSpPr/>
+          <p:nvPr/>
+        </p:nvSpPr>
+        <p:spPr>
+          <a:xfrm>
+            <a:off x="4663440" y="4069080"/>
+            <a:ext cx="4023360" cy="329184"/>
+          </a:xfrm>
+          <a:prstGeom prst="rect">
+            <a:avLst/>
+          </a:prstGeom>
+          <a:noFill/>
+          <a:ln/>
+        </p:spPr>
+        <p:txBody>
+          <a:bodyPr wrap="square" rtlCol="0" anchor="b"/>
+          <a:lstStyle/>
+          <a:p>
+            <a:pPr indent="0" marL="0">
+              <a:buNone/>
+            </a:pPr>
+            <a:r>
+              <a:rPr lang="en-US" sz="1300" b="1" dirty="0">
                 <a:solidFill>
                   <a:srgbClr val="1E293B"/>
                 </a:solidFill>
-                <a:latin typeface="Calibri" pitchFamily="34" charset="0"/>
-                <a:ea typeface="Calibri" pitchFamily="34" charset="-122"/>
-                <a:cs typeface="Calibri" pitchFamily="34" charset="-120"/>
-              </a:rPr>
-              <a:t>Sort works on a copy — original order preserved</a:t>
-            </a:r>
-            <a:endParaRPr lang="en-US" sz="1250" dirty="0"/>
-          </a:p>
-        </p:txBody>
-      </p:sp>
-      <p:sp>
-        <p:nvSpPr>
-          <p:cNvPr id="30" name="Shape 28"/>
-          <p:cNvSpPr/>
-          <p:nvPr/>
-        </p:nvSpPr>
-        <p:spPr>
-          <a:xfrm>
-            <a:off x="4023360" y="4114800"/>
-            <a:ext cx="4846320" cy="530352"/>
-          </a:xfrm>
-          <a:prstGeom prst="rect">
-            <a:avLst/>
-          </a:prstGeom>
-          <a:solidFill>
-            <a:srgbClr val="FFFFFF"/>
-          </a:solidFill>
-          <a:ln w="12700">
-            <a:solidFill>
-              <a:srgbClr val="E2E8F0"/>
-            </a:solidFill>
-            <a:prstDash val="solid"/>
-          </a:ln>
-          <a:effectLst>
-            <a:outerShdw sx="100000" sy="100000" kx="0" ky="0" algn="bl" rotWithShape="0" blurRad="101600" dist="38100" dir="8100000">
-              <a:srgbClr val="000000">
-                <a:alpha val="12000"/>
-              </a:srgbClr>
-            </a:outerShdw>
-          </a:effectLst>
-        </p:spPr>
-      </p:sp>
-      <p:sp>
-        <p:nvSpPr>
-          <p:cNvPr id="31" name="Text 29"/>
-          <p:cNvSpPr/>
-          <p:nvPr/>
-        </p:nvSpPr>
-        <p:spPr>
-          <a:xfrm>
-            <a:off x="4160520" y="4114800"/>
-            <a:ext cx="457200" cy="530352"/>
-          </a:xfrm>
-          <a:prstGeom prst="rect">
-            <a:avLst/>
-          </a:prstGeom>
-          <a:noFill/>
-          <a:ln/>
-        </p:spPr>
-        <p:txBody>
-          <a:bodyPr wrap="square" rtlCol="0" anchor="ctr"/>
-          <a:lstStyle/>
-          <a:p>
-            <a:pPr algn="ctr" indent="0" marL="0">
-              <a:buNone/>
-            </a:pPr>
-            <a:r>
-              <a:rPr lang="en-US" sz="1600" dirty="0">
-                <a:solidFill>
-                  <a:srgbClr val="000000"/>
-                </a:solidFill>
-              </a:rPr>
-              <a:t>🛡️</a:t>
-            </a:r>
-            <a:endParaRPr lang="en-US" sz="1600" dirty="0"/>
-          </a:p>
-        </p:txBody>
-      </p:sp>
-      <p:sp>
-        <p:nvSpPr>
-          <p:cNvPr id="32" name="Text 30"/>
-          <p:cNvSpPr/>
-          <p:nvPr/>
-        </p:nvSpPr>
-        <p:spPr>
-          <a:xfrm>
-            <a:off x="4663440" y="4114800"/>
-            <a:ext cx="4069080" cy="530352"/>
-          </a:xfrm>
-          <a:prstGeom prst="rect">
-            <a:avLst/>
-          </a:prstGeom>
-          <a:noFill/>
-          <a:ln/>
-        </p:spPr>
-        <p:txBody>
-          <a:bodyPr wrap="square" rtlCol="0" anchor="ctr"/>
-          <a:lstStyle/>
-          <a:p>
-            <a:pPr indent="0" marL="0">
-              <a:buNone/>
-            </a:pPr>
-            <a:r>
-              <a:rPr lang="en-US" sz="1250" dirty="0">
-                <a:solidFill>
-                  <a:srgbClr val="1E293B"/>
-                </a:solidFill>
-                <a:latin typeface="Calibri" pitchFamily="34" charset="0"/>
-                <a:ea typeface="Calibri" pitchFamily="34" charset="-122"/>
-                <a:cs typeface="Calibri" pitchFamily="34" charset="-120"/>
-              </a:rPr>
-              <a:t>Invalid cin input handled without crash</a:t>
-            </a:r>
-            <a:endParaRPr lang="en-US" sz="1250" dirty="0"/>
+              </a:rPr>
+              <a:t>Bonus: count_if</a:t>
+            </a:r>
+            <a:endParaRPr lang="en-US" sz="1300" dirty="0"/>
+          </a:p>
+        </p:txBody>
+      </p:sp>
+      <p:sp>
+        <p:nvSpPr>
+          <p:cNvPr id="35" name="Text 33"/>
+          <p:cNvSpPr/>
+          <p:nvPr/>
+        </p:nvSpPr>
+        <p:spPr>
+          <a:xfrm>
+            <a:off x="4663440" y="4398264"/>
+            <a:ext cx="4023360" cy="274320"/>
+          </a:xfrm>
+          <a:prstGeom prst="rect">
+            <a:avLst/>
+          </a:prstGeom>
+          <a:noFill/>
+          <a:ln/>
+        </p:spPr>
+        <p:txBody>
+          <a:bodyPr wrap="square" rtlCol="0" anchor="t"/>
+          <a:lstStyle/>
+          <a:p>
+            <a:pPr indent="0" marL="0">
+              <a:buNone/>
+            </a:pPr>
+            <a:r>
+              <a:rPr lang="en-US" sz="1150" dirty="0">
+                <a:solidFill>
+                  <a:srgbClr val="64748B"/>
+                </a:solidFill>
+              </a:rPr>
+              <a:t>Count students with GPA &gt;= 3.0</a:t>
+            </a:r>
+            <a:endParaRPr lang="en-US" sz="1150" dirty="0"/>
           </a:p>
         </p:txBody>
       </p:sp>
@@ -5057,7 +5645,7 @@
         </p:nvSpPr>
         <p:spPr>
           <a:xfrm>
-            <a:off x="320040" y="274320"/>
+            <a:off x="320040" y="256032"/>
             <a:ext cx="8503920" cy="502920"/>
           </a:xfrm>
           <a:prstGeom prst="rect">
@@ -5096,7 +5684,7 @@
         </p:nvSpPr>
         <p:spPr>
           <a:xfrm>
-            <a:off x="320040" y="841248"/>
+            <a:off x="320040" y="822960"/>
             <a:ext cx="8503920" cy="36576"/>
           </a:xfrm>
           <a:prstGeom prst="rect">
@@ -5122,7 +5710,7 @@
         <p:spPr>
           <a:xfrm>
             <a:off x="320040" y="960120"/>
-            <a:ext cx="4251960" cy="1920240"/>
+            <a:ext cx="4160520" cy="1975104"/>
           </a:xfrm>
           <a:prstGeom prst="rect">
             <a:avLst/>
@@ -5154,7 +5742,7 @@
         <p:spPr>
           <a:xfrm>
             <a:off x="320040" y="960120"/>
-            <a:ext cx="4251960" cy="292608"/>
+            <a:ext cx="4160520" cy="292608"/>
           </a:xfrm>
           <a:prstGeom prst="rect">
             <a:avLst/>
@@ -5179,7 +5767,7 @@
         <p:spPr>
           <a:xfrm>
             <a:off x="429768" y="960120"/>
-            <a:ext cx="4069080" cy="292608"/>
+            <a:ext cx="3941064" cy="292608"/>
           </a:xfrm>
           <a:prstGeom prst="rect">
             <a:avLst/>
@@ -5203,7 +5791,7 @@
                 <a:ea typeface="Consolas" pitchFamily="34" charset="-122"/>
                 <a:cs typeface="Consolas" pitchFamily="34" charset="-120"/>
               </a:rPr>
-              <a:t>Inheritance</a:t>
+              <a:t>Inheritance + Virtual Destructor</a:t>
             </a:r>
             <a:endParaRPr lang="en-US" sz="1000" dirty="0"/>
           </a:p>
@@ -5218,7 +5806,7 @@
         <p:spPr>
           <a:xfrm>
             <a:off x="429768" y="1280160"/>
-            <a:ext cx="4069080" cy="1536192"/>
+            <a:ext cx="3941064" cy="1609344"/>
           </a:xfrm>
           <a:prstGeom prst="rect">
             <a:avLst/>
@@ -5234,7 +5822,7 @@
               <a:buNone/>
             </a:pPr>
             <a:r>
-              <a:rPr lang="en-US" sz="1000" dirty="0">
+              <a:rPr lang="en-US" sz="950" dirty="0">
                 <a:solidFill>
                   <a:srgbClr val="E2E8F0"/>
                 </a:solidFill>
@@ -5244,14 +5832,14 @@
               </a:rPr>
               <a:t>class Person {</a:t>
             </a:r>
-            <a:endParaRPr lang="en-US" sz="1000" dirty="0"/>
-          </a:p>
-          <a:p>
-            <a:pPr indent="0" marL="0">
-              <a:buNone/>
-            </a:pPr>
-            <a:r>
-              <a:rPr lang="en-US" sz="1000" dirty="0">
+            <a:endParaRPr lang="en-US" sz="950" dirty="0"/>
+          </a:p>
+          <a:p>
+            <a:pPr indent="0" marL="0">
+              <a:buNone/>
+            </a:pPr>
+            <a:r>
+              <a:rPr lang="en-US" sz="950" dirty="0">
                 <a:solidFill>
                   <a:srgbClr val="E2E8F0"/>
                 </a:solidFill>
@@ -5259,16 +5847,16 @@
                 <a:ea typeface="Consolas" pitchFamily="34" charset="-122"/>
                 <a:cs typeface="Consolas" pitchFamily="34" charset="-120"/>
               </a:rPr>
-              <a:t>protected:</a:t>
-            </a:r>
-            <a:endParaRPr lang="en-US" sz="1000" dirty="0"/>
-          </a:p>
-          <a:p>
-            <a:pPr indent="0" marL="0">
-              <a:buNone/>
-            </a:pPr>
-            <a:r>
-              <a:rPr lang="en-US" sz="1000" dirty="0">
+              <a:t>protected: string name;</a:t>
+            </a:r>
+            <a:endParaRPr lang="en-US" sz="950" dirty="0"/>
+          </a:p>
+          <a:p>
+            <a:pPr indent="0" marL="0">
+              <a:buNone/>
+            </a:pPr>
+            <a:r>
+              <a:rPr lang="en-US" sz="950" dirty="0">
                 <a:solidFill>
                   <a:srgbClr val="E2E8F0"/>
                 </a:solidFill>
@@ -5276,16 +5864,16 @@
                 <a:ea typeface="Consolas" pitchFamily="34" charset="-122"/>
                 <a:cs typeface="Consolas" pitchFamily="34" charset="-120"/>
               </a:rPr>
-              <a:t>  string name;</a:t>
-            </a:r>
-            <a:endParaRPr lang="en-US" sz="1000" dirty="0"/>
-          </a:p>
-          <a:p>
-            <a:pPr indent="0" marL="0">
-              <a:buNone/>
-            </a:pPr>
-            <a:r>
-              <a:rPr lang="en-US" sz="1000" dirty="0">
+              <a:t>public:</a:t>
+            </a:r>
+            <a:endParaRPr lang="en-US" sz="950" dirty="0"/>
+          </a:p>
+          <a:p>
+            <a:pPr indent="0" marL="0">
+              <a:buNone/>
+            </a:pPr>
+            <a:r>
+              <a:rPr lang="en-US" sz="950" dirty="0">
                 <a:solidFill>
                   <a:srgbClr val="E2E8F0"/>
                 </a:solidFill>
@@ -5293,16 +5881,118 @@
                 <a:ea typeface="Consolas" pitchFamily="34" charset="-122"/>
                 <a:cs typeface="Consolas" pitchFamily="34" charset="-120"/>
               </a:rPr>
+              <a:t>  Person(const string&amp; n=""): name(n){}</a:t>
+            </a:r>
+            <a:endParaRPr lang="en-US" sz="950" dirty="0"/>
+          </a:p>
+          <a:p>
+            <a:pPr indent="0" marL="0">
+              <a:buNone/>
+            </a:pPr>
+            <a:r>
+              <a:rPr lang="en-US" sz="950" dirty="0">
+                <a:solidFill>
+                  <a:srgbClr val="E2E8F0"/>
+                </a:solidFill>
+                <a:latin typeface="Consolas" pitchFamily="34" charset="0"/>
+                <a:ea typeface="Consolas" pitchFamily="34" charset="-122"/>
+                <a:cs typeface="Consolas" pitchFamily="34" charset="-120"/>
+              </a:rPr>
+              <a:t>  virtual ~Person(){} // Memory Leak</a:t>
+            </a:r>
+            <a:endParaRPr lang="en-US" sz="950" dirty="0"/>
+          </a:p>
+          <a:p>
+            <a:pPr indent="0" marL="0">
+              <a:buNone/>
+            </a:pPr>
+            <a:r>
+              <a:rPr lang="en-US" sz="950" dirty="0">
+                <a:solidFill>
+                  <a:srgbClr val="E2E8F0"/>
+                </a:solidFill>
+                <a:latin typeface="Consolas" pitchFamily="34" charset="0"/>
+                <a:ea typeface="Consolas" pitchFamily="34" charset="-122"/>
+                <a:cs typeface="Consolas" pitchFamily="34" charset="-120"/>
+              </a:rPr>
+              <a:t>};</a:t>
+            </a:r>
+            <a:endParaRPr lang="en-US" sz="950" dirty="0"/>
+          </a:p>
+          <a:p>
+            <a:pPr indent="0" marL="0">
+              <a:buNone/>
+            </a:pPr>
+            <a:r>
+              <a:rPr lang="en-US" sz="950" dirty="0">
+                <a:solidFill>
+                  <a:srgbClr val="E2E8F0"/>
+                </a:solidFill>
+                <a:latin typeface="Consolas" pitchFamily="34" charset="0"/>
+                <a:ea typeface="Consolas" pitchFamily="34" charset="-122"/>
+                <a:cs typeface="Consolas" pitchFamily="34" charset="-120"/>
+              </a:rPr>
+              <a:t>class Student : public Person {</a:t>
+            </a:r>
+            <a:endParaRPr lang="en-US" sz="950" dirty="0"/>
+          </a:p>
+          <a:p>
+            <a:pPr indent="0" marL="0">
+              <a:buNone/>
+            </a:pPr>
+            <a:r>
+              <a:rPr lang="en-US" sz="950" dirty="0">
+                <a:solidFill>
+                  <a:srgbClr val="E2E8F0"/>
+                </a:solidFill>
+                <a:latin typeface="Consolas" pitchFamily="34" charset="0"/>
+                <a:ea typeface="Consolas" pitchFamily="34" charset="-122"/>
+                <a:cs typeface="Consolas" pitchFamily="34" charset="-120"/>
+              </a:rPr>
+              <a:t>  int id; double gpa;</a:t>
+            </a:r>
+            <a:endParaRPr lang="en-US" sz="950" dirty="0"/>
+          </a:p>
+          <a:p>
+            <a:pPr indent="0" marL="0">
+              <a:buNone/>
+            </a:pPr>
+            <a:r>
+              <a:rPr lang="en-US" sz="950" dirty="0">
+                <a:solidFill>
+                  <a:srgbClr val="E2E8F0"/>
+                </a:solidFill>
+                <a:latin typeface="Consolas" pitchFamily="34" charset="0"/>
+                <a:ea typeface="Consolas" pitchFamily="34" charset="-122"/>
+                <a:cs typeface="Consolas" pitchFamily="34" charset="-120"/>
+              </a:rPr>
+              <a:t>  set&lt;string&gt; courses;</a:t>
+            </a:r>
+            <a:endParaRPr lang="en-US" sz="950" dirty="0"/>
+          </a:p>
+          <a:p>
+            <a:pPr indent="0" marL="0">
+              <a:buNone/>
+            </a:pPr>
+            <a:r>
+              <a:rPr lang="en-US" sz="950" dirty="0">
+                <a:solidFill>
+                  <a:srgbClr val="E2E8F0"/>
+                </a:solidFill>
+                <a:latin typeface="Consolas" pitchFamily="34" charset="0"/>
+                <a:ea typeface="Consolas" pitchFamily="34" charset="-122"/>
+                <a:cs typeface="Consolas" pitchFamily="34" charset="-120"/>
+              </a:rPr>
               <a:t>public:</a:t>
             </a:r>
-            <a:endParaRPr lang="en-US" sz="1000" dirty="0"/>
-          </a:p>
-          <a:p>
-            <a:pPr indent="0" marL="0">
-              <a:buNone/>
-            </a:pPr>
-            <a:r>
-              <a:rPr lang="en-US" sz="1000" dirty="0">
+            <a:endParaRPr lang="en-US" sz="950" dirty="0"/>
+          </a:p>
+          <a:p>
+            <a:pPr indent="0" marL="0">
+              <a:buNone/>
+            </a:pPr>
+            <a:r>
+              <a:rPr lang="en-US" sz="950" dirty="0">
                 <a:solidFill>
                   <a:srgbClr val="E2E8F0"/>
                 </a:solidFill>
@@ -5310,16 +6000,16 @@
                 <a:ea typeface="Consolas" pitchFamily="34" charset="-122"/>
                 <a:cs typeface="Consolas" pitchFamily="34" charset="-120"/>
               </a:rPr>
-              <a:t>  virtual void display() const;</a:t>
-            </a:r>
-            <a:endParaRPr lang="en-US" sz="1000" dirty="0"/>
-          </a:p>
-          <a:p>
-            <a:pPr indent="0" marL="0">
-              <a:buNone/>
-            </a:pPr>
-            <a:r>
-              <a:rPr lang="en-US" sz="1000" dirty="0">
+              <a:t>  Student(int i,const string&amp; n,double g)</a:t>
+            </a:r>
+            <a:endParaRPr lang="en-US" sz="950" dirty="0"/>
+          </a:p>
+          <a:p>
+            <a:pPr indent="0" marL="0">
+              <a:buNone/>
+            </a:pPr>
+            <a:r>
+              <a:rPr lang="en-US" sz="950" dirty="0">
                 <a:solidFill>
                   <a:srgbClr val="E2E8F0"/>
                 </a:solidFill>
@@ -5327,16 +6017,16 @@
                 <a:ea typeface="Consolas" pitchFamily="34" charset="-122"/>
                 <a:cs typeface="Consolas" pitchFamily="34" charset="-120"/>
               </a:rPr>
-              <a:t>  virtual ~Person() {}</a:t>
-            </a:r>
-            <a:endParaRPr lang="en-US" sz="1000" dirty="0"/>
-          </a:p>
-          <a:p>
-            <a:pPr indent="0" marL="0">
-              <a:buNone/>
-            </a:pPr>
-            <a:r>
-              <a:rPr lang="en-US" sz="1000" dirty="0">
+              <a:t>    : Person(n),id(i),gpa(g){}</a:t>
+            </a:r>
+            <a:endParaRPr lang="en-US" sz="950" dirty="0"/>
+          </a:p>
+          <a:p>
+            <a:pPr indent="0" marL="0">
+              <a:buNone/>
+            </a:pPr>
+            <a:r>
+              <a:rPr lang="en-US" sz="950" dirty="0">
                 <a:solidFill>
                   <a:srgbClr val="E2E8F0"/>
                 </a:solidFill>
@@ -5346,75 +6036,7 @@
               </a:rPr>
               <a:t>};</a:t>
             </a:r>
-            <a:endParaRPr lang="en-US" sz="1000" dirty="0"/>
-          </a:p>
-          <a:p>
-            <a:pPr indent="0" marL="0">
-              <a:buNone/>
-            </a:pPr>
-            <a:r>
-              <a:rPr lang="en-US" sz="1000" dirty="0">
-                <a:solidFill>
-                  <a:srgbClr val="E2E8F0"/>
-                </a:solidFill>
-                <a:latin typeface="Consolas" pitchFamily="34" charset="0"/>
-                <a:ea typeface="Consolas" pitchFamily="34" charset="-122"/>
-                <a:cs typeface="Consolas" pitchFamily="34" charset="-120"/>
-              </a:rPr>
-              <a:t>class Student : public Person {</a:t>
-            </a:r>
-            <a:endParaRPr lang="en-US" sz="1000" dirty="0"/>
-          </a:p>
-          <a:p>
-            <a:pPr indent="0" marL="0">
-              <a:buNone/>
-            </a:pPr>
-            <a:r>
-              <a:rPr lang="en-US" sz="1000" dirty="0">
-                <a:solidFill>
-                  <a:srgbClr val="E2E8F0"/>
-                </a:solidFill>
-                <a:latin typeface="Consolas" pitchFamily="34" charset="0"/>
-                <a:ea typeface="Consolas" pitchFamily="34" charset="-122"/>
-                <a:cs typeface="Consolas" pitchFamily="34" charset="-120"/>
-              </a:rPr>
-              <a:t>  int id;  double gpa;</a:t>
-            </a:r>
-            <a:endParaRPr lang="en-US" sz="1000" dirty="0"/>
-          </a:p>
-          <a:p>
-            <a:pPr indent="0" marL="0">
-              <a:buNone/>
-            </a:pPr>
-            <a:r>
-              <a:rPr lang="en-US" sz="1000" dirty="0">
-                <a:solidFill>
-                  <a:srgbClr val="E2E8F0"/>
-                </a:solidFill>
-                <a:latin typeface="Consolas" pitchFamily="34" charset="0"/>
-                <a:ea typeface="Consolas" pitchFamily="34" charset="-122"/>
-                <a:cs typeface="Consolas" pitchFamily="34" charset="-120"/>
-              </a:rPr>
-              <a:t>  vector&lt;string&gt; courses;</a:t>
-            </a:r>
-            <a:endParaRPr lang="en-US" sz="1000" dirty="0"/>
-          </a:p>
-          <a:p>
-            <a:pPr indent="0" marL="0">
-              <a:buNone/>
-            </a:pPr>
-            <a:r>
-              <a:rPr lang="en-US" sz="1000" dirty="0">
-                <a:solidFill>
-                  <a:srgbClr val="E2E8F0"/>
-                </a:solidFill>
-                <a:latin typeface="Consolas" pitchFamily="34" charset="0"/>
-                <a:ea typeface="Consolas" pitchFamily="34" charset="-122"/>
-                <a:cs typeface="Consolas" pitchFamily="34" charset="-120"/>
-              </a:rPr>
-              <a:t>};</a:t>
-            </a:r>
-            <a:endParaRPr lang="en-US" sz="1000" dirty="0"/>
+            <a:endParaRPr lang="en-US" sz="950" dirty="0"/>
           </a:p>
         </p:txBody>
       </p:sp>
@@ -5426,8 +6048,8 @@
         </p:nvSpPr>
         <p:spPr>
           <a:xfrm>
-            <a:off x="4754880" y="960120"/>
-            <a:ext cx="4069080" cy="1920240"/>
+            <a:off x="4709160" y="960120"/>
+            <a:ext cx="4160520" cy="1975104"/>
           </a:xfrm>
           <a:prstGeom prst="rect">
             <a:avLst/>
@@ -5458,8 +6080,8 @@
         </p:nvSpPr>
         <p:spPr>
           <a:xfrm>
-            <a:off x="4754880" y="960120"/>
-            <a:ext cx="4069080" cy="292608"/>
+            <a:off x="4709160" y="960120"/>
+            <a:ext cx="4160520" cy="292608"/>
           </a:xfrm>
           <a:prstGeom prst="rect">
             <a:avLst/>
@@ -5483,8 +6105,8 @@
         </p:nvSpPr>
         <p:spPr>
           <a:xfrm>
-            <a:off x="4864608" y="960120"/>
-            <a:ext cx="3886200" cy="292608"/>
+            <a:off x="4818888" y="960120"/>
+            <a:ext cx="3941064" cy="292608"/>
           </a:xfrm>
           <a:prstGeom prst="rect">
             <a:avLst/>
@@ -5508,7 +6130,7 @@
                 <a:ea typeface="Consolas" pitchFamily="34" charset="-122"/>
                 <a:cs typeface="Consolas" pitchFamily="34" charset="-120"/>
               </a:rPr>
-              <a:t>O(1) Removal</a:t>
+              <a:t>map index — O(log n) search &amp; delete</a:t>
             </a:r>
             <a:endParaRPr lang="en-US" sz="1000" dirty="0"/>
           </a:p>
@@ -5522,8 +6144,8 @@
         </p:nvSpPr>
         <p:spPr>
           <a:xfrm>
-            <a:off x="4864608" y="1280160"/>
-            <a:ext cx="3886200" cy="1536192"/>
+            <a:off x="4818888" y="1280160"/>
+            <a:ext cx="3941064" cy="1609344"/>
           </a:xfrm>
           <a:prstGeom prst="rect">
             <a:avLst/>
@@ -5539,7 +6161,7 @@
               <a:buNone/>
             </a:pPr>
             <a:r>
-              <a:rPr lang="en-US" sz="1000" dirty="0">
+              <a:rPr lang="en-US" sz="950" dirty="0">
                 <a:solidFill>
                   <a:srgbClr val="E2E8F0"/>
                 </a:solidFill>
@@ -5547,16 +6169,22 @@
                 <a:ea typeface="Consolas" pitchFamily="34" charset="-122"/>
                 <a:cs typeface="Consolas" pitchFamily="34" charset="-120"/>
               </a:rPr>
-              <a:t>void removeStudent() {</a:t>
-            </a:r>
-            <a:endParaRPr lang="en-US" sz="1000" dirty="0"/>
-          </a:p>
-          <a:p>
-            <a:pPr indent="0" marL="0">
-              <a:buNone/>
-            </a:pPr>
-            <a:r>
-              <a:rPr lang="en-US" sz="1000" dirty="0">
+              <a:t>map&lt;int,int&gt; index; // ID -&gt; position</a:t>
+            </a:r>
+            <a:endParaRPr lang="en-US" sz="950" dirty="0"/>
+          </a:p>
+          <a:p>
+            <a:pPr indent="0" marL="0">
+              <a:buNone/>
+            </a:pPr>
+            <a:endParaRPr lang="en-US" sz="950" dirty="0"/>
+          </a:p>
+          <a:p>
+            <a:pPr indent="0" marL="0">
+              <a:buNone/>
+            </a:pPr>
+            <a:r>
+              <a:rPr lang="en-US" sz="950" dirty="0">
                 <a:solidFill>
                   <a:srgbClr val="E2E8F0"/>
                 </a:solidFill>
@@ -5564,16 +6192,16 @@
                 <a:ea typeface="Consolas" pitchFamily="34" charset="-122"/>
                 <a:cs typeface="Consolas" pitchFamily="34" charset="-120"/>
               </a:rPr>
-              <a:t>  int idx = findIndex(id);</a:t>
-            </a:r>
-            <a:endParaRPr lang="en-US" sz="1000" dirty="0"/>
-          </a:p>
-          <a:p>
-            <a:pPr indent="0" marL="0">
-              <a:buNone/>
-            </a:pPr>
-            <a:r>
-              <a:rPr lang="en-US" sz="1000" dirty="0">
+              <a:t>Student* find(int id) {</a:t>
+            </a:r>
+            <a:endParaRPr lang="en-US" sz="950" dirty="0"/>
+          </a:p>
+          <a:p>
+            <a:pPr indent="0" marL="0">
+              <a:buNone/>
+            </a:pPr>
+            <a:r>
+              <a:rPr lang="en-US" sz="950" dirty="0">
                 <a:solidFill>
                   <a:srgbClr val="E2E8F0"/>
                 </a:solidFill>
@@ -5581,16 +6209,16 @@
                 <a:ea typeface="Consolas" pitchFamily="34" charset="-122"/>
                 <a:cs typeface="Consolas" pitchFamily="34" charset="-120"/>
               </a:rPr>
-              <a:t>  // swap with last, then pop</a:t>
-            </a:r>
-            <a:endParaRPr lang="en-US" sz="1000" dirty="0"/>
-          </a:p>
-          <a:p>
-            <a:pPr indent="0" marL="0">
-              <a:buNone/>
-            </a:pPr>
-            <a:r>
-              <a:rPr lang="en-US" sz="1000" dirty="0">
+              <a:t>  auto it = index.find(id);</a:t>
+            </a:r>
+            <a:endParaRPr lang="en-US" sz="950" dirty="0"/>
+          </a:p>
+          <a:p>
+            <a:pPr indent="0" marL="0">
+              <a:buNone/>
+            </a:pPr>
+            <a:r>
+              <a:rPr lang="en-US" sz="950" dirty="0">
                 <a:solidFill>
                   <a:srgbClr val="E2E8F0"/>
                 </a:solidFill>
@@ -5598,16 +6226,16 @@
                 <a:ea typeface="Consolas" pitchFamily="34" charset="-122"/>
                 <a:cs typeface="Consolas" pitchFamily="34" charset="-120"/>
               </a:rPr>
-              <a:t>  if (idx != size-1)</a:t>
-            </a:r>
-            <a:endParaRPr lang="en-US" sz="1000" dirty="0"/>
-          </a:p>
-          <a:p>
-            <a:pPr indent="0" marL="0">
-              <a:buNone/>
-            </a:pPr>
-            <a:r>
-              <a:rPr lang="en-US" sz="1000" dirty="0">
+              <a:t>  return it==index.end()</a:t>
+            </a:r>
+            <a:endParaRPr lang="en-US" sz="950" dirty="0"/>
+          </a:p>
+          <a:p>
+            <a:pPr indent="0" marL="0">
+              <a:buNone/>
+            </a:pPr>
+            <a:r>
+              <a:rPr lang="en-US" sz="950" dirty="0">
                 <a:solidFill>
                   <a:srgbClr val="E2E8F0"/>
                 </a:solidFill>
@@ -5615,16 +6243,16 @@
                 <a:ea typeface="Consolas" pitchFamily="34" charset="-122"/>
                 <a:cs typeface="Consolas" pitchFamily="34" charset="-120"/>
               </a:rPr>
-              <a:t>    students[idx] =</a:t>
-            </a:r>
-            <a:endParaRPr lang="en-US" sz="1000" dirty="0"/>
-          </a:p>
-          <a:p>
-            <a:pPr indent="0" marL="0">
-              <a:buNone/>
-            </a:pPr>
-            <a:r>
-              <a:rPr lang="en-US" sz="1000" dirty="0">
+              <a:t>    ? nullptr : &amp;students[it-&gt;second];</a:t>
+            </a:r>
+            <a:endParaRPr lang="en-US" sz="950" dirty="0"/>
+          </a:p>
+          <a:p>
+            <a:pPr indent="0" marL="0">
+              <a:buNone/>
+            </a:pPr>
+            <a:r>
+              <a:rPr lang="en-US" sz="950" dirty="0">
                 <a:solidFill>
                   <a:srgbClr val="E2E8F0"/>
                 </a:solidFill>
@@ -5632,16 +6260,16 @@
                 <a:ea typeface="Consolas" pitchFamily="34" charset="-122"/>
                 <a:cs typeface="Consolas" pitchFamily="34" charset="-120"/>
               </a:rPr>
-              <a:t>      students[size-1];</a:t>
-            </a:r>
-            <a:endParaRPr lang="en-US" sz="1000" dirty="0"/>
-          </a:p>
-          <a:p>
-            <a:pPr indent="0" marL="0">
-              <a:buNone/>
-            </a:pPr>
-            <a:r>
-              <a:rPr lang="en-US" sz="1000" dirty="0">
+              <a:t>}</a:t>
+            </a:r>
+            <a:endParaRPr lang="en-US" sz="950" dirty="0"/>
+          </a:p>
+          <a:p>
+            <a:pPr indent="0" marL="0">
+              <a:buNone/>
+            </a:pPr>
+            <a:r>
+              <a:rPr lang="en-US" sz="950" dirty="0">
                 <a:solidFill>
                   <a:srgbClr val="E2E8F0"/>
                 </a:solidFill>
@@ -5649,16 +6277,16 @@
                 <a:ea typeface="Consolas" pitchFamily="34" charset="-122"/>
                 <a:cs typeface="Consolas" pitchFamily="34" charset="-120"/>
               </a:rPr>
-              <a:t>  students.pop_back();</a:t>
-            </a:r>
-            <a:endParaRPr lang="en-US" sz="1000" dirty="0"/>
-          </a:p>
-          <a:p>
-            <a:pPr indent="0" marL="0">
-              <a:buNone/>
-            </a:pPr>
-            <a:r>
-              <a:rPr lang="en-US" sz="1000" dirty="0">
+              <a:t>void rebuild() {</a:t>
+            </a:r>
+            <a:endParaRPr lang="en-US" sz="950" dirty="0"/>
+          </a:p>
+          <a:p>
+            <a:pPr indent="0" marL="0">
+              <a:buNone/>
+            </a:pPr>
+            <a:r>
+              <a:rPr lang="en-US" sz="950" dirty="0">
                 <a:solidFill>
                   <a:srgbClr val="E2E8F0"/>
                 </a:solidFill>
@@ -5666,9 +6294,60 @@
                 <a:ea typeface="Consolas" pitchFamily="34" charset="-122"/>
                 <a:cs typeface="Consolas" pitchFamily="34" charset="-120"/>
               </a:rPr>
+              <a:t>  index.clear();</a:t>
+            </a:r>
+            <a:endParaRPr lang="en-US" sz="950" dirty="0"/>
+          </a:p>
+          <a:p>
+            <a:pPr indent="0" marL="0">
+              <a:buNone/>
+            </a:pPr>
+            <a:r>
+              <a:rPr lang="en-US" sz="950" dirty="0">
+                <a:solidFill>
+                  <a:srgbClr val="E2E8F0"/>
+                </a:solidFill>
+                <a:latin typeface="Consolas" pitchFamily="34" charset="0"/>
+                <a:ea typeface="Consolas" pitchFamily="34" charset="-122"/>
+                <a:cs typeface="Consolas" pitchFamily="34" charset="-120"/>
+              </a:rPr>
+              <a:t>  for(int i=0;i&lt;students.size();i++)</a:t>
+            </a:r>
+            <a:endParaRPr lang="en-US" sz="950" dirty="0"/>
+          </a:p>
+          <a:p>
+            <a:pPr indent="0" marL="0">
+              <a:buNone/>
+            </a:pPr>
+            <a:r>
+              <a:rPr lang="en-US" sz="950" dirty="0">
+                <a:solidFill>
+                  <a:srgbClr val="E2E8F0"/>
+                </a:solidFill>
+                <a:latin typeface="Consolas" pitchFamily="34" charset="0"/>
+                <a:ea typeface="Consolas" pitchFamily="34" charset="-122"/>
+                <a:cs typeface="Consolas" pitchFamily="34" charset="-120"/>
+              </a:rPr>
+              <a:t>    index[students[i].getId()] = i;</a:t>
+            </a:r>
+            <a:endParaRPr lang="en-US" sz="950" dirty="0"/>
+          </a:p>
+          <a:p>
+            <a:pPr indent="0" marL="0">
+              <a:buNone/>
+            </a:pPr>
+            <a:r>
+              <a:rPr lang="en-US" sz="950" dirty="0">
+                <a:solidFill>
+                  <a:srgbClr val="E2E8F0"/>
+                </a:solidFill>
+                <a:latin typeface="Consolas" pitchFamily="34" charset="0"/>
+                <a:ea typeface="Consolas" pitchFamily="34" charset="-122"/>
+                <a:cs typeface="Consolas" pitchFamily="34" charset="-120"/>
+              </a:rPr>
               <a:t>}</a:t>
             </a:r>
-            <a:endParaRPr lang="en-US" sz="1000" dirty="0"/>
+            <a:endParaRPr lang="en-US" sz="950" dirty="0"/>
           </a:p>
         </p:txBody>
       </p:sp>
@@ -5680,8 +6359,8 @@
         </p:nvSpPr>
         <p:spPr>
           <a:xfrm>
-            <a:off x="320040" y="3017520"/>
-            <a:ext cx="4251960" cy="1828800"/>
+            <a:off x="320040" y="3044952"/>
+            <a:ext cx="4160520" cy="1975104"/>
           </a:xfrm>
           <a:prstGeom prst="rect">
             <a:avLst/>
@@ -5712,8 +6391,8 @@
         </p:nvSpPr>
         <p:spPr>
           <a:xfrm>
-            <a:off x="320040" y="3017520"/>
-            <a:ext cx="4251960" cy="292608"/>
+            <a:off x="320040" y="3044952"/>
+            <a:ext cx="4160520" cy="292608"/>
           </a:xfrm>
           <a:prstGeom prst="rect">
             <a:avLst/>
@@ -5737,8 +6416,8 @@
         </p:nvSpPr>
         <p:spPr>
           <a:xfrm>
-            <a:off x="429768" y="3017520"/>
-            <a:ext cx="4069080" cy="292608"/>
+            <a:off x="429768" y="3044952"/>
+            <a:ext cx="3941064" cy="292608"/>
           </a:xfrm>
           <a:prstGeom prst="rect">
             <a:avLst/>
@@ -5762,7 +6441,7 @@
                 <a:ea typeface="Consolas" pitchFamily="34" charset="-122"/>
                 <a:cs typeface="Consolas" pitchFamily="34" charset="-120"/>
               </a:rPr>
-              <a:t>Duplicate Course Guard</a:t>
+              <a:t>set — duplicate-free courses</a:t>
             </a:r>
             <a:endParaRPr lang="en-US" sz="1000" dirty="0"/>
           </a:p>
@@ -5776,8 +6455,8 @@
         </p:nvSpPr>
         <p:spPr>
           <a:xfrm>
-            <a:off x="429768" y="3337560"/>
-            <a:ext cx="4069080" cy="1444752"/>
+            <a:off x="429768" y="3364992"/>
+            <a:ext cx="3941064" cy="1609344"/>
           </a:xfrm>
           <a:prstGeom prst="rect">
             <a:avLst/>
@@ -5793,7 +6472,7 @@
               <a:buNone/>
             </a:pPr>
             <a:r>
-              <a:rPr lang="en-US" sz="1000" dirty="0">
+              <a:rPr lang="en-US" sz="950" dirty="0">
                 <a:solidFill>
                   <a:srgbClr val="E2E8F0"/>
                 </a:solidFill>
@@ -5801,16 +6480,22 @@
                 <a:ea typeface="Consolas" pitchFamily="34" charset="-122"/>
                 <a:cs typeface="Consolas" pitchFamily="34" charset="-120"/>
               </a:rPr>
-              <a:t>bool enrollCourse(</a:t>
-            </a:r>
-            <a:endParaRPr lang="en-US" sz="1000" dirty="0"/>
-          </a:p>
-          <a:p>
-            <a:pPr indent="0" marL="0">
-              <a:buNone/>
-            </a:pPr>
-            <a:r>
-              <a:rPr lang="en-US" sz="1000" dirty="0">
+              <a:t>set&lt;string&gt; courses;</a:t>
+            </a:r>
+            <a:endParaRPr lang="en-US" sz="950" dirty="0"/>
+          </a:p>
+          <a:p>
+            <a:pPr indent="0" marL="0">
+              <a:buNone/>
+            </a:pPr>
+            <a:endParaRPr lang="en-US" sz="950" dirty="0"/>
+          </a:p>
+          <a:p>
+            <a:pPr indent="0" marL="0">
+              <a:buNone/>
+            </a:pPr>
+            <a:r>
+              <a:rPr lang="en-US" sz="950" dirty="0">
                 <a:solidFill>
                   <a:srgbClr val="E2E8F0"/>
                 </a:solidFill>
@@ -5818,16 +6503,16 @@
                 <a:ea typeface="Consolas" pitchFamily="34" charset="-122"/>
                 <a:cs typeface="Consolas" pitchFamily="34" charset="-120"/>
               </a:rPr>
-              <a:t>    const string&amp; course) {</a:t>
-            </a:r>
-            <a:endParaRPr lang="en-US" sz="1000" dirty="0"/>
-          </a:p>
-          <a:p>
-            <a:pPr indent="0" marL="0">
-              <a:buNone/>
-            </a:pPr>
-            <a:r>
-              <a:rPr lang="en-US" sz="1000" dirty="0">
+              <a:t>bool enrollCourse(const string&amp; c) {</a:t>
+            </a:r>
+            <a:endParaRPr lang="en-US" sz="950" dirty="0"/>
+          </a:p>
+          <a:p>
+            <a:pPr indent="0" marL="0">
+              <a:buNone/>
+            </a:pPr>
+            <a:r>
+              <a:rPr lang="en-US" sz="950" dirty="0">
                 <a:solidFill>
                   <a:srgbClr val="E2E8F0"/>
                 </a:solidFill>
@@ -5835,16 +6520,16 @@
                 <a:ea typeface="Consolas" pitchFamily="34" charset="-122"/>
                 <a:cs typeface="Consolas" pitchFamily="34" charset="-120"/>
               </a:rPr>
-              <a:t>  for (int i=0;</a:t>
-            </a:r>
-            <a:endParaRPr lang="en-US" sz="1000" dirty="0"/>
-          </a:p>
-          <a:p>
-            <a:pPr indent="0" marL="0">
-              <a:buNone/>
-            </a:pPr>
-            <a:r>
-              <a:rPr lang="en-US" sz="1000" dirty="0">
+              <a:t>  return courses.insert(c).second;</a:t>
+            </a:r>
+            <a:endParaRPr lang="en-US" sz="950" dirty="0"/>
+          </a:p>
+          <a:p>
+            <a:pPr indent="0" marL="0">
+              <a:buNone/>
+            </a:pPr>
+            <a:r>
+              <a:rPr lang="en-US" sz="950" dirty="0">
                 <a:solidFill>
                   <a:srgbClr val="E2E8F0"/>
                 </a:solidFill>
@@ -5852,16 +6537,16 @@
                 <a:ea typeface="Consolas" pitchFamily="34" charset="-122"/>
                 <a:cs typeface="Consolas" pitchFamily="34" charset="-120"/>
               </a:rPr>
-              <a:t>       i&lt;courses.size(); i++)</a:t>
-            </a:r>
-            <a:endParaRPr lang="en-US" sz="1000" dirty="0"/>
-          </a:p>
-          <a:p>
-            <a:pPr indent="0" marL="0">
-              <a:buNone/>
-            </a:pPr>
-            <a:r>
-              <a:rPr lang="en-US" sz="1000" dirty="0">
+              <a:t>  // true  = added OK</a:t>
+            </a:r>
+            <a:endParaRPr lang="en-US" sz="950" dirty="0"/>
+          </a:p>
+          <a:p>
+            <a:pPr indent="0" marL="0">
+              <a:buNone/>
+            </a:pPr>
+            <a:r>
+              <a:rPr lang="en-US" sz="950" dirty="0">
                 <a:solidFill>
                   <a:srgbClr val="E2E8F0"/>
                 </a:solidFill>
@@ -5869,16 +6554,16 @@
                 <a:ea typeface="Consolas" pitchFamily="34" charset="-122"/>
                 <a:cs typeface="Consolas" pitchFamily="34" charset="-120"/>
               </a:rPr>
-              <a:t>    if (courses[i] == course)</a:t>
-            </a:r>
-            <a:endParaRPr lang="en-US" sz="1000" dirty="0"/>
-          </a:p>
-          <a:p>
-            <a:pPr indent="0" marL="0">
-              <a:buNone/>
-            </a:pPr>
-            <a:r>
-              <a:rPr lang="en-US" sz="1000" dirty="0">
+              <a:t>  // false = already enrolled</a:t>
+            </a:r>
+            <a:endParaRPr lang="en-US" sz="950" dirty="0"/>
+          </a:p>
+          <a:p>
+            <a:pPr indent="0" marL="0">
+              <a:buNone/>
+            </a:pPr>
+            <a:r>
+              <a:rPr lang="en-US" sz="950" dirty="0">
                 <a:solidFill>
                   <a:srgbClr val="E2E8F0"/>
                 </a:solidFill>
@@ -5886,60 +6571,9 @@
                 <a:ea typeface="Consolas" pitchFamily="34" charset="-122"/>
                 <a:cs typeface="Consolas" pitchFamily="34" charset="-120"/>
               </a:rPr>
-              <a:t>      return false; // blocked</a:t>
-            </a:r>
-            <a:endParaRPr lang="en-US" sz="1000" dirty="0"/>
-          </a:p>
-          <a:p>
-            <a:pPr indent="0" marL="0">
-              <a:buNone/>
-            </a:pPr>
-            <a:r>
-              <a:rPr lang="en-US" sz="1000" dirty="0">
-                <a:solidFill>
-                  <a:srgbClr val="E2E8F0"/>
-                </a:solidFill>
-                <a:latin typeface="Consolas" pitchFamily="34" charset="0"/>
-                <a:ea typeface="Consolas" pitchFamily="34" charset="-122"/>
-                <a:cs typeface="Consolas" pitchFamily="34" charset="-120"/>
-              </a:rPr>
-              <a:t>  courses.push_back(course);</a:t>
-            </a:r>
-            <a:endParaRPr lang="en-US" sz="1000" dirty="0"/>
-          </a:p>
-          <a:p>
-            <a:pPr indent="0" marL="0">
-              <a:buNone/>
-            </a:pPr>
-            <a:r>
-              <a:rPr lang="en-US" sz="1000" dirty="0">
-                <a:solidFill>
-                  <a:srgbClr val="E2E8F0"/>
-                </a:solidFill>
-                <a:latin typeface="Consolas" pitchFamily="34" charset="0"/>
-                <a:ea typeface="Consolas" pitchFamily="34" charset="-122"/>
-                <a:cs typeface="Consolas" pitchFamily="34" charset="-120"/>
-              </a:rPr>
-              <a:t>  return true;</a:t>
-            </a:r>
-            <a:endParaRPr lang="en-US" sz="1000" dirty="0"/>
-          </a:p>
-          <a:p>
-            <a:pPr indent="0" marL="0">
-              <a:buNone/>
-            </a:pPr>
-            <a:r>
-              <a:rPr lang="en-US" sz="1000" dirty="0">
-                <a:solidFill>
-                  <a:srgbClr val="E2E8F0"/>
-                </a:solidFill>
-                <a:latin typeface="Consolas" pitchFamily="34" charset="0"/>
-                <a:ea typeface="Consolas" pitchFamily="34" charset="-122"/>
-                <a:cs typeface="Consolas" pitchFamily="34" charset="-120"/>
-              </a:rPr>
               <a:t>}</a:t>
             </a:r>
-            <a:endParaRPr lang="en-US" sz="1000" dirty="0"/>
+            <a:endParaRPr lang="en-US" sz="950" dirty="0"/>
           </a:p>
         </p:txBody>
       </p:sp>
@@ -5951,8 +6585,8 @@
         </p:nvSpPr>
         <p:spPr>
           <a:xfrm>
-            <a:off x="4754880" y="3017520"/>
-            <a:ext cx="4069080" cy="1828800"/>
+            <a:off x="4709160" y="3044952"/>
+            <a:ext cx="4160520" cy="1975104"/>
           </a:xfrm>
           <a:prstGeom prst="rect">
             <a:avLst/>
@@ -5983,8 +6617,8 @@
         </p:nvSpPr>
         <p:spPr>
           <a:xfrm>
-            <a:off x="4754880" y="3017520"/>
-            <a:ext cx="4069080" cy="292608"/>
+            <a:off x="4709160" y="3044952"/>
+            <a:ext cx="4160520" cy="292608"/>
           </a:xfrm>
           <a:prstGeom prst="rect">
             <a:avLst/>
@@ -6008,8 +6642,8 @@
         </p:nvSpPr>
         <p:spPr>
           <a:xfrm>
-            <a:off x="4864608" y="3017520"/>
-            <a:ext cx="3886200" cy="292608"/>
+            <a:off x="4818888" y="3044952"/>
+            <a:ext cx="3941064" cy="292608"/>
           </a:xfrm>
           <a:prstGeom prst="rect">
             <a:avLst/>
@@ -6033,7 +6667,7 @@
                 <a:ea typeface="Consolas" pitchFamily="34" charset="-122"/>
                 <a:cs typeface="Consolas" pitchFamily="34" charset="-120"/>
               </a:rPr>
-              <a:t>Input Validation Loop</a:t>
+              <a:t>count_if  [Bonus Feature]</a:t>
             </a:r>
             <a:endParaRPr lang="en-US" sz="1000" dirty="0"/>
           </a:p>
@@ -6047,8 +6681,8 @@
         </p:nvSpPr>
         <p:spPr>
           <a:xfrm>
-            <a:off x="4864608" y="3337560"/>
-            <a:ext cx="3886200" cy="1444752"/>
+            <a:off x="4818888" y="3364992"/>
+            <a:ext cx="3941064" cy="1609344"/>
           </a:xfrm>
           <a:prstGeom prst="rect">
             <a:avLst/>
@@ -6064,7 +6698,7 @@
               <a:buNone/>
             </a:pPr>
             <a:r>
-              <a:rPr lang="en-US" sz="1000" dirty="0">
+              <a:rPr lang="en-US" sz="950" dirty="0">
                 <a:solidFill>
                   <a:srgbClr val="E2E8F0"/>
                 </a:solidFill>
@@ -6072,16 +6706,16 @@
                 <a:ea typeface="Consolas" pitchFamily="34" charset="-122"/>
                 <a:cs typeface="Consolas" pitchFamily="34" charset="-120"/>
               </a:rPr>
-              <a:t>double readDouble(</a:t>
-            </a:r>
-            <a:endParaRPr lang="en-US" sz="1000" dirty="0"/>
-          </a:p>
-          <a:p>
-            <a:pPr indent="0" marL="0">
-              <a:buNone/>
-            </a:pPr>
-            <a:r>
-              <a:rPr lang="en-US" sz="1000" dirty="0">
+              <a:t>void countHighGpa() {</a:t>
+            </a:r>
+            <a:endParaRPr lang="en-US" sz="950" dirty="0"/>
+          </a:p>
+          <a:p>
+            <a:pPr indent="0" marL="0">
+              <a:buNone/>
+            </a:pPr>
+            <a:r>
+              <a:rPr lang="en-US" sz="950" dirty="0">
                 <a:solidFill>
                   <a:srgbClr val="E2E8F0"/>
                 </a:solidFill>
@@ -6089,16 +6723,16 @@
                 <a:ea typeface="Consolas" pitchFamily="34" charset="-122"/>
                 <a:cs typeface="Consolas" pitchFamily="34" charset="-120"/>
               </a:rPr>
-              <a:t>  string prompt,</a:t>
-            </a:r>
-            <a:endParaRPr lang="en-US" sz="1000" dirty="0"/>
-          </a:p>
-          <a:p>
-            <a:pPr indent="0" marL="0">
-              <a:buNone/>
-            </a:pPr>
-            <a:r>
-              <a:rPr lang="en-US" sz="1000" dirty="0">
+              <a:t>  int n = count_if(</a:t>
+            </a:r>
+            <a:endParaRPr lang="en-US" sz="950" dirty="0"/>
+          </a:p>
+          <a:p>
+            <a:pPr indent="0" marL="0">
+              <a:buNone/>
+            </a:pPr>
+            <a:r>
+              <a:rPr lang="en-US" sz="950" dirty="0">
                 <a:solidFill>
                   <a:srgbClr val="E2E8F0"/>
                 </a:solidFill>
@@ -6106,16 +6740,16 @@
                 <a:ea typeface="Consolas" pitchFamily="34" charset="-122"/>
                 <a:cs typeface="Consolas" pitchFamily="34" charset="-120"/>
               </a:rPr>
-              <a:t>  double lo, double hi) {</a:t>
-            </a:r>
-            <a:endParaRPr lang="en-US" sz="1000" dirty="0"/>
-          </a:p>
-          <a:p>
-            <a:pPr indent="0" marL="0">
-              <a:buNone/>
-            </a:pPr>
-            <a:r>
-              <a:rPr lang="en-US" sz="1000" dirty="0">
+              <a:t>    students.begin(),</a:t>
+            </a:r>
+            <a:endParaRPr lang="en-US" sz="950" dirty="0"/>
+          </a:p>
+          <a:p>
+            <a:pPr indent="0" marL="0">
+              <a:buNone/>
+            </a:pPr>
+            <a:r>
+              <a:rPr lang="en-US" sz="950" dirty="0">
                 <a:solidFill>
                   <a:srgbClr val="E2E8F0"/>
                 </a:solidFill>
@@ -6123,16 +6757,16 @@
                 <a:ea typeface="Consolas" pitchFamily="34" charset="-122"/>
                 <a:cs typeface="Consolas" pitchFamily="34" charset="-120"/>
               </a:rPr>
-              <a:t>  double val;</a:t>
-            </a:r>
-            <a:endParaRPr lang="en-US" sz="1000" dirty="0"/>
-          </a:p>
-          <a:p>
-            <a:pPr indent="0" marL="0">
-              <a:buNone/>
-            </a:pPr>
-            <a:r>
-              <a:rPr lang="en-US" sz="1000" dirty="0">
+              <a:t>    students.end(),</a:t>
+            </a:r>
+            <a:endParaRPr lang="en-US" sz="950" dirty="0"/>
+          </a:p>
+          <a:p>
+            <a:pPr indent="0" marL="0">
+              <a:buNone/>
+            </a:pPr>
+            <a:r>
+              <a:rPr lang="en-US" sz="950" dirty="0">
                 <a:solidFill>
                   <a:srgbClr val="E2E8F0"/>
                 </a:solidFill>
@@ -6140,16 +6774,16 @@
                 <a:ea typeface="Consolas" pitchFamily="34" charset="-122"/>
                 <a:cs typeface="Consolas" pitchFamily="34" charset="-120"/>
               </a:rPr>
-              <a:t>  do {</a:t>
-            </a:r>
-            <a:endParaRPr lang="en-US" sz="1000" dirty="0"/>
-          </a:p>
-          <a:p>
-            <a:pPr indent="0" marL="0">
-              <a:buNone/>
-            </a:pPr>
-            <a:r>
-              <a:rPr lang="en-US" sz="1000" dirty="0">
+              <a:t>    [](const Student&amp; s){</a:t>
+            </a:r>
+            <a:endParaRPr lang="en-US" sz="950" dirty="0"/>
+          </a:p>
+          <a:p>
+            <a:pPr indent="0" marL="0">
+              <a:buNone/>
+            </a:pPr>
+            <a:r>
+              <a:rPr lang="en-US" sz="950" dirty="0">
                 <a:solidFill>
                   <a:srgbClr val="E2E8F0"/>
                 </a:solidFill>
@@ -6157,16 +6791,16 @@
                 <a:ea typeface="Consolas" pitchFamily="34" charset="-122"/>
                 <a:cs typeface="Consolas" pitchFamily="34" charset="-120"/>
               </a:rPr>
-              <a:t>    cout &lt;&lt; prompt;</a:t>
-            </a:r>
-            <a:endParaRPr lang="en-US" sz="1000" dirty="0"/>
-          </a:p>
-          <a:p>
-            <a:pPr indent="0" marL="0">
-              <a:buNone/>
-            </a:pPr>
-            <a:r>
-              <a:rPr lang="en-US" sz="1000" dirty="0">
+              <a:t>      return s.getGpa() &gt;= 3.0;</a:t>
+            </a:r>
+            <a:endParaRPr lang="en-US" sz="950" dirty="0"/>
+          </a:p>
+          <a:p>
+            <a:pPr indent="0" marL="0">
+              <a:buNone/>
+            </a:pPr>
+            <a:r>
+              <a:rPr lang="en-US" sz="950" dirty="0">
                 <a:solidFill>
                   <a:srgbClr val="E2E8F0"/>
                 </a:solidFill>
@@ -6174,16 +6808,16 @@
                 <a:ea typeface="Consolas" pitchFamily="34" charset="-122"/>
                 <a:cs typeface="Consolas" pitchFamily="34" charset="-120"/>
               </a:rPr>
-              <a:t>    cin &gt;&gt; val;</a:t>
-            </a:r>
-            <a:endParaRPr lang="en-US" sz="1000" dirty="0"/>
-          </a:p>
-          <a:p>
-            <a:pPr indent="0" marL="0">
-              <a:buNone/>
-            </a:pPr>
-            <a:r>
-              <a:rPr lang="en-US" sz="1000" dirty="0">
+              <a:t>    });</a:t>
+            </a:r>
+            <a:endParaRPr lang="en-US" sz="950" dirty="0"/>
+          </a:p>
+          <a:p>
+            <a:pPr indent="0" marL="0">
+              <a:buNone/>
+            </a:pPr>
+            <a:r>
+              <a:rPr lang="en-US" sz="950" dirty="0">
                 <a:solidFill>
                   <a:srgbClr val="E2E8F0"/>
                 </a:solidFill>
@@ -6191,16 +6825,16 @@
                 <a:ea typeface="Consolas" pitchFamily="34" charset="-122"/>
                 <a:cs typeface="Consolas" pitchFamily="34" charset="-120"/>
               </a:rPr>
-              <a:t>  } while(val&lt;lo||val&gt;hi);</a:t>
-            </a:r>
-            <a:endParaRPr lang="en-US" sz="1000" dirty="0"/>
-          </a:p>
-          <a:p>
-            <a:pPr indent="0" marL="0">
-              <a:buNone/>
-            </a:pPr>
-            <a:r>
-              <a:rPr lang="en-US" sz="1000" dirty="0">
+              <a:t>  cout&lt;&lt;"GPA&gt;=3.0 : "&lt;&lt;n&lt;&lt;"\n";</a:t>
+            </a:r>
+            <a:endParaRPr lang="en-US" sz="950" dirty="0"/>
+          </a:p>
+          <a:p>
+            <a:pPr indent="0" marL="0">
+              <a:buNone/>
+            </a:pPr>
+            <a:r>
+              <a:rPr lang="en-US" sz="950" dirty="0">
                 <a:solidFill>
                   <a:srgbClr val="E2E8F0"/>
                 </a:solidFill>
@@ -6208,26 +6842,9 @@
                 <a:ea typeface="Consolas" pitchFamily="34" charset="-122"/>
                 <a:cs typeface="Consolas" pitchFamily="34" charset="-120"/>
               </a:rPr>
-              <a:t>  return val;</a:t>
-            </a:r>
-            <a:endParaRPr lang="en-US" sz="1000" dirty="0"/>
-          </a:p>
-          <a:p>
-            <a:pPr indent="0" marL="0">
-              <a:buNone/>
-            </a:pPr>
-            <a:r>
-              <a:rPr lang="en-US" sz="1000" dirty="0">
-                <a:solidFill>
-                  <a:srgbClr val="E2E8F0"/>
-                </a:solidFill>
-                <a:latin typeface="Consolas" pitchFamily="34" charset="0"/>
-                <a:ea typeface="Consolas" pitchFamily="34" charset="-122"/>
-                <a:cs typeface="Consolas" pitchFamily="34" charset="-120"/>
-              </a:rPr>
               <a:t>}</a:t>
             </a:r>
-            <a:endParaRPr lang="en-US" sz="1000" dirty="0"/>
+            <a:endParaRPr lang="en-US" sz="950" dirty="0"/>
           </a:p>
         </p:txBody>
       </p:sp>
@@ -6354,8 +6971,8 @@
         </p:nvSpPr>
         <p:spPr>
           <a:xfrm>
-            <a:off x="548640" y="365760"/>
-            <a:ext cx="8229600" cy="502920"/>
+            <a:off x="548640" y="320040"/>
+            <a:ext cx="8229600" cy="475488"/>
           </a:xfrm>
           <a:prstGeom prst="rect">
             <a:avLst/>
@@ -6394,7 +7011,7 @@
         <p:spPr>
           <a:xfrm>
             <a:off x="411480" y="1051560"/>
-            <a:ext cx="2743200" cy="1325880"/>
+            <a:ext cx="2743200" cy="1353312"/>
           </a:xfrm>
           <a:prstGeom prst="rect">
             <a:avLst/>
@@ -6430,7 +7047,7 @@
         <p:spPr>
           <a:xfrm>
             <a:off x="548640" y="1161288"/>
-            <a:ext cx="548640" cy="548640"/>
+            <a:ext cx="502920" cy="502920"/>
           </a:xfrm>
           <a:prstGeom prst="rect">
             <a:avLst/>
@@ -6466,7 +7083,7 @@
         <p:spPr>
           <a:xfrm>
             <a:off x="1097280" y="1143000"/>
-            <a:ext cx="1920240" cy="347472"/>
+            <a:ext cx="1920240" cy="365760"/>
           </a:xfrm>
           <a:prstGeom prst="rect">
             <a:avLst/>
@@ -6501,7 +7118,7 @@
         </p:nvSpPr>
         <p:spPr>
           <a:xfrm>
-            <a:off x="548640" y="1673352"/>
+            <a:off x="548640" y="1691640"/>
             <a:ext cx="2468880" cy="594360"/>
           </a:xfrm>
           <a:prstGeom prst="rect">
@@ -6518,14 +7135,14 @@
               <a:buNone/>
             </a:pPr>
             <a:r>
-              <a:rPr lang="en-US" sz="1050" dirty="0">
+              <a:rPr lang="en-US" sz="1100" dirty="0">
                 <a:solidFill>
                   <a:srgbClr val="CBD5E1"/>
                 </a:solidFill>
               </a:rPr>
-              <a:t>Person → Student inheritance + virtual destructor</a:t>
-            </a:r>
-            <a:endParaRPr lang="en-US" sz="1050" dirty="0"/>
+              <a:t>Person→Student + virtual destructor</a:t>
+            </a:r>
+            <a:endParaRPr lang="en-US" sz="1100" dirty="0"/>
           </a:p>
         </p:txBody>
       </p:sp>
@@ -6538,7 +7155,7 @@
         <p:spPr>
           <a:xfrm>
             <a:off x="3337560" y="1051560"/>
-            <a:ext cx="2743200" cy="1325880"/>
+            <a:ext cx="2743200" cy="1353312"/>
           </a:xfrm>
           <a:prstGeom prst="rect">
             <a:avLst/>
@@ -6574,7 +7191,7 @@
         <p:spPr>
           <a:xfrm>
             <a:off x="3474720" y="1161288"/>
-            <a:ext cx="548640" cy="548640"/>
+            <a:ext cx="502920" cy="502920"/>
           </a:xfrm>
           <a:prstGeom prst="rect">
             <a:avLst/>
@@ -6610,7 +7227,7 @@
         <p:spPr>
           <a:xfrm>
             <a:off x="4023360" y="1143000"/>
-            <a:ext cx="1920240" cy="347472"/>
+            <a:ext cx="1920240" cy="365760"/>
           </a:xfrm>
           <a:prstGeom prst="rect">
             <a:avLst/>
@@ -6631,7 +7248,7 @@
                   <a:srgbClr val="FFFFFF"/>
                 </a:solidFill>
               </a:rPr>
-              <a:t>STL</a:t>
+              <a:t>3 Containers</a:t>
             </a:r>
             <a:endParaRPr lang="en-US" sz="1300" dirty="0"/>
           </a:p>
@@ -6645,7 +7262,7 @@
         </p:nvSpPr>
         <p:spPr>
           <a:xfrm>
-            <a:off x="3474720" y="1673352"/>
+            <a:off x="3474720" y="1691640"/>
             <a:ext cx="2468880" cy="594360"/>
           </a:xfrm>
           <a:prstGeom prst="rect">
@@ -6662,14 +7279,14 @@
               <a:buNone/>
             </a:pPr>
             <a:r>
-              <a:rPr lang="en-US" sz="1050" dirty="0">
+              <a:rPr lang="en-US" sz="1100" dirty="0">
                 <a:solidFill>
                   <a:srgbClr val="CBD5E1"/>
                 </a:solidFill>
               </a:rPr>
-              <a:t>vector&lt;Student&gt; &amp; vector&lt;string&gt; as containers</a:t>
-            </a:r>
-            <a:endParaRPr lang="en-US" sz="1050" dirty="0"/>
+              <a:t>vector + map + set</a:t>
+            </a:r>
+            <a:endParaRPr lang="en-US" sz="1100" dirty="0"/>
           </a:p>
         </p:txBody>
       </p:sp>
@@ -6682,7 +7299,7 @@
         <p:spPr>
           <a:xfrm>
             <a:off x="6263640" y="1051560"/>
-            <a:ext cx="2743200" cy="1325880"/>
+            <a:ext cx="2743200" cy="1353312"/>
           </a:xfrm>
           <a:prstGeom prst="rect">
             <a:avLst/>
@@ -6718,7 +7335,7 @@
         <p:spPr>
           <a:xfrm>
             <a:off x="6400800" y="1161288"/>
-            <a:ext cx="548640" cy="548640"/>
+            <a:ext cx="502920" cy="502920"/>
           </a:xfrm>
           <a:prstGeom prst="rect">
             <a:avLst/>
@@ -6754,7 +7371,7 @@
         <p:spPr>
           <a:xfrm>
             <a:off x="6949440" y="1143000"/>
-            <a:ext cx="1920240" cy="347472"/>
+            <a:ext cx="1920240" cy="365760"/>
           </a:xfrm>
           <a:prstGeom prst="rect">
             <a:avLst/>
@@ -6775,7 +7392,7 @@
                   <a:srgbClr val="FFFFFF"/>
                 </a:solidFill>
               </a:rPr>
-              <a:t>Algorithm</a:t>
+              <a:t>3 Algorithms</a:t>
             </a:r>
             <a:endParaRPr lang="en-US" sz="1300" dirty="0"/>
           </a:p>
@@ -6789,7 +7406,7 @@
         </p:nvSpPr>
         <p:spPr>
           <a:xfrm>
-            <a:off x="6400800" y="1673352"/>
+            <a:off x="6400800" y="1691640"/>
             <a:ext cx="2468880" cy="594360"/>
           </a:xfrm>
           <a:prstGeom prst="rect">
@@ -6806,14 +7423,14 @@
               <a:buNone/>
             </a:pPr>
             <a:r>
-              <a:rPr lang="en-US" sz="1050" dirty="0">
+              <a:rPr lang="en-US" sz="1100" dirty="0">
                 <a:solidFill>
                   <a:srgbClr val="CBD5E1"/>
                 </a:solidFill>
               </a:rPr>
-              <a:t>Bubble Sort on a copy keeps original data intact</a:t>
-            </a:r>
-            <a:endParaRPr lang="en-US" sz="1050" dirty="0"/>
+              <a:t>sort + find_if + count_if</a:t>
+            </a:r>
+            <a:endParaRPr lang="en-US" sz="1100" dirty="0"/>
           </a:p>
         </p:txBody>
       </p:sp>
@@ -6825,8 +7442,8 @@
         </p:nvSpPr>
         <p:spPr>
           <a:xfrm>
-            <a:off x="411480" y="2560320"/>
-            <a:ext cx="2743200" cy="1325880"/>
+            <a:off x="411480" y="2587752"/>
+            <a:ext cx="2743200" cy="1353312"/>
           </a:xfrm>
           <a:prstGeom prst="rect">
             <a:avLst/>
@@ -6861,8 +7478,8 @@
         </p:nvSpPr>
         <p:spPr>
           <a:xfrm>
-            <a:off x="548640" y="2670048"/>
-            <a:ext cx="548640" cy="548640"/>
+            <a:off x="548640" y="2697480"/>
+            <a:ext cx="502920" cy="502920"/>
           </a:xfrm>
           <a:prstGeom prst="rect">
             <a:avLst/>
@@ -6883,7 +7500,7 @@
                   <a:srgbClr val="000000"/>
                 </a:solidFill>
               </a:rPr>
-              <a:t>🛡️</a:t>
+              <a:t>🗺️</a:t>
             </a:r>
             <a:endParaRPr lang="en-US" sz="2000" dirty="0"/>
           </a:p>
@@ -6897,8 +7514,8 @@
         </p:nvSpPr>
         <p:spPr>
           <a:xfrm>
-            <a:off x="1097280" y="2651760"/>
-            <a:ext cx="1920240" cy="347472"/>
+            <a:off x="1097280" y="2679192"/>
+            <a:ext cx="1920240" cy="365760"/>
           </a:xfrm>
           <a:prstGeom prst="rect">
             <a:avLst/>
@@ -6919,7 +7536,7 @@
                   <a:srgbClr val="FFFFFF"/>
                 </a:solidFill>
               </a:rPr>
-              <a:t>Validation</a:t>
+              <a:t>map Index</a:t>
             </a:r>
             <a:endParaRPr lang="en-US" sz="1300" dirty="0"/>
           </a:p>
@@ -6933,7 +7550,7 @@
         </p:nvSpPr>
         <p:spPr>
           <a:xfrm>
-            <a:off x="548640" y="3182112"/>
+            <a:off x="548640" y="3227832"/>
             <a:ext cx="2468880" cy="594360"/>
           </a:xfrm>
           <a:prstGeom prst="rect">
@@ -6950,14 +7567,14 @@
               <a:buNone/>
             </a:pPr>
             <a:r>
-              <a:rPr lang="en-US" sz="1050" dirty="0">
+              <a:rPr lang="en-US" sz="1100" dirty="0">
                 <a:solidFill>
                   <a:srgbClr val="CBD5E1"/>
                 </a:solidFill>
               </a:rPr>
-              <a:t>Unique ID, GPA range 0–4, no duplicate courses</a:t>
-            </a:r>
-            <a:endParaRPr lang="en-US" sz="1050" dirty="0"/>
+              <a:t>O(log n) via map&lt;int,int&gt;</a:t>
+            </a:r>
+            <a:endParaRPr lang="en-US" sz="1100" dirty="0"/>
           </a:p>
         </p:txBody>
       </p:sp>
@@ -6969,8 +7586,8 @@
         </p:nvSpPr>
         <p:spPr>
           <a:xfrm>
-            <a:off x="3337560" y="2560320"/>
-            <a:ext cx="2743200" cy="1325880"/>
+            <a:off x="3337560" y="2587752"/>
+            <a:ext cx="2743200" cy="1353312"/>
           </a:xfrm>
           <a:prstGeom prst="rect">
             <a:avLst/>
@@ -7005,8 +7622,8 @@
         </p:nvSpPr>
         <p:spPr>
           <a:xfrm>
-            <a:off x="3474720" y="2670048"/>
-            <a:ext cx="548640" cy="548640"/>
+            <a:off x="3474720" y="2697480"/>
+            <a:ext cx="502920" cy="502920"/>
           </a:xfrm>
           <a:prstGeom prst="rect">
             <a:avLst/>
@@ -7027,7 +7644,7 @@
                   <a:srgbClr val="000000"/>
                 </a:solidFill>
               </a:rPr>
-              <a:t>⚡</a:t>
+              <a:t>🔒</a:t>
             </a:r>
             <a:endParaRPr lang="en-US" sz="2000" dirty="0"/>
           </a:p>
@@ -7041,8 +7658,8 @@
         </p:nvSpPr>
         <p:spPr>
           <a:xfrm>
-            <a:off x="4023360" y="2651760"/>
-            <a:ext cx="1920240" cy="347472"/>
+            <a:off x="4023360" y="2679192"/>
+            <a:ext cx="1920240" cy="365760"/>
           </a:xfrm>
           <a:prstGeom prst="rect">
             <a:avLst/>
@@ -7063,7 +7680,7 @@
                   <a:srgbClr val="FFFFFF"/>
                 </a:solidFill>
               </a:rPr>
-              <a:t>Efficiency</a:t>
+              <a:t>set Courses</a:t>
             </a:r>
             <a:endParaRPr lang="en-US" sz="1300" dirty="0"/>
           </a:p>
@@ -7077,7 +7694,7 @@
         </p:nvSpPr>
         <p:spPr>
           <a:xfrm>
-            <a:off x="3474720" y="3182112"/>
+            <a:off x="3474720" y="3227832"/>
             <a:ext cx="2468880" cy="594360"/>
           </a:xfrm>
           <a:prstGeom prst="rect">
@@ -7094,14 +7711,14 @@
               <a:buNone/>
             </a:pPr>
             <a:r>
-              <a:rPr lang="en-US" sz="1050" dirty="0">
+              <a:rPr lang="en-US" sz="1100" dirty="0">
                 <a:solidFill>
                   <a:srgbClr val="CBD5E1"/>
                 </a:solidFill>
               </a:rPr>
-              <a:t>O(1) delete via swap-with-last + pop_back</a:t>
-            </a:r>
-            <a:endParaRPr lang="en-US" sz="1050" dirty="0"/>
+              <a:t>Auto-sorted, no duplicates</a:t>
+            </a:r>
+            <a:endParaRPr lang="en-US" sz="1100" dirty="0"/>
           </a:p>
         </p:txBody>
       </p:sp>
@@ -7113,8 +7730,8 @@
         </p:nvSpPr>
         <p:spPr>
           <a:xfrm>
-            <a:off x="6263640" y="2560320"/>
-            <a:ext cx="2743200" cy="1325880"/>
+            <a:off x="6263640" y="2587752"/>
+            <a:ext cx="2743200" cy="1353312"/>
           </a:xfrm>
           <a:prstGeom prst="rect">
             <a:avLst/>
@@ -7149,8 +7766,8 @@
         </p:nvSpPr>
         <p:spPr>
           <a:xfrm>
-            <a:off x="6400800" y="2670048"/>
-            <a:ext cx="548640" cy="548640"/>
+            <a:off x="6400800" y="2697480"/>
+            <a:ext cx="502920" cy="502920"/>
           </a:xfrm>
           <a:prstGeom prst="rect">
             <a:avLst/>
@@ -7171,7 +7788,7 @@
                   <a:srgbClr val="000000"/>
                 </a:solidFill>
               </a:rPr>
-              <a:t>📋</a:t>
+              <a:t>★</a:t>
             </a:r>
             <a:endParaRPr lang="en-US" sz="2000" dirty="0"/>
           </a:p>
@@ -7185,8 +7802,8 @@
         </p:nvSpPr>
         <p:spPr>
           <a:xfrm>
-            <a:off x="6949440" y="2651760"/>
-            <a:ext cx="1920240" cy="347472"/>
+            <a:off x="6949440" y="2679192"/>
+            <a:ext cx="1920240" cy="365760"/>
           </a:xfrm>
           <a:prstGeom prst="rect">
             <a:avLst/>
@@ -7207,7 +7824,7 @@
                   <a:srgbClr val="FFFFFF"/>
                 </a:solidFill>
               </a:rPr>
-              <a:t>Libraries</a:t>
+              <a:t>Bonus</a:t>
             </a:r>
             <a:endParaRPr lang="en-US" sz="1300" dirty="0"/>
           </a:p>
@@ -7221,7 +7838,7 @@
         </p:nvSpPr>
         <p:spPr>
           <a:xfrm>
-            <a:off x="6400800" y="3182112"/>
+            <a:off x="6400800" y="3227832"/>
             <a:ext cx="2468880" cy="594360"/>
           </a:xfrm>
           <a:prstGeom prst="rect">
@@ -7238,14 +7855,14 @@
               <a:buNone/>
             </a:pPr>
             <a:r>
-              <a:rPr lang="en-US" sz="1050" dirty="0">
+              <a:rPr lang="en-US" sz="1100" dirty="0">
                 <a:solidFill>
                   <a:srgbClr val="CBD5E1"/>
                 </a:solidFill>
               </a:rPr>
-              <a:t>Only iostream, vector, string — no extra headers</a:t>
-            </a:r>
-            <a:endParaRPr lang="en-US" sz="1050" dirty="0"/>
+              <a:t>count_if for GPA &gt;= 3.0</a:t>
+            </a:r>
+            <a:endParaRPr lang="en-US" sz="1100" dirty="0"/>
           </a:p>
         </p:txBody>
       </p:sp>
